--- a/Http Status Code.pptx
+++ b/Http Status Code.pptx
@@ -2,10 +2,19 @@
 <file path=ppt/presentation.xml><?xml version="1.0" encoding="utf-8"?>
 <p:presentation xmlns:a="http://schemas.openxmlformats.org/drawingml/2006/main" xmlns:r="http://schemas.openxmlformats.org/officeDocument/2006/relationships" xmlns:p="http://schemas.openxmlformats.org/presentationml/2006/main" saveSubsetFonts="1">
   <p:sldMasterIdLst>
-    <p:sldMasterId id="2147483648" r:id="rId1"/>
+    <p:sldMasterId id="2147483660" r:id="rId1"/>
   </p:sldMasterIdLst>
   <p:sldIdLst>
     <p:sldId id="257" r:id="rId2"/>
+    <p:sldId id="258" r:id="rId3"/>
+    <p:sldId id="259" r:id="rId4"/>
+    <p:sldId id="260" r:id="rId5"/>
+    <p:sldId id="261" r:id="rId6"/>
+    <p:sldId id="262" r:id="rId7"/>
+    <p:sldId id="263" r:id="rId8"/>
+    <p:sldId id="264" r:id="rId9"/>
+    <p:sldId id="265" r:id="rId10"/>
+    <p:sldId id="266" r:id="rId11"/>
   </p:sldIdLst>
   <p:sldSz cx="12192000" cy="6858000"/>
   <p:notesSz cx="6858000" cy="9144000"/>
@@ -13,7 +22,7 @@
     <a:defPPr>
       <a:defRPr lang="en-US"/>
     </a:defPPr>
-    <a:lvl1pPr marL="0" algn="l" defTabSz="914400" rtl="0" eaLnBrk="1" latinLnBrk="0" hangingPunct="1">
+    <a:lvl1pPr marL="0" algn="l" defTabSz="457200" rtl="0" eaLnBrk="1" latinLnBrk="0" hangingPunct="1">
       <a:defRPr sz="1800" kern="1200">
         <a:solidFill>
           <a:schemeClr val="tx1"/>
@@ -23,7 +32,7 @@
         <a:cs typeface="+mn-cs"/>
       </a:defRPr>
     </a:lvl1pPr>
-    <a:lvl2pPr marL="457200" algn="l" defTabSz="914400" rtl="0" eaLnBrk="1" latinLnBrk="0" hangingPunct="1">
+    <a:lvl2pPr marL="457200" algn="l" defTabSz="457200" rtl="0" eaLnBrk="1" latinLnBrk="0" hangingPunct="1">
       <a:defRPr sz="1800" kern="1200">
         <a:solidFill>
           <a:schemeClr val="tx1"/>
@@ -33,7 +42,7 @@
         <a:cs typeface="+mn-cs"/>
       </a:defRPr>
     </a:lvl2pPr>
-    <a:lvl3pPr marL="914400" algn="l" defTabSz="914400" rtl="0" eaLnBrk="1" latinLnBrk="0" hangingPunct="1">
+    <a:lvl3pPr marL="914400" algn="l" defTabSz="457200" rtl="0" eaLnBrk="1" latinLnBrk="0" hangingPunct="1">
       <a:defRPr sz="1800" kern="1200">
         <a:solidFill>
           <a:schemeClr val="tx1"/>
@@ -43,7 +52,7 @@
         <a:cs typeface="+mn-cs"/>
       </a:defRPr>
     </a:lvl3pPr>
-    <a:lvl4pPr marL="1371600" algn="l" defTabSz="914400" rtl="0" eaLnBrk="1" latinLnBrk="0" hangingPunct="1">
+    <a:lvl4pPr marL="1371600" algn="l" defTabSz="457200" rtl="0" eaLnBrk="1" latinLnBrk="0" hangingPunct="1">
       <a:defRPr sz="1800" kern="1200">
         <a:solidFill>
           <a:schemeClr val="tx1"/>
@@ -53,7 +62,7 @@
         <a:cs typeface="+mn-cs"/>
       </a:defRPr>
     </a:lvl4pPr>
-    <a:lvl5pPr marL="1828800" algn="l" defTabSz="914400" rtl="0" eaLnBrk="1" latinLnBrk="0" hangingPunct="1">
+    <a:lvl5pPr marL="1828800" algn="l" defTabSz="457200" rtl="0" eaLnBrk="1" latinLnBrk="0" hangingPunct="1">
       <a:defRPr sz="1800" kern="1200">
         <a:solidFill>
           <a:schemeClr val="tx1"/>
@@ -63,7 +72,7 @@
         <a:cs typeface="+mn-cs"/>
       </a:defRPr>
     </a:lvl5pPr>
-    <a:lvl6pPr marL="2286000" algn="l" defTabSz="914400" rtl="0" eaLnBrk="1" latinLnBrk="0" hangingPunct="1">
+    <a:lvl6pPr marL="2286000" algn="l" defTabSz="457200" rtl="0" eaLnBrk="1" latinLnBrk="0" hangingPunct="1">
       <a:defRPr sz="1800" kern="1200">
         <a:solidFill>
           <a:schemeClr val="tx1"/>
@@ -73,7 +82,7 @@
         <a:cs typeface="+mn-cs"/>
       </a:defRPr>
     </a:lvl6pPr>
-    <a:lvl7pPr marL="2743200" algn="l" defTabSz="914400" rtl="0" eaLnBrk="1" latinLnBrk="0" hangingPunct="1">
+    <a:lvl7pPr marL="2743200" algn="l" defTabSz="457200" rtl="0" eaLnBrk="1" latinLnBrk="0" hangingPunct="1">
       <a:defRPr sz="1800" kern="1200">
         <a:solidFill>
           <a:schemeClr val="tx1"/>
@@ -83,7 +92,7 @@
         <a:cs typeface="+mn-cs"/>
       </a:defRPr>
     </a:lvl7pPr>
-    <a:lvl8pPr marL="3200400" algn="l" defTabSz="914400" rtl="0" eaLnBrk="1" latinLnBrk="0" hangingPunct="1">
+    <a:lvl8pPr marL="3200400" algn="l" defTabSz="457200" rtl="0" eaLnBrk="1" latinLnBrk="0" hangingPunct="1">
       <a:defRPr sz="1800" kern="1200">
         <a:solidFill>
           <a:schemeClr val="tx1"/>
@@ -93,7 +102,7 @@
         <a:cs typeface="+mn-cs"/>
       </a:defRPr>
     </a:lvl8pPr>
-    <a:lvl9pPr marL="3657600" algn="l" defTabSz="914400" rtl="0" eaLnBrk="1" latinLnBrk="0" hangingPunct="1">
+    <a:lvl9pPr marL="3657600" algn="l" defTabSz="457200" rtl="0" eaLnBrk="1" latinLnBrk="0" hangingPunct="1">
       <a:defRPr sz="1800" kern="1200">
         <a:solidFill>
           <a:schemeClr val="tx1"/>
@@ -104,11 +113,16 @@
       </a:defRPr>
     </a:lvl9pPr>
   </p:defaultTextStyle>
+  <p:extLst>
+    <p:ext uri="{EFAFB233-063F-42B5-8137-9DF3F51BA10A}">
+      <p15:sldGuideLst xmlns:p15="http://schemas.microsoft.com/office/powerpoint/2012/main"/>
+    </p:ext>
+  </p:extLst>
 </p:presentation>
 </file>
 
 <file path=ppt/slideLayouts/slideLayout1.xml><?xml version="1.0" encoding="utf-8"?>
-<p:sldLayout xmlns:a="http://schemas.openxmlformats.org/drawingml/2006/main" xmlns:r="http://schemas.openxmlformats.org/officeDocument/2006/relationships" xmlns:p="http://schemas.openxmlformats.org/presentationml/2006/main" type="title" preserve="1">
+<p:sldLayout xmlns:a="http://schemas.openxmlformats.org/drawingml/2006/main" xmlns:r="http://schemas.openxmlformats.org/officeDocument/2006/relationships" xmlns:p="http://schemas.openxmlformats.org/presentationml/2006/main" showMasterSp="0" type="title" preserve="1">
   <p:cSld name="Title Slide">
     <p:spTree>
       <p:nvGrpSpPr>
@@ -124,15 +138,146 @@
           <a:chExt cx="0" cy="0"/>
         </a:xfrm>
       </p:grpSpPr>
-      <p:sp>
-        <p:nvSpPr>
-          <p:cNvPr id="2" name="Title 1">
-            <a:extLst>
-              <a:ext uri="{FF2B5EF4-FFF2-40B4-BE49-F238E27FC236}">
-                <a16:creationId xmlns:a16="http://schemas.microsoft.com/office/drawing/2014/main" id="{7EE9067E-B04C-6387-046C-57B2E69C1DAD}"/>
-              </a:ext>
-            </a:extLst>
-          </p:cNvPr>
+      <p:grpSp>
+        <p:nvGrpSpPr>
+          <p:cNvPr id="7" name="Group 6"/>
+          <p:cNvGrpSpPr/>
+          <p:nvPr/>
+        </p:nvGrpSpPr>
+        <p:grpSpPr>
+          <a:xfrm>
+            <a:off x="-16934" y="0"/>
+            <a:ext cx="12231160" cy="6856214"/>
+            <a:chOff x="-16934" y="0"/>
+            <a:chExt cx="12231160" cy="6856214"/>
+          </a:xfrm>
+        </p:grpSpPr>
+        <p:pic>
+          <p:nvPicPr>
+            <p:cNvPr id="16" name="Picture 15" descr="HD-PanelTitleR1.png"/>
+            <p:cNvPicPr>
+              <a:picLocks noChangeAspect="1"/>
+            </p:cNvPicPr>
+            <p:nvPr/>
+          </p:nvPicPr>
+          <p:blipFill>
+            <a:blip r:embed="rId2">
+              <a:extLst>
+                <a:ext uri="{28A0092B-C50C-407E-A947-70E740481C1C}">
+                  <a14:useLocalDpi xmlns:a14="http://schemas.microsoft.com/office/drawing/2010/main" val="0"/>
+                </a:ext>
+              </a:extLst>
+            </a:blip>
+            <a:stretch>
+              <a:fillRect/>
+            </a:stretch>
+          </p:blipFill>
+          <p:spPr>
+            <a:xfrm>
+              <a:off x="0" y="0"/>
+              <a:ext cx="12188825" cy="6856214"/>
+            </a:xfrm>
+            <a:prstGeom prst="rect">
+              <a:avLst/>
+            </a:prstGeom>
+          </p:spPr>
+        </p:pic>
+        <p:sp>
+          <p:nvSpPr>
+            <p:cNvPr id="26" name="Rectangle 25"/>
+            <p:cNvSpPr/>
+            <p:nvPr/>
+          </p:nvSpPr>
+          <p:spPr>
+            <a:xfrm>
+              <a:off x="2328332" y="1540931"/>
+              <a:ext cx="7543802" cy="3835401"/>
+            </a:xfrm>
+            <a:prstGeom prst="rect">
+              <a:avLst/>
+            </a:prstGeom>
+            <a:noFill/>
+            <a:ln w="15875">
+              <a:miter lim="800000"/>
+            </a:ln>
+          </p:spPr>
+          <p:style>
+            <a:lnRef idx="1">
+              <a:schemeClr val="accent1"/>
+            </a:lnRef>
+            <a:fillRef idx="3">
+              <a:schemeClr val="accent1"/>
+            </a:fillRef>
+            <a:effectRef idx="2">
+              <a:schemeClr val="accent1"/>
+            </a:effectRef>
+            <a:fontRef idx="minor">
+              <a:schemeClr val="lt1"/>
+            </a:fontRef>
+          </p:style>
+        </p:sp>
+        <p:pic>
+          <p:nvPicPr>
+            <p:cNvPr id="17" name="Picture 16" descr="HDRibbonTitle-UniformTrim.png"/>
+            <p:cNvPicPr>
+              <a:picLocks noChangeAspect="1"/>
+            </p:cNvPicPr>
+            <p:nvPr/>
+          </p:nvPicPr>
+          <p:blipFill rotWithShape="1">
+            <a:blip r:embed="rId3">
+              <a:extLst>
+                <a:ext uri="{28A0092B-C50C-407E-A947-70E740481C1C}">
+                  <a14:useLocalDpi xmlns:a14="http://schemas.microsoft.com/office/drawing/2010/main" val="0"/>
+                </a:ext>
+              </a:extLst>
+            </a:blip>
+            <a:srcRect/>
+            <a:stretch/>
+          </p:blipFill>
+          <p:spPr>
+            <a:xfrm>
+              <a:off x="-16934" y="3147609"/>
+              <a:ext cx="2478024" cy="612648"/>
+            </a:xfrm>
+            <a:prstGeom prst="rect">
+              <a:avLst/>
+            </a:prstGeom>
+          </p:spPr>
+        </p:pic>
+        <p:pic>
+          <p:nvPicPr>
+            <p:cNvPr id="20" name="Picture 19" descr="HDRibbonTitle-UniformTrim.png"/>
+            <p:cNvPicPr>
+              <a:picLocks noChangeAspect="1"/>
+            </p:cNvPicPr>
+            <p:nvPr/>
+          </p:nvPicPr>
+          <p:blipFill rotWithShape="1">
+            <a:blip r:embed="rId3">
+              <a:extLst>
+                <a:ext uri="{28A0092B-C50C-407E-A947-70E740481C1C}">
+                  <a14:useLocalDpi xmlns:a14="http://schemas.microsoft.com/office/drawing/2010/main" val="0"/>
+                </a:ext>
+              </a:extLst>
+            </a:blip>
+            <a:srcRect/>
+            <a:stretch/>
+          </p:blipFill>
+          <p:spPr>
+            <a:xfrm>
+              <a:off x="9736202" y="3147609"/>
+              <a:ext cx="2478024" cy="612648"/>
+            </a:xfrm>
+            <a:prstGeom prst="rect">
+              <a:avLst/>
+            </a:prstGeom>
+          </p:spPr>
+        </p:pic>
+      </p:grpSp>
+      <p:sp>
+        <p:nvSpPr>
+          <p:cNvPr id="2" name="Title 1"/>
           <p:cNvSpPr>
             <a:spLocks noGrp="1"/>
           </p:cNvSpPr>
@@ -142,15 +287,19 @@
         </p:nvSpPr>
         <p:spPr>
           <a:xfrm>
-            <a:off x="1524000" y="1122363"/>
-            <a:ext cx="9144000" cy="2387600"/>
+            <a:off x="2692398" y="1871131"/>
+            <a:ext cx="6815669" cy="1515533"/>
           </a:xfrm>
         </p:spPr>
         <p:txBody>
-          <a:bodyPr anchor="b"/>
+          <a:bodyPr anchor="b">
+            <a:noAutofit/>
+          </a:bodyPr>
           <a:lstStyle>
             <a:lvl1pPr algn="ctr">
-              <a:defRPr sz="6000"/>
+              <a:defRPr sz="5400">
+                <a:effectLst/>
+              </a:defRPr>
             </a:lvl1pPr>
           </a:lstStyle>
           <a:p>
@@ -158,18 +307,13 @@
               <a:rPr lang="en-US"/>
               <a:t>Click to edit Master title style</a:t>
             </a:r>
-          </a:p>
-        </p:txBody>
-      </p:sp>
-      <p:sp>
-        <p:nvSpPr>
-          <p:cNvPr id="3" name="Subtitle 2">
-            <a:extLst>
-              <a:ext uri="{FF2B5EF4-FFF2-40B4-BE49-F238E27FC236}">
-                <a16:creationId xmlns:a16="http://schemas.microsoft.com/office/drawing/2014/main" id="{1BCC77B3-38AD-9BFC-AB85-E60A895ED11C}"/>
-              </a:ext>
-            </a:extLst>
-          </p:cNvPr>
+            <a:endParaRPr lang="en-US" dirty="0"/>
+          </a:p>
+        </p:txBody>
+      </p:sp>
+      <p:sp>
+        <p:nvSpPr>
+          <p:cNvPr id="3" name="Subtitle 2"/>
           <p:cNvSpPr>
             <a:spLocks noGrp="1"/>
           </p:cNvSpPr>
@@ -179,48 +323,102 @@
         </p:nvSpPr>
         <p:spPr>
           <a:xfrm>
-            <a:off x="1524000" y="3602038"/>
-            <a:ext cx="9144000" cy="1655762"/>
+            <a:off x="2692398" y="3657597"/>
+            <a:ext cx="6815669" cy="1320802"/>
           </a:xfrm>
         </p:spPr>
         <p:txBody>
-          <a:bodyPr/>
+          <a:bodyPr anchor="t">
+            <a:normAutofit/>
+          </a:bodyPr>
           <a:lstStyle>
             <a:lvl1pPr marL="0" indent="0" algn="ctr">
               <a:buNone/>
-              <a:defRPr sz="2400"/>
+              <a:defRPr sz="2100">
+                <a:solidFill>
+                  <a:schemeClr val="tx1"/>
+                </a:solidFill>
+              </a:defRPr>
             </a:lvl1pPr>
             <a:lvl2pPr marL="457200" indent="0" algn="ctr">
               <a:buNone/>
-              <a:defRPr sz="2000"/>
+              <a:defRPr>
+                <a:solidFill>
+                  <a:schemeClr val="tx1">
+                    <a:tint val="75000"/>
+                  </a:schemeClr>
+                </a:solidFill>
+              </a:defRPr>
             </a:lvl2pPr>
             <a:lvl3pPr marL="914400" indent="0" algn="ctr">
               <a:buNone/>
-              <a:defRPr sz="1800"/>
+              <a:defRPr>
+                <a:solidFill>
+                  <a:schemeClr val="tx1">
+                    <a:tint val="75000"/>
+                  </a:schemeClr>
+                </a:solidFill>
+              </a:defRPr>
             </a:lvl3pPr>
             <a:lvl4pPr marL="1371600" indent="0" algn="ctr">
               <a:buNone/>
-              <a:defRPr sz="1600"/>
+              <a:defRPr>
+                <a:solidFill>
+                  <a:schemeClr val="tx1">
+                    <a:tint val="75000"/>
+                  </a:schemeClr>
+                </a:solidFill>
+              </a:defRPr>
             </a:lvl4pPr>
             <a:lvl5pPr marL="1828800" indent="0" algn="ctr">
               <a:buNone/>
-              <a:defRPr sz="1600"/>
+              <a:defRPr>
+                <a:solidFill>
+                  <a:schemeClr val="tx1">
+                    <a:tint val="75000"/>
+                  </a:schemeClr>
+                </a:solidFill>
+              </a:defRPr>
             </a:lvl5pPr>
             <a:lvl6pPr marL="2286000" indent="0" algn="ctr">
               <a:buNone/>
-              <a:defRPr sz="1600"/>
+              <a:defRPr>
+                <a:solidFill>
+                  <a:schemeClr val="tx1">
+                    <a:tint val="75000"/>
+                  </a:schemeClr>
+                </a:solidFill>
+              </a:defRPr>
             </a:lvl6pPr>
             <a:lvl7pPr marL="2743200" indent="0" algn="ctr">
               <a:buNone/>
-              <a:defRPr sz="1600"/>
+              <a:defRPr>
+                <a:solidFill>
+                  <a:schemeClr val="tx1">
+                    <a:tint val="75000"/>
+                  </a:schemeClr>
+                </a:solidFill>
+              </a:defRPr>
             </a:lvl7pPr>
             <a:lvl8pPr marL="3200400" indent="0" algn="ctr">
               <a:buNone/>
-              <a:defRPr sz="1600"/>
+              <a:defRPr>
+                <a:solidFill>
+                  <a:schemeClr val="tx1">
+                    <a:tint val="75000"/>
+                  </a:schemeClr>
+                </a:solidFill>
+              </a:defRPr>
             </a:lvl8pPr>
             <a:lvl9pPr marL="3657600" indent="0" algn="ctr">
               <a:buNone/>
-              <a:defRPr sz="1600"/>
+              <a:defRPr>
+                <a:solidFill>
+                  <a:schemeClr val="tx1">
+                    <a:tint val="75000"/>
+                  </a:schemeClr>
+                </a:solidFill>
+              </a:defRPr>
             </a:lvl9pPr>
           </a:lstStyle>
           <a:p>
@@ -228,18 +426,13 @@
               <a:rPr lang="en-US"/>
               <a:t>Click to edit Master subtitle style</a:t>
             </a:r>
-          </a:p>
-        </p:txBody>
-      </p:sp>
-      <p:sp>
-        <p:nvSpPr>
-          <p:cNvPr id="4" name="Date Placeholder 3">
-            <a:extLst>
-              <a:ext uri="{FF2B5EF4-FFF2-40B4-BE49-F238E27FC236}">
-                <a16:creationId xmlns:a16="http://schemas.microsoft.com/office/drawing/2014/main" id="{83BE49CC-E0FE-FBBD-821F-6B1FB6E5B73F}"/>
-              </a:ext>
-            </a:extLst>
-          </p:cNvPr>
+            <a:endParaRPr lang="en-US" dirty="0"/>
+          </a:p>
+        </p:txBody>
+      </p:sp>
+      <p:sp>
+        <p:nvSpPr>
+          <p:cNvPr id="4" name="Date Placeholder 3"/>
           <p:cNvSpPr>
             <a:spLocks noGrp="1"/>
           </p:cNvSpPr>
@@ -247,14 +440,19 @@
             <p:ph type="dt" sz="half" idx="10"/>
           </p:nvPr>
         </p:nvSpPr>
-        <p:spPr/>
+        <p:spPr>
+          <a:xfrm>
+            <a:off x="7983232" y="5037663"/>
+            <a:ext cx="897467" cy="279400"/>
+          </a:xfrm>
+        </p:spPr>
         <p:txBody>
           <a:bodyPr/>
           <a:lstStyle/>
           <a:p>
             <a:fld id="{770ACC15-3B6C-44B3-9657-2837D8130729}" type="datetimeFigureOut">
               <a:rPr lang="en-US" smtClean="0"/>
-              <a:t>3/4/2026</a:t>
+              <a:t>3/5/2026</a:t>
             </a:fld>
             <a:endParaRPr lang="en-US"/>
           </a:p>
@@ -262,13 +460,7 @@
       </p:sp>
       <p:sp>
         <p:nvSpPr>
-          <p:cNvPr id="5" name="Footer Placeholder 4">
-            <a:extLst>
-              <a:ext uri="{FF2B5EF4-FFF2-40B4-BE49-F238E27FC236}">
-                <a16:creationId xmlns:a16="http://schemas.microsoft.com/office/drawing/2014/main" id="{3F0708BB-2323-E4C6-748F-2DFECD3EC39F}"/>
-              </a:ext>
-            </a:extLst>
-          </p:cNvPr>
+          <p:cNvPr id="5" name="Footer Placeholder 4"/>
           <p:cNvSpPr>
             <a:spLocks noGrp="1"/>
           </p:cNvSpPr>
@@ -276,7 +468,12 @@
             <p:ph type="ftr" sz="quarter" idx="11"/>
           </p:nvPr>
         </p:nvSpPr>
-        <p:spPr/>
+        <p:spPr>
+          <a:xfrm>
+            <a:off x="2692397" y="5037663"/>
+            <a:ext cx="5214635" cy="279400"/>
+          </a:xfrm>
+        </p:spPr>
         <p:txBody>
           <a:bodyPr/>
           <a:lstStyle/>
@@ -287,13 +484,7 @@
       </p:sp>
       <p:sp>
         <p:nvSpPr>
-          <p:cNvPr id="6" name="Slide Number Placeholder 5">
-            <a:extLst>
-              <a:ext uri="{FF2B5EF4-FFF2-40B4-BE49-F238E27FC236}">
-                <a16:creationId xmlns:a16="http://schemas.microsoft.com/office/drawing/2014/main" id="{EA4D3651-1938-B19F-65BC-57CB6A9F57D8}"/>
-              </a:ext>
-            </a:extLst>
-          </p:cNvPr>
+          <p:cNvPr id="6" name="Slide Number Placeholder 5"/>
           <p:cNvSpPr>
             <a:spLocks noGrp="1"/>
           </p:cNvSpPr>
@@ -301,7 +492,12 @@
             <p:ph type="sldNum" sz="quarter" idx="12"/>
           </p:nvPr>
         </p:nvSpPr>
-        <p:spPr/>
+        <p:spPr>
+          <a:xfrm>
+            <a:off x="8956900" y="5037663"/>
+            <a:ext cx="551167" cy="279400"/>
+          </a:xfrm>
+        </p:spPr>
         <p:txBody>
           <a:bodyPr/>
           <a:lstStyle/>
@@ -314,10 +510,40 @@
           </a:p>
         </p:txBody>
       </p:sp>
+      <p:cxnSp>
+        <p:nvCxnSpPr>
+          <p:cNvPr id="15" name="Straight Connector 14"/>
+          <p:cNvCxnSpPr/>
+          <p:nvPr/>
+        </p:nvCxnSpPr>
+        <p:spPr>
+          <a:xfrm>
+            <a:off x="2692399" y="3522131"/>
+            <a:ext cx="6815668" cy="0"/>
+          </a:xfrm>
+          <a:prstGeom prst="line">
+            <a:avLst/>
+          </a:prstGeom>
+        </p:spPr>
+        <p:style>
+          <a:lnRef idx="2">
+            <a:schemeClr val="accent1"/>
+          </a:lnRef>
+          <a:fillRef idx="0">
+            <a:schemeClr val="accent1"/>
+          </a:fillRef>
+          <a:effectRef idx="1">
+            <a:schemeClr val="accent1"/>
+          </a:effectRef>
+          <a:fontRef idx="minor">
+            <a:schemeClr val="tx1"/>
+          </a:fontRef>
+        </p:style>
+      </p:cxnSp>
     </p:spTree>
     <p:extLst>
       <p:ext uri="{BB962C8B-B14F-4D97-AF65-F5344CB8AC3E}">
-        <p14:creationId xmlns:p14="http://schemas.microsoft.com/office/powerpoint/2010/main" val="4117228853"/>
+        <p14:creationId xmlns:p14="http://schemas.microsoft.com/office/powerpoint/2010/main" val="3530481610"/>
       </p:ext>
     </p:extLst>
   </p:cSld>
@@ -328,6 +554,2099 @@
 </file>
 
 <file path=ppt/slideLayouts/slideLayout10.xml><?xml version="1.0" encoding="utf-8"?>
+<p:sldLayout xmlns:a="http://schemas.openxmlformats.org/drawingml/2006/main" xmlns:r="http://schemas.openxmlformats.org/officeDocument/2006/relationships" xmlns:p="http://schemas.openxmlformats.org/presentationml/2006/main" preserve="1">
+  <p:cSld name="Panoramic Picture with Caption">
+    <p:spTree>
+      <p:nvGrpSpPr>
+        <p:cNvPr id="1" name=""/>
+        <p:cNvGrpSpPr/>
+        <p:nvPr/>
+      </p:nvGrpSpPr>
+      <p:grpSpPr>
+        <a:xfrm>
+          <a:off x="0" y="0"/>
+          <a:ext cx="0" cy="0"/>
+          <a:chOff x="0" y="0"/>
+          <a:chExt cx="0" cy="0"/>
+        </a:xfrm>
+      </p:grpSpPr>
+      <p:sp>
+        <p:nvSpPr>
+          <p:cNvPr id="2" name="Title 1"/>
+          <p:cNvSpPr>
+            <a:spLocks noGrp="1"/>
+          </p:cNvSpPr>
+          <p:nvPr>
+            <p:ph type="title"/>
+          </p:nvPr>
+        </p:nvSpPr>
+        <p:spPr>
+          <a:xfrm>
+            <a:off x="1295401" y="4815415"/>
+            <a:ext cx="9609666" cy="566738"/>
+          </a:xfrm>
+        </p:spPr>
+        <p:txBody>
+          <a:bodyPr anchor="b">
+            <a:normAutofit/>
+          </a:bodyPr>
+          <a:lstStyle>
+            <a:lvl1pPr algn="ctr">
+              <a:defRPr sz="2400" b="0"/>
+            </a:lvl1pPr>
+          </a:lstStyle>
+          <a:p>
+            <a:r>
+              <a:rPr lang="en-US"/>
+              <a:t>Click to edit Master title style</a:t>
+            </a:r>
+            <a:endParaRPr lang="en-US" dirty="0"/>
+          </a:p>
+        </p:txBody>
+      </p:sp>
+      <p:sp>
+        <p:nvSpPr>
+          <p:cNvPr id="3" name="Picture Placeholder 2"/>
+          <p:cNvSpPr>
+            <a:spLocks noGrp="1" noChangeAspect="1"/>
+          </p:cNvSpPr>
+          <p:nvPr>
+            <p:ph type="pic" idx="1"/>
+          </p:nvPr>
+        </p:nvSpPr>
+        <p:spPr>
+          <a:xfrm>
+            <a:off x="1041427" y="1041399"/>
+            <a:ext cx="10105972" cy="3335869"/>
+          </a:xfrm>
+          <a:prstGeom prst="roundRect">
+            <a:avLst>
+              <a:gd name="adj" fmla="val 0"/>
+            </a:avLst>
+          </a:prstGeom>
+          <a:ln w="57150" cmpd="thickThin">
+            <a:solidFill>
+              <a:schemeClr val="tx1">
+                <a:lumMod val="50000"/>
+                <a:lumOff val="50000"/>
+              </a:schemeClr>
+            </a:solidFill>
+            <a:miter lim="800000"/>
+          </a:ln>
+          <a:effectLst>
+            <a:innerShdw blurRad="57150" dist="38100" dir="14460000">
+              <a:srgbClr val="000000">
+                <a:alpha val="70000"/>
+              </a:srgbClr>
+            </a:innerShdw>
+          </a:effectLst>
+        </p:spPr>
+        <p:txBody>
+          <a:bodyPr anchor="t">
+            <a:normAutofit/>
+          </a:bodyPr>
+          <a:lstStyle>
+            <a:lvl1pPr marL="0" indent="0" algn="ctr">
+              <a:buNone/>
+              <a:defRPr sz="1600"/>
+            </a:lvl1pPr>
+            <a:lvl2pPr marL="457200" indent="0">
+              <a:buNone/>
+              <a:defRPr sz="1600"/>
+            </a:lvl2pPr>
+            <a:lvl3pPr marL="914400" indent="0">
+              <a:buNone/>
+              <a:defRPr sz="1600"/>
+            </a:lvl3pPr>
+            <a:lvl4pPr marL="1371600" indent="0">
+              <a:buNone/>
+              <a:defRPr sz="1600"/>
+            </a:lvl4pPr>
+            <a:lvl5pPr marL="1828800" indent="0">
+              <a:buNone/>
+              <a:defRPr sz="1600"/>
+            </a:lvl5pPr>
+            <a:lvl6pPr marL="2286000" indent="0">
+              <a:buNone/>
+              <a:defRPr sz="1600"/>
+            </a:lvl6pPr>
+            <a:lvl7pPr marL="2743200" indent="0">
+              <a:buNone/>
+              <a:defRPr sz="1600"/>
+            </a:lvl7pPr>
+            <a:lvl8pPr marL="3200400" indent="0">
+              <a:buNone/>
+              <a:defRPr sz="1600"/>
+            </a:lvl8pPr>
+            <a:lvl9pPr marL="3657600" indent="0">
+              <a:buNone/>
+              <a:defRPr sz="1600"/>
+            </a:lvl9pPr>
+          </a:lstStyle>
+          <a:p>
+            <a:r>
+              <a:rPr lang="en-US"/>
+              <a:t>Click icon to add picture</a:t>
+            </a:r>
+            <a:endParaRPr lang="en-US" dirty="0"/>
+          </a:p>
+        </p:txBody>
+      </p:sp>
+      <p:sp>
+        <p:nvSpPr>
+          <p:cNvPr id="4" name="Text Placeholder 3"/>
+          <p:cNvSpPr>
+            <a:spLocks noGrp="1"/>
+          </p:cNvSpPr>
+          <p:nvPr>
+            <p:ph type="body" sz="half" idx="2"/>
+          </p:nvPr>
+        </p:nvSpPr>
+        <p:spPr>
+          <a:xfrm>
+            <a:off x="1295401" y="5382153"/>
+            <a:ext cx="9609666" cy="493712"/>
+          </a:xfrm>
+        </p:spPr>
+        <p:txBody>
+          <a:bodyPr>
+            <a:normAutofit/>
+          </a:bodyPr>
+          <a:lstStyle>
+            <a:lvl1pPr marL="0" indent="0" algn="ctr">
+              <a:buNone/>
+              <a:defRPr sz="1400"/>
+            </a:lvl1pPr>
+            <a:lvl2pPr marL="457200" indent="0">
+              <a:buNone/>
+              <a:defRPr sz="1200"/>
+            </a:lvl2pPr>
+            <a:lvl3pPr marL="914400" indent="0">
+              <a:buNone/>
+              <a:defRPr sz="1000"/>
+            </a:lvl3pPr>
+            <a:lvl4pPr marL="1371600" indent="0">
+              <a:buNone/>
+              <a:defRPr sz="900"/>
+            </a:lvl4pPr>
+            <a:lvl5pPr marL="1828800" indent="0">
+              <a:buNone/>
+              <a:defRPr sz="900"/>
+            </a:lvl5pPr>
+            <a:lvl6pPr marL="2286000" indent="0">
+              <a:buNone/>
+              <a:defRPr sz="900"/>
+            </a:lvl6pPr>
+            <a:lvl7pPr marL="2743200" indent="0">
+              <a:buNone/>
+              <a:defRPr sz="900"/>
+            </a:lvl7pPr>
+            <a:lvl8pPr marL="3200400" indent="0">
+              <a:buNone/>
+              <a:defRPr sz="900"/>
+            </a:lvl8pPr>
+            <a:lvl9pPr marL="3657600" indent="0">
+              <a:buNone/>
+              <a:defRPr sz="900"/>
+            </a:lvl9pPr>
+          </a:lstStyle>
+          <a:p>
+            <a:pPr lvl="0"/>
+            <a:r>
+              <a:rPr lang="en-US"/>
+              <a:t>Click to edit Master text styles</a:t>
+            </a:r>
+          </a:p>
+        </p:txBody>
+      </p:sp>
+      <p:sp>
+        <p:nvSpPr>
+          <p:cNvPr id="5" name="Date Placeholder 4"/>
+          <p:cNvSpPr>
+            <a:spLocks noGrp="1"/>
+          </p:cNvSpPr>
+          <p:nvPr>
+            <p:ph type="dt" sz="half" idx="10"/>
+          </p:nvPr>
+        </p:nvSpPr>
+        <p:spPr/>
+        <p:txBody>
+          <a:bodyPr/>
+          <a:lstStyle/>
+          <a:p>
+            <a:fld id="{770ACC15-3B6C-44B3-9657-2837D8130729}" type="datetimeFigureOut">
+              <a:rPr lang="en-US" smtClean="0"/>
+              <a:t>3/5/2026</a:t>
+            </a:fld>
+            <a:endParaRPr lang="en-US"/>
+          </a:p>
+        </p:txBody>
+      </p:sp>
+      <p:sp>
+        <p:nvSpPr>
+          <p:cNvPr id="6" name="Footer Placeholder 5"/>
+          <p:cNvSpPr>
+            <a:spLocks noGrp="1"/>
+          </p:cNvSpPr>
+          <p:nvPr>
+            <p:ph type="ftr" sz="quarter" idx="11"/>
+          </p:nvPr>
+        </p:nvSpPr>
+        <p:spPr/>
+        <p:txBody>
+          <a:bodyPr/>
+          <a:lstStyle/>
+          <a:p>
+            <a:endParaRPr lang="en-US"/>
+          </a:p>
+        </p:txBody>
+      </p:sp>
+      <p:sp>
+        <p:nvSpPr>
+          <p:cNvPr id="7" name="Slide Number Placeholder 6"/>
+          <p:cNvSpPr>
+            <a:spLocks noGrp="1"/>
+          </p:cNvSpPr>
+          <p:nvPr>
+            <p:ph type="sldNum" sz="quarter" idx="12"/>
+          </p:nvPr>
+        </p:nvSpPr>
+        <p:spPr/>
+        <p:txBody>
+          <a:bodyPr/>
+          <a:lstStyle/>
+          <a:p>
+            <a:fld id="{C9EEC56A-39DF-4CEE-89D3-17DF44EFA9DE}" type="slidenum">
+              <a:rPr lang="en-US" smtClean="0"/>
+              <a:t>‹#›</a:t>
+            </a:fld>
+            <a:endParaRPr lang="en-US"/>
+          </a:p>
+        </p:txBody>
+      </p:sp>
+    </p:spTree>
+    <p:extLst>
+      <p:ext uri="{BB962C8B-B14F-4D97-AF65-F5344CB8AC3E}">
+        <p14:creationId xmlns:p14="http://schemas.microsoft.com/office/powerpoint/2010/main" val="3256448756"/>
+      </p:ext>
+    </p:extLst>
+  </p:cSld>
+  <p:clrMapOvr>
+    <a:masterClrMapping/>
+  </p:clrMapOvr>
+</p:sldLayout>
+</file>
+
+<file path=ppt/slideLayouts/slideLayout11.xml><?xml version="1.0" encoding="utf-8"?>
+<p:sldLayout xmlns:a="http://schemas.openxmlformats.org/drawingml/2006/main" xmlns:r="http://schemas.openxmlformats.org/officeDocument/2006/relationships" xmlns:p="http://schemas.openxmlformats.org/presentationml/2006/main" preserve="1">
+  <p:cSld name="Title and Caption">
+    <p:spTree>
+      <p:nvGrpSpPr>
+        <p:cNvPr id="1" name=""/>
+        <p:cNvGrpSpPr/>
+        <p:nvPr/>
+      </p:nvGrpSpPr>
+      <p:grpSpPr>
+        <a:xfrm>
+          <a:off x="0" y="0"/>
+          <a:ext cx="0" cy="0"/>
+          <a:chOff x="0" y="0"/>
+          <a:chExt cx="0" cy="0"/>
+        </a:xfrm>
+      </p:grpSpPr>
+      <p:sp>
+        <p:nvSpPr>
+          <p:cNvPr id="2" name="Title 1"/>
+          <p:cNvSpPr>
+            <a:spLocks noGrp="1"/>
+          </p:cNvSpPr>
+          <p:nvPr>
+            <p:ph type="title"/>
+          </p:nvPr>
+        </p:nvSpPr>
+        <p:spPr>
+          <a:xfrm>
+            <a:off x="1303868" y="982132"/>
+            <a:ext cx="9592732" cy="2954868"/>
+          </a:xfrm>
+        </p:spPr>
+        <p:txBody>
+          <a:bodyPr anchor="ctr">
+            <a:normAutofit/>
+          </a:bodyPr>
+          <a:lstStyle>
+            <a:lvl1pPr algn="ctr">
+              <a:defRPr sz="3200" b="0" cap="none"/>
+            </a:lvl1pPr>
+          </a:lstStyle>
+          <a:p>
+            <a:r>
+              <a:rPr lang="en-US"/>
+              <a:t>Click to edit Master title style</a:t>
+            </a:r>
+            <a:endParaRPr lang="en-US" dirty="0"/>
+          </a:p>
+        </p:txBody>
+      </p:sp>
+      <p:sp>
+        <p:nvSpPr>
+          <p:cNvPr id="3" name="Text Placeholder 2"/>
+          <p:cNvSpPr>
+            <a:spLocks noGrp="1"/>
+          </p:cNvSpPr>
+          <p:nvPr>
+            <p:ph type="body" idx="1"/>
+          </p:nvPr>
+        </p:nvSpPr>
+        <p:spPr>
+          <a:xfrm>
+            <a:off x="1303868" y="4343399"/>
+            <a:ext cx="9592732" cy="1532467"/>
+          </a:xfrm>
+        </p:spPr>
+        <p:txBody>
+          <a:bodyPr anchor="ctr">
+            <a:normAutofit/>
+          </a:bodyPr>
+          <a:lstStyle>
+            <a:lvl1pPr marL="0" indent="0" algn="ctr">
+              <a:buNone/>
+              <a:defRPr sz="2000">
+                <a:solidFill>
+                  <a:schemeClr val="tx1"/>
+                </a:solidFill>
+              </a:defRPr>
+            </a:lvl1pPr>
+            <a:lvl2pPr marL="457200" indent="0">
+              <a:buNone/>
+              <a:defRPr sz="1800">
+                <a:solidFill>
+                  <a:schemeClr val="tx1">
+                    <a:tint val="75000"/>
+                  </a:schemeClr>
+                </a:solidFill>
+              </a:defRPr>
+            </a:lvl2pPr>
+            <a:lvl3pPr marL="914400" indent="0">
+              <a:buNone/>
+              <a:defRPr sz="1600">
+                <a:solidFill>
+                  <a:schemeClr val="tx1">
+                    <a:tint val="75000"/>
+                  </a:schemeClr>
+                </a:solidFill>
+              </a:defRPr>
+            </a:lvl3pPr>
+            <a:lvl4pPr marL="1371600" indent="0">
+              <a:buNone/>
+              <a:defRPr sz="1400">
+                <a:solidFill>
+                  <a:schemeClr val="tx1">
+                    <a:tint val="75000"/>
+                  </a:schemeClr>
+                </a:solidFill>
+              </a:defRPr>
+            </a:lvl4pPr>
+            <a:lvl5pPr marL="1828800" indent="0">
+              <a:buNone/>
+              <a:defRPr sz="1400">
+                <a:solidFill>
+                  <a:schemeClr val="tx1">
+                    <a:tint val="75000"/>
+                  </a:schemeClr>
+                </a:solidFill>
+              </a:defRPr>
+            </a:lvl5pPr>
+            <a:lvl6pPr marL="2286000" indent="0">
+              <a:buNone/>
+              <a:defRPr sz="1400">
+                <a:solidFill>
+                  <a:schemeClr val="tx1">
+                    <a:tint val="75000"/>
+                  </a:schemeClr>
+                </a:solidFill>
+              </a:defRPr>
+            </a:lvl6pPr>
+            <a:lvl7pPr marL="2743200" indent="0">
+              <a:buNone/>
+              <a:defRPr sz="1400">
+                <a:solidFill>
+                  <a:schemeClr val="tx1">
+                    <a:tint val="75000"/>
+                  </a:schemeClr>
+                </a:solidFill>
+              </a:defRPr>
+            </a:lvl7pPr>
+            <a:lvl8pPr marL="3200400" indent="0">
+              <a:buNone/>
+              <a:defRPr sz="1400">
+                <a:solidFill>
+                  <a:schemeClr val="tx1">
+                    <a:tint val="75000"/>
+                  </a:schemeClr>
+                </a:solidFill>
+              </a:defRPr>
+            </a:lvl8pPr>
+            <a:lvl9pPr marL="3657600" indent="0">
+              <a:buNone/>
+              <a:defRPr sz="1400">
+                <a:solidFill>
+                  <a:schemeClr val="tx1">
+                    <a:tint val="75000"/>
+                  </a:schemeClr>
+                </a:solidFill>
+              </a:defRPr>
+            </a:lvl9pPr>
+          </a:lstStyle>
+          <a:p>
+            <a:pPr lvl="0"/>
+            <a:r>
+              <a:rPr lang="en-US"/>
+              <a:t>Click to edit Master text styles</a:t>
+            </a:r>
+          </a:p>
+        </p:txBody>
+      </p:sp>
+      <p:sp>
+        <p:nvSpPr>
+          <p:cNvPr id="4" name="Date Placeholder 3"/>
+          <p:cNvSpPr>
+            <a:spLocks noGrp="1"/>
+          </p:cNvSpPr>
+          <p:nvPr>
+            <p:ph type="dt" sz="half" idx="10"/>
+          </p:nvPr>
+        </p:nvSpPr>
+        <p:spPr/>
+        <p:txBody>
+          <a:bodyPr/>
+          <a:lstStyle/>
+          <a:p>
+            <a:fld id="{770ACC15-3B6C-44B3-9657-2837D8130729}" type="datetimeFigureOut">
+              <a:rPr lang="en-US" smtClean="0"/>
+              <a:t>3/5/2026</a:t>
+            </a:fld>
+            <a:endParaRPr lang="en-US"/>
+          </a:p>
+        </p:txBody>
+      </p:sp>
+      <p:sp>
+        <p:nvSpPr>
+          <p:cNvPr id="5" name="Footer Placeholder 4"/>
+          <p:cNvSpPr>
+            <a:spLocks noGrp="1"/>
+          </p:cNvSpPr>
+          <p:nvPr>
+            <p:ph type="ftr" sz="quarter" idx="11"/>
+          </p:nvPr>
+        </p:nvSpPr>
+        <p:spPr/>
+        <p:txBody>
+          <a:bodyPr/>
+          <a:lstStyle/>
+          <a:p>
+            <a:endParaRPr lang="en-US"/>
+          </a:p>
+        </p:txBody>
+      </p:sp>
+      <p:sp>
+        <p:nvSpPr>
+          <p:cNvPr id="6" name="Slide Number Placeholder 5"/>
+          <p:cNvSpPr>
+            <a:spLocks noGrp="1"/>
+          </p:cNvSpPr>
+          <p:nvPr>
+            <p:ph type="sldNum" sz="quarter" idx="12"/>
+          </p:nvPr>
+        </p:nvSpPr>
+        <p:spPr/>
+        <p:txBody>
+          <a:bodyPr/>
+          <a:lstStyle/>
+          <a:p>
+            <a:fld id="{C9EEC56A-39DF-4CEE-89D3-17DF44EFA9DE}" type="slidenum">
+              <a:rPr lang="en-US" smtClean="0"/>
+              <a:t>‹#›</a:t>
+            </a:fld>
+            <a:endParaRPr lang="en-US"/>
+          </a:p>
+        </p:txBody>
+      </p:sp>
+      <p:cxnSp>
+        <p:nvCxnSpPr>
+          <p:cNvPr id="15" name="Straight Connector 14"/>
+          <p:cNvCxnSpPr/>
+          <p:nvPr/>
+        </p:nvCxnSpPr>
+        <p:spPr>
+          <a:xfrm>
+            <a:off x="1396169" y="4140199"/>
+            <a:ext cx="9407298" cy="0"/>
+          </a:xfrm>
+          <a:prstGeom prst="line">
+            <a:avLst/>
+          </a:prstGeom>
+          <a:ln w="15875"/>
+        </p:spPr>
+        <p:style>
+          <a:lnRef idx="2">
+            <a:schemeClr val="accent1"/>
+          </a:lnRef>
+          <a:fillRef idx="0">
+            <a:schemeClr val="accent1"/>
+          </a:fillRef>
+          <a:effectRef idx="1">
+            <a:schemeClr val="accent1"/>
+          </a:effectRef>
+          <a:fontRef idx="minor">
+            <a:schemeClr val="tx1"/>
+          </a:fontRef>
+        </p:style>
+      </p:cxnSp>
+    </p:spTree>
+    <p:extLst>
+      <p:ext uri="{BB962C8B-B14F-4D97-AF65-F5344CB8AC3E}">
+        <p14:creationId xmlns:p14="http://schemas.microsoft.com/office/powerpoint/2010/main" val="3490098276"/>
+      </p:ext>
+    </p:extLst>
+  </p:cSld>
+  <p:clrMapOvr>
+    <a:masterClrMapping/>
+  </p:clrMapOvr>
+</p:sldLayout>
+</file>
+
+<file path=ppt/slideLayouts/slideLayout12.xml><?xml version="1.0" encoding="utf-8"?>
+<p:sldLayout xmlns:a="http://schemas.openxmlformats.org/drawingml/2006/main" xmlns:r="http://schemas.openxmlformats.org/officeDocument/2006/relationships" xmlns:p="http://schemas.openxmlformats.org/presentationml/2006/main" preserve="1">
+  <p:cSld name="Quote with Caption">
+    <p:spTree>
+      <p:nvGrpSpPr>
+        <p:cNvPr id="1" name=""/>
+        <p:cNvGrpSpPr/>
+        <p:nvPr/>
+      </p:nvGrpSpPr>
+      <p:grpSpPr>
+        <a:xfrm>
+          <a:off x="0" y="0"/>
+          <a:ext cx="0" cy="0"/>
+          <a:chOff x="0" y="0"/>
+          <a:chExt cx="0" cy="0"/>
+        </a:xfrm>
+      </p:grpSpPr>
+      <p:sp>
+        <p:nvSpPr>
+          <p:cNvPr id="2" name="Title 1"/>
+          <p:cNvSpPr>
+            <a:spLocks noGrp="1"/>
+          </p:cNvSpPr>
+          <p:nvPr>
+            <p:ph type="title"/>
+          </p:nvPr>
+        </p:nvSpPr>
+        <p:spPr>
+          <a:xfrm>
+            <a:off x="1446213" y="982132"/>
+            <a:ext cx="9296398" cy="2370668"/>
+          </a:xfrm>
+        </p:spPr>
+        <p:txBody>
+          <a:bodyPr anchor="ctr">
+            <a:normAutofit/>
+          </a:bodyPr>
+          <a:lstStyle>
+            <a:lvl1pPr algn="ctr">
+              <a:defRPr sz="3200" b="0" cap="none">
+                <a:solidFill>
+                  <a:schemeClr val="tx1"/>
+                </a:solidFill>
+              </a:defRPr>
+            </a:lvl1pPr>
+          </a:lstStyle>
+          <a:p>
+            <a:r>
+              <a:rPr lang="en-US"/>
+              <a:t>Click to edit Master title style</a:t>
+            </a:r>
+            <a:endParaRPr lang="en-US" dirty="0"/>
+          </a:p>
+        </p:txBody>
+      </p:sp>
+      <p:sp>
+        <p:nvSpPr>
+          <p:cNvPr id="10" name="Text Placeholder 9"/>
+          <p:cNvSpPr>
+            <a:spLocks noGrp="1"/>
+          </p:cNvSpPr>
+          <p:nvPr>
+            <p:ph type="body" sz="quarter" idx="13"/>
+          </p:nvPr>
+        </p:nvSpPr>
+        <p:spPr>
+          <a:xfrm>
+            <a:off x="1674812" y="3352800"/>
+            <a:ext cx="8839202" cy="584200"/>
+          </a:xfrm>
+        </p:spPr>
+        <p:txBody>
+          <a:bodyPr anchor="ctr">
+            <a:normAutofit/>
+          </a:bodyPr>
+          <a:lstStyle>
+            <a:lvl1pPr marL="0" indent="0" algn="r">
+              <a:buFontTx/>
+              <a:buNone/>
+              <a:defRPr sz="2000"/>
+            </a:lvl1pPr>
+            <a:lvl2pPr marL="457200" indent="0">
+              <a:buFontTx/>
+              <a:buNone/>
+              <a:defRPr/>
+            </a:lvl2pPr>
+            <a:lvl3pPr marL="914400" indent="0">
+              <a:buFontTx/>
+              <a:buNone/>
+              <a:defRPr/>
+            </a:lvl3pPr>
+            <a:lvl4pPr marL="1371600" indent="0">
+              <a:buFontTx/>
+              <a:buNone/>
+              <a:defRPr/>
+            </a:lvl4pPr>
+            <a:lvl5pPr marL="1828800" indent="0">
+              <a:buFontTx/>
+              <a:buNone/>
+              <a:defRPr/>
+            </a:lvl5pPr>
+          </a:lstStyle>
+          <a:p>
+            <a:pPr lvl="0"/>
+            <a:r>
+              <a:rPr lang="en-US"/>
+              <a:t>Click to edit Master text styles</a:t>
+            </a:r>
+          </a:p>
+        </p:txBody>
+      </p:sp>
+      <p:sp>
+        <p:nvSpPr>
+          <p:cNvPr id="3" name="Text Placeholder 2"/>
+          <p:cNvSpPr>
+            <a:spLocks noGrp="1"/>
+          </p:cNvSpPr>
+          <p:nvPr>
+            <p:ph type="body" idx="1"/>
+          </p:nvPr>
+        </p:nvSpPr>
+        <p:spPr>
+          <a:xfrm>
+            <a:off x="1295401" y="4343399"/>
+            <a:ext cx="9609666" cy="1532467"/>
+          </a:xfrm>
+        </p:spPr>
+        <p:txBody>
+          <a:bodyPr anchor="ctr">
+            <a:normAutofit/>
+          </a:bodyPr>
+          <a:lstStyle>
+            <a:lvl1pPr marL="0" indent="0" algn="ctr">
+              <a:buNone/>
+              <a:defRPr sz="2000">
+                <a:solidFill>
+                  <a:schemeClr val="tx1"/>
+                </a:solidFill>
+              </a:defRPr>
+            </a:lvl1pPr>
+            <a:lvl2pPr marL="457200" indent="0">
+              <a:buNone/>
+              <a:defRPr sz="1800">
+                <a:solidFill>
+                  <a:schemeClr val="tx1">
+                    <a:tint val="75000"/>
+                  </a:schemeClr>
+                </a:solidFill>
+              </a:defRPr>
+            </a:lvl2pPr>
+            <a:lvl3pPr marL="914400" indent="0">
+              <a:buNone/>
+              <a:defRPr sz="1600">
+                <a:solidFill>
+                  <a:schemeClr val="tx1">
+                    <a:tint val="75000"/>
+                  </a:schemeClr>
+                </a:solidFill>
+              </a:defRPr>
+            </a:lvl3pPr>
+            <a:lvl4pPr marL="1371600" indent="0">
+              <a:buNone/>
+              <a:defRPr sz="1400">
+                <a:solidFill>
+                  <a:schemeClr val="tx1">
+                    <a:tint val="75000"/>
+                  </a:schemeClr>
+                </a:solidFill>
+              </a:defRPr>
+            </a:lvl4pPr>
+            <a:lvl5pPr marL="1828800" indent="0">
+              <a:buNone/>
+              <a:defRPr sz="1400">
+                <a:solidFill>
+                  <a:schemeClr val="tx1">
+                    <a:tint val="75000"/>
+                  </a:schemeClr>
+                </a:solidFill>
+              </a:defRPr>
+            </a:lvl5pPr>
+            <a:lvl6pPr marL="2286000" indent="0">
+              <a:buNone/>
+              <a:defRPr sz="1400">
+                <a:solidFill>
+                  <a:schemeClr val="tx1">
+                    <a:tint val="75000"/>
+                  </a:schemeClr>
+                </a:solidFill>
+              </a:defRPr>
+            </a:lvl6pPr>
+            <a:lvl7pPr marL="2743200" indent="0">
+              <a:buNone/>
+              <a:defRPr sz="1400">
+                <a:solidFill>
+                  <a:schemeClr val="tx1">
+                    <a:tint val="75000"/>
+                  </a:schemeClr>
+                </a:solidFill>
+              </a:defRPr>
+            </a:lvl7pPr>
+            <a:lvl8pPr marL="3200400" indent="0">
+              <a:buNone/>
+              <a:defRPr sz="1400">
+                <a:solidFill>
+                  <a:schemeClr val="tx1">
+                    <a:tint val="75000"/>
+                  </a:schemeClr>
+                </a:solidFill>
+              </a:defRPr>
+            </a:lvl8pPr>
+            <a:lvl9pPr marL="3657600" indent="0">
+              <a:buNone/>
+              <a:defRPr sz="1400">
+                <a:solidFill>
+                  <a:schemeClr val="tx1">
+                    <a:tint val="75000"/>
+                  </a:schemeClr>
+                </a:solidFill>
+              </a:defRPr>
+            </a:lvl9pPr>
+          </a:lstStyle>
+          <a:p>
+            <a:pPr lvl="0"/>
+            <a:r>
+              <a:rPr lang="en-US"/>
+              <a:t>Click to edit Master text styles</a:t>
+            </a:r>
+          </a:p>
+        </p:txBody>
+      </p:sp>
+      <p:sp>
+        <p:nvSpPr>
+          <p:cNvPr id="4" name="Date Placeholder 3"/>
+          <p:cNvSpPr>
+            <a:spLocks noGrp="1"/>
+          </p:cNvSpPr>
+          <p:nvPr>
+            <p:ph type="dt" sz="half" idx="10"/>
+          </p:nvPr>
+        </p:nvSpPr>
+        <p:spPr/>
+        <p:txBody>
+          <a:bodyPr/>
+          <a:lstStyle/>
+          <a:p>
+            <a:fld id="{770ACC15-3B6C-44B3-9657-2837D8130729}" type="datetimeFigureOut">
+              <a:rPr lang="en-US" smtClean="0"/>
+              <a:t>3/5/2026</a:t>
+            </a:fld>
+            <a:endParaRPr lang="en-US"/>
+          </a:p>
+        </p:txBody>
+      </p:sp>
+      <p:sp>
+        <p:nvSpPr>
+          <p:cNvPr id="5" name="Footer Placeholder 4"/>
+          <p:cNvSpPr>
+            <a:spLocks noGrp="1"/>
+          </p:cNvSpPr>
+          <p:nvPr>
+            <p:ph type="ftr" sz="quarter" idx="11"/>
+          </p:nvPr>
+        </p:nvSpPr>
+        <p:spPr/>
+        <p:txBody>
+          <a:bodyPr/>
+          <a:lstStyle/>
+          <a:p>
+            <a:endParaRPr lang="en-US"/>
+          </a:p>
+        </p:txBody>
+      </p:sp>
+      <p:sp>
+        <p:nvSpPr>
+          <p:cNvPr id="6" name="Slide Number Placeholder 5"/>
+          <p:cNvSpPr>
+            <a:spLocks noGrp="1"/>
+          </p:cNvSpPr>
+          <p:nvPr>
+            <p:ph type="sldNum" sz="quarter" idx="12"/>
+          </p:nvPr>
+        </p:nvSpPr>
+        <p:spPr/>
+        <p:txBody>
+          <a:bodyPr/>
+          <a:lstStyle/>
+          <a:p>
+            <a:fld id="{C9EEC56A-39DF-4CEE-89D3-17DF44EFA9DE}" type="slidenum">
+              <a:rPr lang="en-US" smtClean="0"/>
+              <a:t>‹#›</a:t>
+            </a:fld>
+            <a:endParaRPr lang="en-US"/>
+          </a:p>
+        </p:txBody>
+      </p:sp>
+      <p:sp>
+        <p:nvSpPr>
+          <p:cNvPr id="14" name="TextBox 13"/>
+          <p:cNvSpPr txBox="1"/>
+          <p:nvPr/>
+        </p:nvSpPr>
+        <p:spPr>
+          <a:xfrm>
+            <a:off x="862013" y="879961"/>
+            <a:ext cx="609600" cy="584776"/>
+          </a:xfrm>
+          <a:prstGeom prst="rect">
+            <a:avLst/>
+          </a:prstGeom>
+        </p:spPr>
+        <p:txBody>
+          <a:bodyPr vert="horz" lIns="91440" tIns="45720" rIns="91440" bIns="45720" rtlCol="0" anchor="ctr">
+            <a:noAutofit/>
+          </a:bodyPr>
+          <a:lstStyle/>
+          <a:p>
+            <a:pPr lvl="0"/>
+            <a:r>
+              <a:rPr lang="en-US" sz="8000" dirty="0">
+                <a:solidFill>
+                  <a:schemeClr val="tx1"/>
+                </a:solidFill>
+                <a:effectLst/>
+              </a:rPr>
+              <a:t>“</a:t>
+            </a:r>
+          </a:p>
+        </p:txBody>
+      </p:sp>
+      <p:sp>
+        <p:nvSpPr>
+          <p:cNvPr id="15" name="TextBox 14"/>
+          <p:cNvSpPr txBox="1"/>
+          <p:nvPr/>
+        </p:nvSpPr>
+        <p:spPr>
+          <a:xfrm>
+            <a:off x="10600267" y="2827870"/>
+            <a:ext cx="609600" cy="584776"/>
+          </a:xfrm>
+          <a:prstGeom prst="rect">
+            <a:avLst/>
+          </a:prstGeom>
+        </p:spPr>
+        <p:txBody>
+          <a:bodyPr vert="horz" lIns="91440" tIns="45720" rIns="91440" bIns="45720" rtlCol="0" anchor="ctr">
+            <a:noAutofit/>
+          </a:bodyPr>
+          <a:lstStyle/>
+          <a:p>
+            <a:pPr lvl="0" algn="r"/>
+            <a:r>
+              <a:rPr lang="en-US" sz="8000" dirty="0">
+                <a:solidFill>
+                  <a:schemeClr val="tx1"/>
+                </a:solidFill>
+                <a:effectLst/>
+              </a:rPr>
+              <a:t>”</a:t>
+            </a:r>
+          </a:p>
+        </p:txBody>
+      </p:sp>
+      <p:cxnSp>
+        <p:nvCxnSpPr>
+          <p:cNvPr id="19" name="Straight Connector 18"/>
+          <p:cNvCxnSpPr/>
+          <p:nvPr/>
+        </p:nvCxnSpPr>
+        <p:spPr>
+          <a:xfrm>
+            <a:off x="1396169" y="4140199"/>
+            <a:ext cx="9407298" cy="0"/>
+          </a:xfrm>
+          <a:prstGeom prst="line">
+            <a:avLst/>
+          </a:prstGeom>
+          <a:ln w="15875"/>
+        </p:spPr>
+        <p:style>
+          <a:lnRef idx="2">
+            <a:schemeClr val="accent1"/>
+          </a:lnRef>
+          <a:fillRef idx="0">
+            <a:schemeClr val="accent1"/>
+          </a:fillRef>
+          <a:effectRef idx="1">
+            <a:schemeClr val="accent1"/>
+          </a:effectRef>
+          <a:fontRef idx="minor">
+            <a:schemeClr val="tx1"/>
+          </a:fontRef>
+        </p:style>
+      </p:cxnSp>
+    </p:spTree>
+    <p:extLst>
+      <p:ext uri="{BB962C8B-B14F-4D97-AF65-F5344CB8AC3E}">
+        <p14:creationId xmlns:p14="http://schemas.microsoft.com/office/powerpoint/2010/main" val="2998594176"/>
+      </p:ext>
+    </p:extLst>
+  </p:cSld>
+  <p:clrMapOvr>
+    <a:masterClrMapping/>
+  </p:clrMapOvr>
+</p:sldLayout>
+</file>
+
+<file path=ppt/slideLayouts/slideLayout13.xml><?xml version="1.0" encoding="utf-8"?>
+<p:sldLayout xmlns:a="http://schemas.openxmlformats.org/drawingml/2006/main" xmlns:r="http://schemas.openxmlformats.org/officeDocument/2006/relationships" xmlns:p="http://schemas.openxmlformats.org/presentationml/2006/main" preserve="1">
+  <p:cSld name="Name Card">
+    <p:spTree>
+      <p:nvGrpSpPr>
+        <p:cNvPr id="1" name=""/>
+        <p:cNvGrpSpPr/>
+        <p:nvPr/>
+      </p:nvGrpSpPr>
+      <p:grpSpPr>
+        <a:xfrm>
+          <a:off x="0" y="0"/>
+          <a:ext cx="0" cy="0"/>
+          <a:chOff x="0" y="0"/>
+          <a:chExt cx="0" cy="0"/>
+        </a:xfrm>
+      </p:grpSpPr>
+      <p:sp>
+        <p:nvSpPr>
+          <p:cNvPr id="2" name="Title 1"/>
+          <p:cNvSpPr>
+            <a:spLocks noGrp="1"/>
+          </p:cNvSpPr>
+          <p:nvPr>
+            <p:ph type="title"/>
+          </p:nvPr>
+        </p:nvSpPr>
+        <p:spPr>
+          <a:xfrm>
+            <a:off x="1295402" y="3308581"/>
+            <a:ext cx="9609668" cy="1468800"/>
+          </a:xfrm>
+        </p:spPr>
+        <p:txBody>
+          <a:bodyPr anchor="b">
+            <a:normAutofit/>
+          </a:bodyPr>
+          <a:lstStyle>
+            <a:lvl1pPr algn="l">
+              <a:defRPr sz="3200" b="0" cap="none"/>
+            </a:lvl1pPr>
+          </a:lstStyle>
+          <a:p>
+            <a:r>
+              <a:rPr lang="en-US"/>
+              <a:t>Click to edit Master title style</a:t>
+            </a:r>
+            <a:endParaRPr lang="en-US" dirty="0"/>
+          </a:p>
+        </p:txBody>
+      </p:sp>
+      <p:sp>
+        <p:nvSpPr>
+          <p:cNvPr id="3" name="Text Placeholder 2"/>
+          <p:cNvSpPr>
+            <a:spLocks noGrp="1"/>
+          </p:cNvSpPr>
+          <p:nvPr>
+            <p:ph type="body" idx="1"/>
+          </p:nvPr>
+        </p:nvSpPr>
+        <p:spPr>
+          <a:xfrm>
+            <a:off x="1295401" y="4777381"/>
+            <a:ext cx="9609668" cy="860400"/>
+          </a:xfrm>
+        </p:spPr>
+        <p:txBody>
+          <a:bodyPr anchor="t">
+            <a:normAutofit/>
+          </a:bodyPr>
+          <a:lstStyle>
+            <a:lvl1pPr marL="0" indent="0" algn="l">
+              <a:buNone/>
+              <a:defRPr sz="2000">
+                <a:solidFill>
+                  <a:schemeClr val="tx1"/>
+                </a:solidFill>
+              </a:defRPr>
+            </a:lvl1pPr>
+            <a:lvl2pPr marL="457200" indent="0">
+              <a:buNone/>
+              <a:defRPr sz="1800">
+                <a:solidFill>
+                  <a:schemeClr val="tx1">
+                    <a:tint val="75000"/>
+                  </a:schemeClr>
+                </a:solidFill>
+              </a:defRPr>
+            </a:lvl2pPr>
+            <a:lvl3pPr marL="914400" indent="0">
+              <a:buNone/>
+              <a:defRPr sz="1600">
+                <a:solidFill>
+                  <a:schemeClr val="tx1">
+                    <a:tint val="75000"/>
+                  </a:schemeClr>
+                </a:solidFill>
+              </a:defRPr>
+            </a:lvl3pPr>
+            <a:lvl4pPr marL="1371600" indent="0">
+              <a:buNone/>
+              <a:defRPr sz="1400">
+                <a:solidFill>
+                  <a:schemeClr val="tx1">
+                    <a:tint val="75000"/>
+                  </a:schemeClr>
+                </a:solidFill>
+              </a:defRPr>
+            </a:lvl4pPr>
+            <a:lvl5pPr marL="1828800" indent="0">
+              <a:buNone/>
+              <a:defRPr sz="1400">
+                <a:solidFill>
+                  <a:schemeClr val="tx1">
+                    <a:tint val="75000"/>
+                  </a:schemeClr>
+                </a:solidFill>
+              </a:defRPr>
+            </a:lvl5pPr>
+            <a:lvl6pPr marL="2286000" indent="0">
+              <a:buNone/>
+              <a:defRPr sz="1400">
+                <a:solidFill>
+                  <a:schemeClr val="tx1">
+                    <a:tint val="75000"/>
+                  </a:schemeClr>
+                </a:solidFill>
+              </a:defRPr>
+            </a:lvl6pPr>
+            <a:lvl7pPr marL="2743200" indent="0">
+              <a:buNone/>
+              <a:defRPr sz="1400">
+                <a:solidFill>
+                  <a:schemeClr val="tx1">
+                    <a:tint val="75000"/>
+                  </a:schemeClr>
+                </a:solidFill>
+              </a:defRPr>
+            </a:lvl7pPr>
+            <a:lvl8pPr marL="3200400" indent="0">
+              <a:buNone/>
+              <a:defRPr sz="1400">
+                <a:solidFill>
+                  <a:schemeClr val="tx1">
+                    <a:tint val="75000"/>
+                  </a:schemeClr>
+                </a:solidFill>
+              </a:defRPr>
+            </a:lvl8pPr>
+            <a:lvl9pPr marL="3657600" indent="0">
+              <a:buNone/>
+              <a:defRPr sz="1400">
+                <a:solidFill>
+                  <a:schemeClr val="tx1">
+                    <a:tint val="75000"/>
+                  </a:schemeClr>
+                </a:solidFill>
+              </a:defRPr>
+            </a:lvl9pPr>
+          </a:lstStyle>
+          <a:p>
+            <a:pPr lvl="0"/>
+            <a:r>
+              <a:rPr lang="en-US"/>
+              <a:t>Click to edit Master text styles</a:t>
+            </a:r>
+          </a:p>
+        </p:txBody>
+      </p:sp>
+      <p:sp>
+        <p:nvSpPr>
+          <p:cNvPr id="4" name="Date Placeholder 3"/>
+          <p:cNvSpPr>
+            <a:spLocks noGrp="1"/>
+          </p:cNvSpPr>
+          <p:nvPr>
+            <p:ph type="dt" sz="half" idx="10"/>
+          </p:nvPr>
+        </p:nvSpPr>
+        <p:spPr/>
+        <p:txBody>
+          <a:bodyPr/>
+          <a:lstStyle/>
+          <a:p>
+            <a:fld id="{770ACC15-3B6C-44B3-9657-2837D8130729}" type="datetimeFigureOut">
+              <a:rPr lang="en-US" smtClean="0"/>
+              <a:t>3/5/2026</a:t>
+            </a:fld>
+            <a:endParaRPr lang="en-US"/>
+          </a:p>
+        </p:txBody>
+      </p:sp>
+      <p:sp>
+        <p:nvSpPr>
+          <p:cNvPr id="5" name="Footer Placeholder 4"/>
+          <p:cNvSpPr>
+            <a:spLocks noGrp="1"/>
+          </p:cNvSpPr>
+          <p:nvPr>
+            <p:ph type="ftr" sz="quarter" idx="11"/>
+          </p:nvPr>
+        </p:nvSpPr>
+        <p:spPr/>
+        <p:txBody>
+          <a:bodyPr/>
+          <a:lstStyle/>
+          <a:p>
+            <a:endParaRPr lang="en-US"/>
+          </a:p>
+        </p:txBody>
+      </p:sp>
+      <p:sp>
+        <p:nvSpPr>
+          <p:cNvPr id="6" name="Slide Number Placeholder 5"/>
+          <p:cNvSpPr>
+            <a:spLocks noGrp="1"/>
+          </p:cNvSpPr>
+          <p:nvPr>
+            <p:ph type="sldNum" sz="quarter" idx="12"/>
+          </p:nvPr>
+        </p:nvSpPr>
+        <p:spPr/>
+        <p:txBody>
+          <a:bodyPr/>
+          <a:lstStyle/>
+          <a:p>
+            <a:fld id="{C9EEC56A-39DF-4CEE-89D3-17DF44EFA9DE}" type="slidenum">
+              <a:rPr lang="en-US" smtClean="0"/>
+              <a:t>‹#›</a:t>
+            </a:fld>
+            <a:endParaRPr lang="en-US"/>
+          </a:p>
+        </p:txBody>
+      </p:sp>
+    </p:spTree>
+    <p:extLst>
+      <p:ext uri="{BB962C8B-B14F-4D97-AF65-F5344CB8AC3E}">
+        <p14:creationId xmlns:p14="http://schemas.microsoft.com/office/powerpoint/2010/main" val="3128965155"/>
+      </p:ext>
+    </p:extLst>
+  </p:cSld>
+  <p:clrMapOvr>
+    <a:masterClrMapping/>
+  </p:clrMapOvr>
+</p:sldLayout>
+</file>
+
+<file path=ppt/slideLayouts/slideLayout14.xml><?xml version="1.0" encoding="utf-8"?>
+<p:sldLayout xmlns:a="http://schemas.openxmlformats.org/drawingml/2006/main" xmlns:r="http://schemas.openxmlformats.org/officeDocument/2006/relationships" xmlns:p="http://schemas.openxmlformats.org/presentationml/2006/main" preserve="1">
+  <p:cSld name="Quote Name Card">
+    <p:spTree>
+      <p:nvGrpSpPr>
+        <p:cNvPr id="1" name=""/>
+        <p:cNvGrpSpPr/>
+        <p:nvPr/>
+      </p:nvGrpSpPr>
+      <p:grpSpPr>
+        <a:xfrm>
+          <a:off x="0" y="0"/>
+          <a:ext cx="0" cy="0"/>
+          <a:chOff x="0" y="0"/>
+          <a:chExt cx="0" cy="0"/>
+        </a:xfrm>
+      </p:grpSpPr>
+      <p:sp>
+        <p:nvSpPr>
+          <p:cNvPr id="2" name="Title 1"/>
+          <p:cNvSpPr>
+            <a:spLocks noGrp="1"/>
+          </p:cNvSpPr>
+          <p:nvPr>
+            <p:ph type="title"/>
+          </p:nvPr>
+        </p:nvSpPr>
+        <p:spPr>
+          <a:xfrm>
+            <a:off x="1446213" y="982132"/>
+            <a:ext cx="9296398" cy="2243668"/>
+          </a:xfrm>
+        </p:spPr>
+        <p:txBody>
+          <a:bodyPr anchor="ctr">
+            <a:normAutofit/>
+          </a:bodyPr>
+          <a:lstStyle>
+            <a:lvl1pPr algn="ctr">
+              <a:defRPr sz="3200" b="0" cap="none">
+                <a:solidFill>
+                  <a:schemeClr val="tx1"/>
+                </a:solidFill>
+              </a:defRPr>
+            </a:lvl1pPr>
+          </a:lstStyle>
+          <a:p>
+            <a:r>
+              <a:rPr lang="en-US"/>
+              <a:t>Click to edit Master title style</a:t>
+            </a:r>
+            <a:endParaRPr lang="en-US" dirty="0"/>
+          </a:p>
+        </p:txBody>
+      </p:sp>
+      <p:sp>
+        <p:nvSpPr>
+          <p:cNvPr id="23" name="Text Placeholder 2"/>
+          <p:cNvSpPr>
+            <a:spLocks noGrp="1"/>
+          </p:cNvSpPr>
+          <p:nvPr>
+            <p:ph type="body" idx="13"/>
+          </p:nvPr>
+        </p:nvSpPr>
+        <p:spPr>
+          <a:xfrm>
+            <a:off x="1295401" y="3639312"/>
+            <a:ext cx="9609668" cy="886968"/>
+          </a:xfrm>
+        </p:spPr>
+        <p:txBody>
+          <a:bodyPr anchor="b">
+            <a:normAutofit/>
+          </a:bodyPr>
+          <a:lstStyle>
+            <a:lvl1pPr marL="0" indent="0" algn="l">
+              <a:spcBef>
+                <a:spcPts val="0"/>
+              </a:spcBef>
+              <a:buNone/>
+              <a:defRPr sz="2400">
+                <a:solidFill>
+                  <a:schemeClr val="tx1"/>
+                </a:solidFill>
+              </a:defRPr>
+            </a:lvl1pPr>
+            <a:lvl2pPr marL="457200" indent="0">
+              <a:buNone/>
+              <a:defRPr sz="1800">
+                <a:solidFill>
+                  <a:schemeClr val="tx1">
+                    <a:tint val="75000"/>
+                  </a:schemeClr>
+                </a:solidFill>
+              </a:defRPr>
+            </a:lvl2pPr>
+            <a:lvl3pPr marL="914400" indent="0">
+              <a:buNone/>
+              <a:defRPr sz="1600">
+                <a:solidFill>
+                  <a:schemeClr val="tx1">
+                    <a:tint val="75000"/>
+                  </a:schemeClr>
+                </a:solidFill>
+              </a:defRPr>
+            </a:lvl3pPr>
+            <a:lvl4pPr marL="1371600" indent="0">
+              <a:buNone/>
+              <a:defRPr sz="1400">
+                <a:solidFill>
+                  <a:schemeClr val="tx1">
+                    <a:tint val="75000"/>
+                  </a:schemeClr>
+                </a:solidFill>
+              </a:defRPr>
+            </a:lvl4pPr>
+            <a:lvl5pPr marL="1828800" indent="0">
+              <a:buNone/>
+              <a:defRPr sz="1400">
+                <a:solidFill>
+                  <a:schemeClr val="tx1">
+                    <a:tint val="75000"/>
+                  </a:schemeClr>
+                </a:solidFill>
+              </a:defRPr>
+            </a:lvl5pPr>
+            <a:lvl6pPr marL="2286000" indent="0">
+              <a:buNone/>
+              <a:defRPr sz="1400">
+                <a:solidFill>
+                  <a:schemeClr val="tx1">
+                    <a:tint val="75000"/>
+                  </a:schemeClr>
+                </a:solidFill>
+              </a:defRPr>
+            </a:lvl6pPr>
+            <a:lvl7pPr marL="2743200" indent="0">
+              <a:buNone/>
+              <a:defRPr sz="1400">
+                <a:solidFill>
+                  <a:schemeClr val="tx1">
+                    <a:tint val="75000"/>
+                  </a:schemeClr>
+                </a:solidFill>
+              </a:defRPr>
+            </a:lvl7pPr>
+            <a:lvl8pPr marL="3200400" indent="0">
+              <a:buNone/>
+              <a:defRPr sz="1400">
+                <a:solidFill>
+                  <a:schemeClr val="tx1">
+                    <a:tint val="75000"/>
+                  </a:schemeClr>
+                </a:solidFill>
+              </a:defRPr>
+            </a:lvl8pPr>
+            <a:lvl9pPr marL="3657600" indent="0">
+              <a:buNone/>
+              <a:defRPr sz="1400">
+                <a:solidFill>
+                  <a:schemeClr val="tx1">
+                    <a:tint val="75000"/>
+                  </a:schemeClr>
+                </a:solidFill>
+              </a:defRPr>
+            </a:lvl9pPr>
+          </a:lstStyle>
+          <a:p>
+            <a:pPr lvl="0"/>
+            <a:r>
+              <a:rPr lang="en-US"/>
+              <a:t>Click to edit Master text styles</a:t>
+            </a:r>
+          </a:p>
+        </p:txBody>
+      </p:sp>
+      <p:sp>
+        <p:nvSpPr>
+          <p:cNvPr id="3" name="Text Placeholder 2"/>
+          <p:cNvSpPr>
+            <a:spLocks noGrp="1"/>
+          </p:cNvSpPr>
+          <p:nvPr>
+            <p:ph type="body" idx="1"/>
+          </p:nvPr>
+        </p:nvSpPr>
+        <p:spPr>
+          <a:xfrm>
+            <a:off x="1295401" y="4529667"/>
+            <a:ext cx="9609668" cy="1346200"/>
+          </a:xfrm>
+        </p:spPr>
+        <p:txBody>
+          <a:bodyPr anchor="t">
+            <a:normAutofit/>
+          </a:bodyPr>
+          <a:lstStyle>
+            <a:lvl1pPr marL="0" indent="0" algn="l">
+              <a:buNone/>
+              <a:defRPr sz="1800">
+                <a:solidFill>
+                  <a:schemeClr val="tx1"/>
+                </a:solidFill>
+              </a:defRPr>
+            </a:lvl1pPr>
+            <a:lvl2pPr marL="457200" indent="0">
+              <a:buNone/>
+              <a:defRPr sz="1800">
+                <a:solidFill>
+                  <a:schemeClr val="tx1">
+                    <a:tint val="75000"/>
+                  </a:schemeClr>
+                </a:solidFill>
+              </a:defRPr>
+            </a:lvl2pPr>
+            <a:lvl3pPr marL="914400" indent="0">
+              <a:buNone/>
+              <a:defRPr sz="1600">
+                <a:solidFill>
+                  <a:schemeClr val="tx1">
+                    <a:tint val="75000"/>
+                  </a:schemeClr>
+                </a:solidFill>
+              </a:defRPr>
+            </a:lvl3pPr>
+            <a:lvl4pPr marL="1371600" indent="0">
+              <a:buNone/>
+              <a:defRPr sz="1400">
+                <a:solidFill>
+                  <a:schemeClr val="tx1">
+                    <a:tint val="75000"/>
+                  </a:schemeClr>
+                </a:solidFill>
+              </a:defRPr>
+            </a:lvl4pPr>
+            <a:lvl5pPr marL="1828800" indent="0">
+              <a:buNone/>
+              <a:defRPr sz="1400">
+                <a:solidFill>
+                  <a:schemeClr val="tx1">
+                    <a:tint val="75000"/>
+                  </a:schemeClr>
+                </a:solidFill>
+              </a:defRPr>
+            </a:lvl5pPr>
+            <a:lvl6pPr marL="2286000" indent="0">
+              <a:buNone/>
+              <a:defRPr sz="1400">
+                <a:solidFill>
+                  <a:schemeClr val="tx1">
+                    <a:tint val="75000"/>
+                  </a:schemeClr>
+                </a:solidFill>
+              </a:defRPr>
+            </a:lvl6pPr>
+            <a:lvl7pPr marL="2743200" indent="0">
+              <a:buNone/>
+              <a:defRPr sz="1400">
+                <a:solidFill>
+                  <a:schemeClr val="tx1">
+                    <a:tint val="75000"/>
+                  </a:schemeClr>
+                </a:solidFill>
+              </a:defRPr>
+            </a:lvl7pPr>
+            <a:lvl8pPr marL="3200400" indent="0">
+              <a:buNone/>
+              <a:defRPr sz="1400">
+                <a:solidFill>
+                  <a:schemeClr val="tx1">
+                    <a:tint val="75000"/>
+                  </a:schemeClr>
+                </a:solidFill>
+              </a:defRPr>
+            </a:lvl8pPr>
+            <a:lvl9pPr marL="3657600" indent="0">
+              <a:buNone/>
+              <a:defRPr sz="1400">
+                <a:solidFill>
+                  <a:schemeClr val="tx1">
+                    <a:tint val="75000"/>
+                  </a:schemeClr>
+                </a:solidFill>
+              </a:defRPr>
+            </a:lvl9pPr>
+          </a:lstStyle>
+          <a:p>
+            <a:pPr lvl="0"/>
+            <a:r>
+              <a:rPr lang="en-US"/>
+              <a:t>Click to edit Master text styles</a:t>
+            </a:r>
+          </a:p>
+        </p:txBody>
+      </p:sp>
+      <p:sp>
+        <p:nvSpPr>
+          <p:cNvPr id="4" name="Date Placeholder 3"/>
+          <p:cNvSpPr>
+            <a:spLocks noGrp="1"/>
+          </p:cNvSpPr>
+          <p:nvPr>
+            <p:ph type="dt" sz="half" idx="10"/>
+          </p:nvPr>
+        </p:nvSpPr>
+        <p:spPr/>
+        <p:txBody>
+          <a:bodyPr/>
+          <a:lstStyle/>
+          <a:p>
+            <a:fld id="{770ACC15-3B6C-44B3-9657-2837D8130729}" type="datetimeFigureOut">
+              <a:rPr lang="en-US" smtClean="0"/>
+              <a:t>3/5/2026</a:t>
+            </a:fld>
+            <a:endParaRPr lang="en-US"/>
+          </a:p>
+        </p:txBody>
+      </p:sp>
+      <p:sp>
+        <p:nvSpPr>
+          <p:cNvPr id="5" name="Footer Placeholder 4"/>
+          <p:cNvSpPr>
+            <a:spLocks noGrp="1"/>
+          </p:cNvSpPr>
+          <p:nvPr>
+            <p:ph type="ftr" sz="quarter" idx="11"/>
+          </p:nvPr>
+        </p:nvSpPr>
+        <p:spPr/>
+        <p:txBody>
+          <a:bodyPr/>
+          <a:lstStyle/>
+          <a:p>
+            <a:endParaRPr lang="en-US"/>
+          </a:p>
+        </p:txBody>
+      </p:sp>
+      <p:sp>
+        <p:nvSpPr>
+          <p:cNvPr id="6" name="Slide Number Placeholder 5"/>
+          <p:cNvSpPr>
+            <a:spLocks noGrp="1"/>
+          </p:cNvSpPr>
+          <p:nvPr>
+            <p:ph type="sldNum" sz="quarter" idx="12"/>
+          </p:nvPr>
+        </p:nvSpPr>
+        <p:spPr/>
+        <p:txBody>
+          <a:bodyPr/>
+          <a:lstStyle/>
+          <a:p>
+            <a:fld id="{C9EEC56A-39DF-4CEE-89D3-17DF44EFA9DE}" type="slidenum">
+              <a:rPr lang="en-US" smtClean="0"/>
+              <a:t>‹#›</a:t>
+            </a:fld>
+            <a:endParaRPr lang="en-US"/>
+          </a:p>
+        </p:txBody>
+      </p:sp>
+      <p:sp>
+        <p:nvSpPr>
+          <p:cNvPr id="12" name="TextBox 11"/>
+          <p:cNvSpPr txBox="1"/>
+          <p:nvPr/>
+        </p:nvSpPr>
+        <p:spPr>
+          <a:xfrm>
+            <a:off x="862013" y="879961"/>
+            <a:ext cx="609600" cy="584776"/>
+          </a:xfrm>
+          <a:prstGeom prst="rect">
+            <a:avLst/>
+          </a:prstGeom>
+        </p:spPr>
+        <p:txBody>
+          <a:bodyPr vert="horz" lIns="91440" tIns="45720" rIns="91440" bIns="45720" rtlCol="0" anchor="ctr">
+            <a:noAutofit/>
+          </a:bodyPr>
+          <a:lstStyle/>
+          <a:p>
+            <a:pPr lvl="0"/>
+            <a:r>
+              <a:rPr lang="en-US" sz="8000" dirty="0">
+                <a:solidFill>
+                  <a:schemeClr val="tx1"/>
+                </a:solidFill>
+                <a:effectLst/>
+              </a:rPr>
+              <a:t>“</a:t>
+            </a:r>
+          </a:p>
+        </p:txBody>
+      </p:sp>
+      <p:sp>
+        <p:nvSpPr>
+          <p:cNvPr id="13" name="TextBox 12"/>
+          <p:cNvSpPr txBox="1"/>
+          <p:nvPr/>
+        </p:nvSpPr>
+        <p:spPr>
+          <a:xfrm>
+            <a:off x="10600267" y="2599261"/>
+            <a:ext cx="609600" cy="584776"/>
+          </a:xfrm>
+          <a:prstGeom prst="rect">
+            <a:avLst/>
+          </a:prstGeom>
+        </p:spPr>
+        <p:txBody>
+          <a:bodyPr vert="horz" lIns="91440" tIns="45720" rIns="91440" bIns="45720" rtlCol="0" anchor="ctr">
+            <a:noAutofit/>
+          </a:bodyPr>
+          <a:lstStyle/>
+          <a:p>
+            <a:pPr lvl="0" algn="r"/>
+            <a:r>
+              <a:rPr lang="en-US" sz="8000" dirty="0">
+                <a:solidFill>
+                  <a:schemeClr val="tx1"/>
+                </a:solidFill>
+                <a:effectLst/>
+              </a:rPr>
+              <a:t>”</a:t>
+            </a:r>
+          </a:p>
+        </p:txBody>
+      </p:sp>
+      <p:cxnSp>
+        <p:nvCxnSpPr>
+          <p:cNvPr id="26" name="Straight Connector 25"/>
+          <p:cNvCxnSpPr/>
+          <p:nvPr/>
+        </p:nvCxnSpPr>
+        <p:spPr>
+          <a:xfrm>
+            <a:off x="1396169" y="3429000"/>
+            <a:ext cx="9407298" cy="0"/>
+          </a:xfrm>
+          <a:prstGeom prst="line">
+            <a:avLst/>
+          </a:prstGeom>
+          <a:ln w="15875"/>
+        </p:spPr>
+        <p:style>
+          <a:lnRef idx="2">
+            <a:schemeClr val="accent1"/>
+          </a:lnRef>
+          <a:fillRef idx="0">
+            <a:schemeClr val="accent1"/>
+          </a:fillRef>
+          <a:effectRef idx="1">
+            <a:schemeClr val="accent1"/>
+          </a:effectRef>
+          <a:fontRef idx="minor">
+            <a:schemeClr val="tx1"/>
+          </a:fontRef>
+        </p:style>
+      </p:cxnSp>
+    </p:spTree>
+    <p:extLst>
+      <p:ext uri="{BB962C8B-B14F-4D97-AF65-F5344CB8AC3E}">
+        <p14:creationId xmlns:p14="http://schemas.microsoft.com/office/powerpoint/2010/main" val="1211870432"/>
+      </p:ext>
+    </p:extLst>
+  </p:cSld>
+  <p:clrMapOvr>
+    <a:masterClrMapping/>
+  </p:clrMapOvr>
+</p:sldLayout>
+</file>
+
+<file path=ppt/slideLayouts/slideLayout15.xml><?xml version="1.0" encoding="utf-8"?>
+<p:sldLayout xmlns:a="http://schemas.openxmlformats.org/drawingml/2006/main" xmlns:r="http://schemas.openxmlformats.org/officeDocument/2006/relationships" xmlns:p="http://schemas.openxmlformats.org/presentationml/2006/main" preserve="1">
+  <p:cSld name="True or False">
+    <p:spTree>
+      <p:nvGrpSpPr>
+        <p:cNvPr id="1" name=""/>
+        <p:cNvGrpSpPr/>
+        <p:nvPr/>
+      </p:nvGrpSpPr>
+      <p:grpSpPr>
+        <a:xfrm>
+          <a:off x="0" y="0"/>
+          <a:ext cx="0" cy="0"/>
+          <a:chOff x="0" y="0"/>
+          <a:chExt cx="0" cy="0"/>
+        </a:xfrm>
+      </p:grpSpPr>
+      <p:sp>
+        <p:nvSpPr>
+          <p:cNvPr id="2" name="Title 1"/>
+          <p:cNvSpPr>
+            <a:spLocks noGrp="1"/>
+          </p:cNvSpPr>
+          <p:nvPr>
+            <p:ph type="title"/>
+          </p:nvPr>
+        </p:nvSpPr>
+        <p:spPr>
+          <a:xfrm>
+            <a:off x="1295401" y="982132"/>
+            <a:ext cx="9609666" cy="2243668"/>
+          </a:xfrm>
+        </p:spPr>
+        <p:txBody>
+          <a:bodyPr vert="horz" lIns="91440" tIns="45720" rIns="91440" bIns="45720" rtlCol="0" anchor="ctr">
+            <a:normAutofit/>
+          </a:bodyPr>
+          <a:lstStyle>
+            <a:lvl1pPr>
+              <a:defRPr lang="en-US" b="0" dirty="0"/>
+            </a:lvl1pPr>
+          </a:lstStyle>
+          <a:p>
+            <a:pPr marL="0" lvl="0"/>
+            <a:r>
+              <a:rPr lang="en-US"/>
+              <a:t>Click to edit Master title style</a:t>
+            </a:r>
+            <a:endParaRPr lang="en-US" dirty="0"/>
+          </a:p>
+        </p:txBody>
+      </p:sp>
+      <p:sp>
+        <p:nvSpPr>
+          <p:cNvPr id="20" name="Text Placeholder 2"/>
+          <p:cNvSpPr>
+            <a:spLocks noGrp="1"/>
+          </p:cNvSpPr>
+          <p:nvPr>
+            <p:ph type="body" idx="13"/>
+          </p:nvPr>
+        </p:nvSpPr>
+        <p:spPr>
+          <a:xfrm>
+            <a:off x="1295401" y="3630168"/>
+            <a:ext cx="9609668" cy="841248"/>
+          </a:xfrm>
+        </p:spPr>
+        <p:txBody>
+          <a:bodyPr anchor="b">
+            <a:normAutofit/>
+          </a:bodyPr>
+          <a:lstStyle>
+            <a:lvl1pPr marL="0" indent="0" algn="l">
+              <a:spcBef>
+                <a:spcPts val="0"/>
+              </a:spcBef>
+              <a:buNone/>
+              <a:defRPr sz="2800">
+                <a:solidFill>
+                  <a:schemeClr val="tx1"/>
+                </a:solidFill>
+              </a:defRPr>
+            </a:lvl1pPr>
+            <a:lvl2pPr marL="457200" indent="0">
+              <a:buNone/>
+              <a:defRPr sz="1800">
+                <a:solidFill>
+                  <a:schemeClr val="tx1">
+                    <a:tint val="75000"/>
+                  </a:schemeClr>
+                </a:solidFill>
+              </a:defRPr>
+            </a:lvl2pPr>
+            <a:lvl3pPr marL="914400" indent="0">
+              <a:buNone/>
+              <a:defRPr sz="1600">
+                <a:solidFill>
+                  <a:schemeClr val="tx1">
+                    <a:tint val="75000"/>
+                  </a:schemeClr>
+                </a:solidFill>
+              </a:defRPr>
+            </a:lvl3pPr>
+            <a:lvl4pPr marL="1371600" indent="0">
+              <a:buNone/>
+              <a:defRPr sz="1400">
+                <a:solidFill>
+                  <a:schemeClr val="tx1">
+                    <a:tint val="75000"/>
+                  </a:schemeClr>
+                </a:solidFill>
+              </a:defRPr>
+            </a:lvl4pPr>
+            <a:lvl5pPr marL="1828800" indent="0">
+              <a:buNone/>
+              <a:defRPr sz="1400">
+                <a:solidFill>
+                  <a:schemeClr val="tx1">
+                    <a:tint val="75000"/>
+                  </a:schemeClr>
+                </a:solidFill>
+              </a:defRPr>
+            </a:lvl5pPr>
+            <a:lvl6pPr marL="2286000" indent="0">
+              <a:buNone/>
+              <a:defRPr sz="1400">
+                <a:solidFill>
+                  <a:schemeClr val="tx1">
+                    <a:tint val="75000"/>
+                  </a:schemeClr>
+                </a:solidFill>
+              </a:defRPr>
+            </a:lvl6pPr>
+            <a:lvl7pPr marL="2743200" indent="0">
+              <a:buNone/>
+              <a:defRPr sz="1400">
+                <a:solidFill>
+                  <a:schemeClr val="tx1">
+                    <a:tint val="75000"/>
+                  </a:schemeClr>
+                </a:solidFill>
+              </a:defRPr>
+            </a:lvl7pPr>
+            <a:lvl8pPr marL="3200400" indent="0">
+              <a:buNone/>
+              <a:defRPr sz="1400">
+                <a:solidFill>
+                  <a:schemeClr val="tx1">
+                    <a:tint val="75000"/>
+                  </a:schemeClr>
+                </a:solidFill>
+              </a:defRPr>
+            </a:lvl8pPr>
+            <a:lvl9pPr marL="3657600" indent="0">
+              <a:buNone/>
+              <a:defRPr sz="1400">
+                <a:solidFill>
+                  <a:schemeClr val="tx1">
+                    <a:tint val="75000"/>
+                  </a:schemeClr>
+                </a:solidFill>
+              </a:defRPr>
+            </a:lvl9pPr>
+          </a:lstStyle>
+          <a:p>
+            <a:pPr lvl="0"/>
+            <a:r>
+              <a:rPr lang="en-US"/>
+              <a:t>Click to edit Master text styles</a:t>
+            </a:r>
+          </a:p>
+        </p:txBody>
+      </p:sp>
+      <p:sp>
+        <p:nvSpPr>
+          <p:cNvPr id="3" name="Text Placeholder 2"/>
+          <p:cNvSpPr>
+            <a:spLocks noGrp="1"/>
+          </p:cNvSpPr>
+          <p:nvPr>
+            <p:ph type="body" idx="1"/>
+          </p:nvPr>
+        </p:nvSpPr>
+        <p:spPr>
+          <a:xfrm>
+            <a:off x="1295400" y="4470399"/>
+            <a:ext cx="9609670" cy="1405467"/>
+          </a:xfrm>
+        </p:spPr>
+        <p:txBody>
+          <a:bodyPr anchor="t">
+            <a:normAutofit/>
+          </a:bodyPr>
+          <a:lstStyle>
+            <a:lvl1pPr marL="0" indent="0" algn="l">
+              <a:buNone/>
+              <a:defRPr sz="1800">
+                <a:solidFill>
+                  <a:schemeClr val="tx1"/>
+                </a:solidFill>
+              </a:defRPr>
+            </a:lvl1pPr>
+            <a:lvl2pPr marL="457200" indent="0">
+              <a:buNone/>
+              <a:defRPr sz="1800">
+                <a:solidFill>
+                  <a:schemeClr val="tx1">
+                    <a:tint val="75000"/>
+                  </a:schemeClr>
+                </a:solidFill>
+              </a:defRPr>
+            </a:lvl2pPr>
+            <a:lvl3pPr marL="914400" indent="0">
+              <a:buNone/>
+              <a:defRPr sz="1600">
+                <a:solidFill>
+                  <a:schemeClr val="tx1">
+                    <a:tint val="75000"/>
+                  </a:schemeClr>
+                </a:solidFill>
+              </a:defRPr>
+            </a:lvl3pPr>
+            <a:lvl4pPr marL="1371600" indent="0">
+              <a:buNone/>
+              <a:defRPr sz="1400">
+                <a:solidFill>
+                  <a:schemeClr val="tx1">
+                    <a:tint val="75000"/>
+                  </a:schemeClr>
+                </a:solidFill>
+              </a:defRPr>
+            </a:lvl4pPr>
+            <a:lvl5pPr marL="1828800" indent="0">
+              <a:buNone/>
+              <a:defRPr sz="1400">
+                <a:solidFill>
+                  <a:schemeClr val="tx1">
+                    <a:tint val="75000"/>
+                  </a:schemeClr>
+                </a:solidFill>
+              </a:defRPr>
+            </a:lvl5pPr>
+            <a:lvl6pPr marL="2286000" indent="0">
+              <a:buNone/>
+              <a:defRPr sz="1400">
+                <a:solidFill>
+                  <a:schemeClr val="tx1">
+                    <a:tint val="75000"/>
+                  </a:schemeClr>
+                </a:solidFill>
+              </a:defRPr>
+            </a:lvl6pPr>
+            <a:lvl7pPr marL="2743200" indent="0">
+              <a:buNone/>
+              <a:defRPr sz="1400">
+                <a:solidFill>
+                  <a:schemeClr val="tx1">
+                    <a:tint val="75000"/>
+                  </a:schemeClr>
+                </a:solidFill>
+              </a:defRPr>
+            </a:lvl7pPr>
+            <a:lvl8pPr marL="3200400" indent="0">
+              <a:buNone/>
+              <a:defRPr sz="1400">
+                <a:solidFill>
+                  <a:schemeClr val="tx1">
+                    <a:tint val="75000"/>
+                  </a:schemeClr>
+                </a:solidFill>
+              </a:defRPr>
+            </a:lvl8pPr>
+            <a:lvl9pPr marL="3657600" indent="0">
+              <a:buNone/>
+              <a:defRPr sz="1400">
+                <a:solidFill>
+                  <a:schemeClr val="tx1">
+                    <a:tint val="75000"/>
+                  </a:schemeClr>
+                </a:solidFill>
+              </a:defRPr>
+            </a:lvl9pPr>
+          </a:lstStyle>
+          <a:p>
+            <a:pPr lvl="0"/>
+            <a:r>
+              <a:rPr lang="en-US"/>
+              <a:t>Click to edit Master text styles</a:t>
+            </a:r>
+          </a:p>
+        </p:txBody>
+      </p:sp>
+      <p:sp>
+        <p:nvSpPr>
+          <p:cNvPr id="4" name="Date Placeholder 3"/>
+          <p:cNvSpPr>
+            <a:spLocks noGrp="1"/>
+          </p:cNvSpPr>
+          <p:nvPr>
+            <p:ph type="dt" sz="half" idx="10"/>
+          </p:nvPr>
+        </p:nvSpPr>
+        <p:spPr/>
+        <p:txBody>
+          <a:bodyPr/>
+          <a:lstStyle/>
+          <a:p>
+            <a:fld id="{770ACC15-3B6C-44B3-9657-2837D8130729}" type="datetimeFigureOut">
+              <a:rPr lang="en-US" smtClean="0"/>
+              <a:t>3/5/2026</a:t>
+            </a:fld>
+            <a:endParaRPr lang="en-US"/>
+          </a:p>
+        </p:txBody>
+      </p:sp>
+      <p:sp>
+        <p:nvSpPr>
+          <p:cNvPr id="5" name="Footer Placeholder 4"/>
+          <p:cNvSpPr>
+            <a:spLocks noGrp="1"/>
+          </p:cNvSpPr>
+          <p:nvPr>
+            <p:ph type="ftr" sz="quarter" idx="11"/>
+          </p:nvPr>
+        </p:nvSpPr>
+        <p:spPr/>
+        <p:txBody>
+          <a:bodyPr/>
+          <a:lstStyle/>
+          <a:p>
+            <a:endParaRPr lang="en-US"/>
+          </a:p>
+        </p:txBody>
+      </p:sp>
+      <p:sp>
+        <p:nvSpPr>
+          <p:cNvPr id="6" name="Slide Number Placeholder 5"/>
+          <p:cNvSpPr>
+            <a:spLocks noGrp="1"/>
+          </p:cNvSpPr>
+          <p:nvPr>
+            <p:ph type="sldNum" sz="quarter" idx="12"/>
+          </p:nvPr>
+        </p:nvSpPr>
+        <p:spPr/>
+        <p:txBody>
+          <a:bodyPr/>
+          <a:lstStyle/>
+          <a:p>
+            <a:fld id="{C9EEC56A-39DF-4CEE-89D3-17DF44EFA9DE}" type="slidenum">
+              <a:rPr lang="en-US" smtClean="0"/>
+              <a:t>‹#›</a:t>
+            </a:fld>
+            <a:endParaRPr lang="en-US"/>
+          </a:p>
+        </p:txBody>
+      </p:sp>
+      <p:cxnSp>
+        <p:nvCxnSpPr>
+          <p:cNvPr id="15" name="Straight Connector 14"/>
+          <p:cNvCxnSpPr/>
+          <p:nvPr/>
+        </p:nvCxnSpPr>
+        <p:spPr>
+          <a:xfrm>
+            <a:off x="1396169" y="3429000"/>
+            <a:ext cx="9407298" cy="0"/>
+          </a:xfrm>
+          <a:prstGeom prst="line">
+            <a:avLst/>
+          </a:prstGeom>
+          <a:ln w="15875"/>
+        </p:spPr>
+        <p:style>
+          <a:lnRef idx="2">
+            <a:schemeClr val="accent1"/>
+          </a:lnRef>
+          <a:fillRef idx="0">
+            <a:schemeClr val="accent1"/>
+          </a:fillRef>
+          <a:effectRef idx="1">
+            <a:schemeClr val="accent1"/>
+          </a:effectRef>
+          <a:fontRef idx="minor">
+            <a:schemeClr val="tx1"/>
+          </a:fontRef>
+        </p:style>
+      </p:cxnSp>
+    </p:spTree>
+    <p:extLst>
+      <p:ext uri="{BB962C8B-B14F-4D97-AF65-F5344CB8AC3E}">
+        <p14:creationId xmlns:p14="http://schemas.microsoft.com/office/powerpoint/2010/main" val="2753175754"/>
+      </p:ext>
+    </p:extLst>
+  </p:cSld>
+  <p:clrMapOvr>
+    <a:masterClrMapping/>
+  </p:clrMapOvr>
+</p:sldLayout>
+</file>
+
+<file path=ppt/slideLayouts/slideLayout16.xml><?xml version="1.0" encoding="utf-8"?>
 <p:sldLayout xmlns:a="http://schemas.openxmlformats.org/drawingml/2006/main" xmlns:r="http://schemas.openxmlformats.org/officeDocument/2006/relationships" xmlns:p="http://schemas.openxmlformats.org/presentationml/2006/main" type="vertTx" preserve="1">
   <p:cSld name="Title and Vertical Text">
     <p:spTree>
@@ -346,18 +2665,91 @@
       </p:grpSpPr>
       <p:sp>
         <p:nvSpPr>
-          <p:cNvPr id="2" name="Title 1">
-            <a:extLst>
-              <a:ext uri="{FF2B5EF4-FFF2-40B4-BE49-F238E27FC236}">
-                <a16:creationId xmlns:a16="http://schemas.microsoft.com/office/drawing/2014/main" id="{EB0BBBD8-6FE5-C188-A1AB-BBE175B10574}"/>
-              </a:ext>
-            </a:extLst>
-          </p:cNvPr>
+          <p:cNvPr id="2" name="Title 1"/>
           <p:cNvSpPr>
             <a:spLocks noGrp="1"/>
           </p:cNvSpPr>
           <p:nvPr>
             <p:ph type="title"/>
+          </p:nvPr>
+        </p:nvSpPr>
+        <p:spPr/>
+        <p:txBody>
+          <a:bodyPr/>
+          <a:lstStyle>
+            <a:lvl1pPr algn="ctr">
+              <a:defRPr/>
+            </a:lvl1pPr>
+          </a:lstStyle>
+          <a:p>
+            <a:r>
+              <a:rPr lang="en-US"/>
+              <a:t>Click to edit Master title style</a:t>
+            </a:r>
+            <a:endParaRPr lang="en-US" dirty="0"/>
+          </a:p>
+        </p:txBody>
+      </p:sp>
+      <p:sp>
+        <p:nvSpPr>
+          <p:cNvPr id="3" name="Vertical Text Placeholder 2"/>
+          <p:cNvSpPr>
+            <a:spLocks noGrp="1"/>
+          </p:cNvSpPr>
+          <p:nvPr>
+            <p:ph type="body" orient="vert" idx="1"/>
+          </p:nvPr>
+        </p:nvSpPr>
+        <p:spPr/>
+        <p:txBody>
+          <a:bodyPr vert="eaVert" anchor="t"/>
+          <a:lstStyle/>
+          <a:p>
+            <a:pPr lvl="0"/>
+            <a:r>
+              <a:rPr lang="en-US"/>
+              <a:t>Click to edit Master text styles</a:t>
+            </a:r>
+          </a:p>
+          <a:p>
+            <a:pPr lvl="1"/>
+            <a:r>
+              <a:rPr lang="en-US"/>
+              <a:t>Second level</a:t>
+            </a:r>
+          </a:p>
+          <a:p>
+            <a:pPr lvl="2"/>
+            <a:r>
+              <a:rPr lang="en-US"/>
+              <a:t>Third level</a:t>
+            </a:r>
+          </a:p>
+          <a:p>
+            <a:pPr lvl="3"/>
+            <a:r>
+              <a:rPr lang="en-US"/>
+              <a:t>Fourth level</a:t>
+            </a:r>
+          </a:p>
+          <a:p>
+            <a:pPr lvl="4"/>
+            <a:r>
+              <a:rPr lang="en-US"/>
+              <a:t>Fifth level</a:t>
+            </a:r>
+            <a:endParaRPr lang="en-US" dirty="0"/>
+          </a:p>
+        </p:txBody>
+      </p:sp>
+      <p:sp>
+        <p:nvSpPr>
+          <p:cNvPr id="4" name="Date Placeholder 3"/>
+          <p:cNvSpPr>
+            <a:spLocks noGrp="1"/>
+          </p:cNvSpPr>
+          <p:nvPr>
+            <p:ph type="dt" sz="half" idx="10"/>
           </p:nvPr>
         </p:nvSpPr>
         <p:spPr/>
@@ -365,84 +2757,22 @@
           <a:bodyPr/>
           <a:lstStyle/>
           <a:p>
-            <a:r>
-              <a:rPr lang="en-US"/>
-              <a:t>Click to edit Master title style</a:t>
-            </a:r>
-          </a:p>
-        </p:txBody>
-      </p:sp>
-      <p:sp>
-        <p:nvSpPr>
-          <p:cNvPr id="3" name="Vertical Text Placeholder 2">
-            <a:extLst>
-              <a:ext uri="{FF2B5EF4-FFF2-40B4-BE49-F238E27FC236}">
-                <a16:creationId xmlns:a16="http://schemas.microsoft.com/office/drawing/2014/main" id="{A75DFD45-3A4C-DCA9-3E29-15340211F5BA}"/>
-              </a:ext>
-            </a:extLst>
-          </p:cNvPr>
-          <p:cNvSpPr>
-            <a:spLocks noGrp="1"/>
-          </p:cNvSpPr>
-          <p:nvPr>
-            <p:ph type="body" orient="vert" idx="1"/>
-          </p:nvPr>
-        </p:nvSpPr>
-        <p:spPr/>
-        <p:txBody>
-          <a:bodyPr vert="eaVert"/>
-          <a:lstStyle/>
-          <a:p>
-            <a:pPr lvl="0"/>
-            <a:r>
-              <a:rPr lang="en-US"/>
-              <a:t>Click to edit Master text styles</a:t>
-            </a:r>
-          </a:p>
-          <a:p>
-            <a:pPr lvl="1"/>
-            <a:r>
-              <a:rPr lang="en-US"/>
-              <a:t>Second level</a:t>
-            </a:r>
-          </a:p>
-          <a:p>
-            <a:pPr lvl="2"/>
-            <a:r>
-              <a:rPr lang="en-US"/>
-              <a:t>Third level</a:t>
-            </a:r>
-          </a:p>
-          <a:p>
-            <a:pPr lvl="3"/>
-            <a:r>
-              <a:rPr lang="en-US"/>
-              <a:t>Fourth level</a:t>
-            </a:r>
-          </a:p>
-          <a:p>
-            <a:pPr lvl="4"/>
-            <a:r>
-              <a:rPr lang="en-US"/>
-              <a:t>Fifth level</a:t>
-            </a:r>
-          </a:p>
-        </p:txBody>
-      </p:sp>
-      <p:sp>
-        <p:nvSpPr>
-          <p:cNvPr id="4" name="Date Placeholder 3">
-            <a:extLst>
-              <a:ext uri="{FF2B5EF4-FFF2-40B4-BE49-F238E27FC236}">
-                <a16:creationId xmlns:a16="http://schemas.microsoft.com/office/drawing/2014/main" id="{FF1CB96B-8953-C297-0516-AC167447E47F}"/>
-              </a:ext>
-            </a:extLst>
-          </p:cNvPr>
-          <p:cNvSpPr>
-            <a:spLocks noGrp="1"/>
-          </p:cNvSpPr>
-          <p:nvPr>
-            <p:ph type="dt" sz="half" idx="10"/>
+            <a:fld id="{770ACC15-3B6C-44B3-9657-2837D8130729}" type="datetimeFigureOut">
+              <a:rPr lang="en-US" smtClean="0"/>
+              <a:t>3/5/2026</a:t>
+            </a:fld>
+            <a:endParaRPr lang="en-US"/>
+          </a:p>
+        </p:txBody>
+      </p:sp>
+      <p:sp>
+        <p:nvSpPr>
+          <p:cNvPr id="5" name="Footer Placeholder 4"/>
+          <p:cNvSpPr>
+            <a:spLocks noGrp="1"/>
+          </p:cNvSpPr>
+          <p:nvPr>
+            <p:ph type="ftr" sz="quarter" idx="11"/>
           </p:nvPr>
         </p:nvSpPr>
         <p:spPr/>
@@ -450,48 +2780,13 @@
           <a:bodyPr/>
           <a:lstStyle/>
           <a:p>
-            <a:fld id="{770ACC15-3B6C-44B3-9657-2837D8130729}" type="datetimeFigureOut">
-              <a:rPr lang="en-US" smtClean="0"/>
-              <a:t>3/4/2026</a:t>
-            </a:fld>
             <a:endParaRPr lang="en-US"/>
           </a:p>
         </p:txBody>
       </p:sp>
       <p:sp>
         <p:nvSpPr>
-          <p:cNvPr id="5" name="Footer Placeholder 4">
-            <a:extLst>
-              <a:ext uri="{FF2B5EF4-FFF2-40B4-BE49-F238E27FC236}">
-                <a16:creationId xmlns:a16="http://schemas.microsoft.com/office/drawing/2014/main" id="{FD384943-A4B6-0C94-F5CC-BAE39C37333B}"/>
-              </a:ext>
-            </a:extLst>
-          </p:cNvPr>
-          <p:cNvSpPr>
-            <a:spLocks noGrp="1"/>
-          </p:cNvSpPr>
-          <p:nvPr>
-            <p:ph type="ftr" sz="quarter" idx="11"/>
-          </p:nvPr>
-        </p:nvSpPr>
-        <p:spPr/>
-        <p:txBody>
-          <a:bodyPr/>
-          <a:lstStyle/>
-          <a:p>
-            <a:endParaRPr lang="en-US"/>
-          </a:p>
-        </p:txBody>
-      </p:sp>
-      <p:sp>
-        <p:nvSpPr>
-          <p:cNvPr id="6" name="Slide Number Placeholder 5">
-            <a:extLst>
-              <a:ext uri="{FF2B5EF4-FFF2-40B4-BE49-F238E27FC236}">
-                <a16:creationId xmlns:a16="http://schemas.microsoft.com/office/drawing/2014/main" id="{BA14007A-E426-5528-DA47-81A8D4E426A3}"/>
-              </a:ext>
-            </a:extLst>
-          </p:cNvPr>
+          <p:cNvPr id="6" name="Slide Number Placeholder 5"/>
           <p:cNvSpPr>
             <a:spLocks noGrp="1"/>
           </p:cNvSpPr>
@@ -512,10 +2807,41 @@
           </a:p>
         </p:txBody>
       </p:sp>
+      <p:cxnSp>
+        <p:nvCxnSpPr>
+          <p:cNvPr id="14" name="Straight Connector 13"/>
+          <p:cNvCxnSpPr/>
+          <p:nvPr/>
+        </p:nvCxnSpPr>
+        <p:spPr>
+          <a:xfrm>
+            <a:off x="1396169" y="2421466"/>
+            <a:ext cx="9407298" cy="0"/>
+          </a:xfrm>
+          <a:prstGeom prst="line">
+            <a:avLst/>
+          </a:prstGeom>
+          <a:ln w="15875"/>
+        </p:spPr>
+        <p:style>
+          <a:lnRef idx="2">
+            <a:schemeClr val="accent1"/>
+          </a:lnRef>
+          <a:fillRef idx="0">
+            <a:schemeClr val="accent1"/>
+          </a:fillRef>
+          <a:effectRef idx="1">
+            <a:schemeClr val="accent1"/>
+          </a:effectRef>
+          <a:fontRef idx="minor">
+            <a:schemeClr val="tx1"/>
+          </a:fontRef>
+        </p:style>
+      </p:cxnSp>
     </p:spTree>
     <p:extLst>
       <p:ext uri="{BB962C8B-B14F-4D97-AF65-F5344CB8AC3E}">
-        <p14:creationId xmlns:p14="http://schemas.microsoft.com/office/powerpoint/2010/main" val="3982353322"/>
+        <p14:creationId xmlns:p14="http://schemas.microsoft.com/office/powerpoint/2010/main" val="1609514829"/>
       </p:ext>
     </p:extLst>
   </p:cSld>
@@ -525,7 +2851,7 @@
 </p:sldLayout>
 </file>
 
-<file path=ppt/slideLayouts/slideLayout11.xml><?xml version="1.0" encoding="utf-8"?>
+<file path=ppt/slideLayouts/slideLayout17.xml><?xml version="1.0" encoding="utf-8"?>
 <p:sldLayout xmlns:a="http://schemas.openxmlformats.org/drawingml/2006/main" xmlns:r="http://schemas.openxmlformats.org/officeDocument/2006/relationships" xmlns:p="http://schemas.openxmlformats.org/presentationml/2006/main" type="vertTitleAndTx" preserve="1">
   <p:cSld name="Vertical Title and Text">
     <p:spTree>
@@ -544,13 +2870,7 @@
       </p:grpSpPr>
       <p:sp>
         <p:nvSpPr>
-          <p:cNvPr id="2" name="Vertical Title 1">
-            <a:extLst>
-              <a:ext uri="{FF2B5EF4-FFF2-40B4-BE49-F238E27FC236}">
-                <a16:creationId xmlns:a16="http://schemas.microsoft.com/office/drawing/2014/main" id="{0E414006-3837-77FE-9B98-85DF0EEE6B44}"/>
-              </a:ext>
-            </a:extLst>
-          </p:cNvPr>
+          <p:cNvPr id="2" name="Vertical Title 1"/>
           <p:cNvSpPr>
             <a:spLocks noGrp="1"/>
           </p:cNvSpPr>
@@ -560,8 +2880,8 @@
         </p:nvSpPr>
         <p:spPr>
           <a:xfrm>
-            <a:off x="8724900" y="365125"/>
-            <a:ext cx="2628900" cy="5811838"/>
+            <a:off x="8999356" y="982131"/>
+            <a:ext cx="1890895" cy="4893735"/>
           </a:xfrm>
         </p:spPr>
         <p:txBody>
@@ -572,18 +2892,13 @@
               <a:rPr lang="en-US"/>
               <a:t>Click to edit Master title style</a:t>
             </a:r>
-          </a:p>
-        </p:txBody>
-      </p:sp>
-      <p:sp>
-        <p:nvSpPr>
-          <p:cNvPr id="3" name="Vertical Text Placeholder 2">
-            <a:extLst>
-              <a:ext uri="{FF2B5EF4-FFF2-40B4-BE49-F238E27FC236}">
-                <a16:creationId xmlns:a16="http://schemas.microsoft.com/office/drawing/2014/main" id="{AF096119-4E82-45C0-7D8F-7B2015F4C8A1}"/>
-              </a:ext>
-            </a:extLst>
-          </p:cNvPr>
+            <a:endParaRPr lang="en-US" dirty="0"/>
+          </a:p>
+        </p:txBody>
+      </p:sp>
+      <p:sp>
+        <p:nvSpPr>
+          <p:cNvPr id="3" name="Vertical Text Placeholder 2"/>
           <p:cNvSpPr>
             <a:spLocks noGrp="1"/>
           </p:cNvSpPr>
@@ -593,12 +2908,12 @@
         </p:nvSpPr>
         <p:spPr>
           <a:xfrm>
-            <a:off x="838200" y="365125"/>
-            <a:ext cx="7734300" cy="5811838"/>
+            <a:off x="1295398" y="982132"/>
+            <a:ext cx="7433025" cy="4893734"/>
           </a:xfrm>
         </p:spPr>
         <p:txBody>
-          <a:bodyPr vert="eaVert"/>
+          <a:bodyPr vert="eaVert" anchor="t"/>
           <a:lstStyle/>
           <a:p>
             <a:pPr lvl="0"/>
@@ -634,18 +2949,13 @@
               <a:rPr lang="en-US"/>
               <a:t>Fifth level</a:t>
             </a:r>
-          </a:p>
-        </p:txBody>
-      </p:sp>
-      <p:sp>
-        <p:nvSpPr>
-          <p:cNvPr id="4" name="Date Placeholder 3">
-            <a:extLst>
-              <a:ext uri="{FF2B5EF4-FFF2-40B4-BE49-F238E27FC236}">
-                <a16:creationId xmlns:a16="http://schemas.microsoft.com/office/drawing/2014/main" id="{F3BC3897-1DA1-45B5-3DFE-214C10DD9E9B}"/>
-              </a:ext>
-            </a:extLst>
-          </p:cNvPr>
+            <a:endParaRPr lang="en-US" dirty="0"/>
+          </a:p>
+        </p:txBody>
+      </p:sp>
+      <p:sp>
+        <p:nvSpPr>
+          <p:cNvPr id="4" name="Date Placeholder 3"/>
           <p:cNvSpPr>
             <a:spLocks noGrp="1"/>
           </p:cNvSpPr>
@@ -660,7 +2970,7 @@
           <a:p>
             <a:fld id="{770ACC15-3B6C-44B3-9657-2837D8130729}" type="datetimeFigureOut">
               <a:rPr lang="en-US" smtClean="0"/>
-              <a:t>3/4/2026</a:t>
+              <a:t>3/5/2026</a:t>
             </a:fld>
             <a:endParaRPr lang="en-US"/>
           </a:p>
@@ -668,13 +2978,7 @@
       </p:sp>
       <p:sp>
         <p:nvSpPr>
-          <p:cNvPr id="5" name="Footer Placeholder 4">
-            <a:extLst>
-              <a:ext uri="{FF2B5EF4-FFF2-40B4-BE49-F238E27FC236}">
-                <a16:creationId xmlns:a16="http://schemas.microsoft.com/office/drawing/2014/main" id="{DEBEE334-EAB4-2ED5-3BC3-1069F7003840}"/>
-              </a:ext>
-            </a:extLst>
-          </p:cNvPr>
+          <p:cNvPr id="5" name="Footer Placeholder 4"/>
           <p:cNvSpPr>
             <a:spLocks noGrp="1"/>
           </p:cNvSpPr>
@@ -693,13 +2997,7 @@
       </p:sp>
       <p:sp>
         <p:nvSpPr>
-          <p:cNvPr id="6" name="Slide Number Placeholder 5">
-            <a:extLst>
-              <a:ext uri="{FF2B5EF4-FFF2-40B4-BE49-F238E27FC236}">
-                <a16:creationId xmlns:a16="http://schemas.microsoft.com/office/drawing/2014/main" id="{CED70A6A-FABF-2EA9-38A2-DFAD91723285}"/>
-              </a:ext>
-            </a:extLst>
-          </p:cNvPr>
+          <p:cNvPr id="6" name="Slide Number Placeholder 5"/>
           <p:cNvSpPr>
             <a:spLocks noGrp="1"/>
           </p:cNvSpPr>
@@ -720,10 +3018,41 @@
           </a:p>
         </p:txBody>
       </p:sp>
+      <p:cxnSp>
+        <p:nvCxnSpPr>
+          <p:cNvPr id="14" name="Straight Connector 13"/>
+          <p:cNvCxnSpPr/>
+          <p:nvPr/>
+        </p:nvCxnSpPr>
+        <p:spPr>
+          <a:xfrm>
+            <a:off x="8863890" y="990600"/>
+            <a:ext cx="0" cy="4876800"/>
+          </a:xfrm>
+          <a:prstGeom prst="line">
+            <a:avLst/>
+          </a:prstGeom>
+          <a:ln w="15875"/>
+        </p:spPr>
+        <p:style>
+          <a:lnRef idx="2">
+            <a:schemeClr val="accent1"/>
+          </a:lnRef>
+          <a:fillRef idx="0">
+            <a:schemeClr val="accent1"/>
+          </a:fillRef>
+          <a:effectRef idx="1">
+            <a:schemeClr val="accent1"/>
+          </a:effectRef>
+          <a:fontRef idx="minor">
+            <a:schemeClr val="tx1"/>
+          </a:fontRef>
+        </p:style>
+      </p:cxnSp>
     </p:spTree>
     <p:extLst>
       <p:ext uri="{BB962C8B-B14F-4D97-AF65-F5344CB8AC3E}">
-        <p14:creationId xmlns:p14="http://schemas.microsoft.com/office/powerpoint/2010/main" val="2399867260"/>
+        <p14:creationId xmlns:p14="http://schemas.microsoft.com/office/powerpoint/2010/main" val="4031122556"/>
       </p:ext>
     </p:extLst>
   </p:cSld>
@@ -750,15 +3079,40 @@
           <a:chExt cx="0" cy="0"/>
         </a:xfrm>
       </p:grpSpPr>
-      <p:sp>
-        <p:nvSpPr>
-          <p:cNvPr id="2" name="Title 1">
-            <a:extLst>
-              <a:ext uri="{FF2B5EF4-FFF2-40B4-BE49-F238E27FC236}">
-                <a16:creationId xmlns:a16="http://schemas.microsoft.com/office/drawing/2014/main" id="{42244BD3-A8CF-305D-FB6E-02B25CDB20CC}"/>
-              </a:ext>
-            </a:extLst>
-          </p:cNvPr>
+      <p:cxnSp>
+        <p:nvCxnSpPr>
+          <p:cNvPr id="7" name="Straight Connector 6"/>
+          <p:cNvCxnSpPr/>
+          <p:nvPr/>
+        </p:nvCxnSpPr>
+        <p:spPr>
+          <a:xfrm>
+            <a:off x="1396169" y="2421466"/>
+            <a:ext cx="9407298" cy="0"/>
+          </a:xfrm>
+          <a:prstGeom prst="line">
+            <a:avLst/>
+          </a:prstGeom>
+          <a:ln w="15875"/>
+        </p:spPr>
+        <p:style>
+          <a:lnRef idx="2">
+            <a:schemeClr val="accent1"/>
+          </a:lnRef>
+          <a:fillRef idx="0">
+            <a:schemeClr val="accent1"/>
+          </a:fillRef>
+          <a:effectRef idx="1">
+            <a:schemeClr val="accent1"/>
+          </a:effectRef>
+          <a:fontRef idx="minor">
+            <a:schemeClr val="tx1"/>
+          </a:fontRef>
+        </p:style>
+      </p:cxnSp>
+      <p:sp>
+        <p:nvSpPr>
+          <p:cNvPr id="2" name="Title 1"/>
           <p:cNvSpPr>
             <a:spLocks noGrp="1"/>
           </p:cNvSpPr>
@@ -775,18 +3129,13 @@
               <a:rPr lang="en-US"/>
               <a:t>Click to edit Master title style</a:t>
             </a:r>
-          </a:p>
-        </p:txBody>
-      </p:sp>
-      <p:sp>
-        <p:nvSpPr>
-          <p:cNvPr id="3" name="Content Placeholder 2">
-            <a:extLst>
-              <a:ext uri="{FF2B5EF4-FFF2-40B4-BE49-F238E27FC236}">
-                <a16:creationId xmlns:a16="http://schemas.microsoft.com/office/drawing/2014/main" id="{0B181ED5-4B17-789C-E7BC-897E467E4D1F}"/>
-              </a:ext>
-            </a:extLst>
-          </p:cNvPr>
+            <a:endParaRPr lang="en-US" dirty="0"/>
+          </a:p>
+        </p:txBody>
+      </p:sp>
+      <p:sp>
+        <p:nvSpPr>
+          <p:cNvPr id="3" name="Content Placeholder 2"/>
           <p:cNvSpPr>
             <a:spLocks noGrp="1"/>
           </p:cNvSpPr>
@@ -832,18 +3181,13 @@
               <a:rPr lang="en-US"/>
               <a:t>Fifth level</a:t>
             </a:r>
-          </a:p>
-        </p:txBody>
-      </p:sp>
-      <p:sp>
-        <p:nvSpPr>
-          <p:cNvPr id="4" name="Date Placeholder 3">
-            <a:extLst>
-              <a:ext uri="{FF2B5EF4-FFF2-40B4-BE49-F238E27FC236}">
-                <a16:creationId xmlns:a16="http://schemas.microsoft.com/office/drawing/2014/main" id="{EB8580B6-E8C1-6524-DAF0-01F34EBF3BB3}"/>
-              </a:ext>
-            </a:extLst>
-          </p:cNvPr>
+            <a:endParaRPr lang="en-US" dirty="0"/>
+          </a:p>
+        </p:txBody>
+      </p:sp>
+      <p:sp>
+        <p:nvSpPr>
+          <p:cNvPr id="4" name="Date Placeholder 3"/>
           <p:cNvSpPr>
             <a:spLocks noGrp="1"/>
           </p:cNvSpPr>
@@ -858,7 +3202,7 @@
           <a:p>
             <a:fld id="{770ACC15-3B6C-44B3-9657-2837D8130729}" type="datetimeFigureOut">
               <a:rPr lang="en-US" smtClean="0"/>
-              <a:t>3/4/2026</a:t>
+              <a:t>3/5/2026</a:t>
             </a:fld>
             <a:endParaRPr lang="en-US"/>
           </a:p>
@@ -866,13 +3210,7 @@
       </p:sp>
       <p:sp>
         <p:nvSpPr>
-          <p:cNvPr id="5" name="Footer Placeholder 4">
-            <a:extLst>
-              <a:ext uri="{FF2B5EF4-FFF2-40B4-BE49-F238E27FC236}">
-                <a16:creationId xmlns:a16="http://schemas.microsoft.com/office/drawing/2014/main" id="{5ED3B02D-5FFA-3CC5-D504-4353E876AAB6}"/>
-              </a:ext>
-            </a:extLst>
-          </p:cNvPr>
+          <p:cNvPr id="5" name="Footer Placeholder 4"/>
           <p:cNvSpPr>
             <a:spLocks noGrp="1"/>
           </p:cNvSpPr>
@@ -891,13 +3229,7 @@
       </p:sp>
       <p:sp>
         <p:nvSpPr>
-          <p:cNvPr id="6" name="Slide Number Placeholder 5">
-            <a:extLst>
-              <a:ext uri="{FF2B5EF4-FFF2-40B4-BE49-F238E27FC236}">
-                <a16:creationId xmlns:a16="http://schemas.microsoft.com/office/drawing/2014/main" id="{ECDC5552-4B62-FFE8-284B-1EAC43367005}"/>
-              </a:ext>
-            </a:extLst>
-          </p:cNvPr>
+          <p:cNvPr id="6" name="Slide Number Placeholder 5"/>
           <p:cNvSpPr>
             <a:spLocks noGrp="1"/>
           </p:cNvSpPr>
@@ -921,7 +3253,7 @@
     </p:spTree>
     <p:extLst>
       <p:ext uri="{BB962C8B-B14F-4D97-AF65-F5344CB8AC3E}">
-        <p14:creationId xmlns:p14="http://schemas.microsoft.com/office/powerpoint/2010/main" val="984722202"/>
+        <p14:creationId xmlns:p14="http://schemas.microsoft.com/office/powerpoint/2010/main" val="1692603254"/>
       </p:ext>
     </p:extLst>
   </p:cSld>
@@ -950,13 +3282,7 @@
       </p:grpSpPr>
       <p:sp>
         <p:nvSpPr>
-          <p:cNvPr id="2" name="Title 1">
-            <a:extLst>
-              <a:ext uri="{FF2B5EF4-FFF2-40B4-BE49-F238E27FC236}">
-                <a16:creationId xmlns:a16="http://schemas.microsoft.com/office/drawing/2014/main" id="{AA7FA658-32EF-9FC2-6B5C-0D6ACB967A79}"/>
-              </a:ext>
-            </a:extLst>
-          </p:cNvPr>
+          <p:cNvPr id="2" name="Title 1"/>
           <p:cNvSpPr>
             <a:spLocks noGrp="1"/>
           </p:cNvSpPr>
@@ -966,15 +3292,17 @@
         </p:nvSpPr>
         <p:spPr>
           <a:xfrm>
-            <a:off x="831850" y="1709738"/>
-            <a:ext cx="10515600" cy="2852737"/>
+            <a:off x="2015069" y="1752606"/>
+            <a:ext cx="8158688" cy="1822514"/>
           </a:xfrm>
         </p:spPr>
         <p:txBody>
-          <a:bodyPr anchor="b"/>
+          <a:bodyPr anchor="b">
+            <a:normAutofit/>
+          </a:bodyPr>
           <a:lstStyle>
-            <a:lvl1pPr>
-              <a:defRPr sz="6000"/>
+            <a:lvl1pPr algn="ctr">
+              <a:defRPr sz="4400" b="0" cap="none"/>
             </a:lvl1pPr>
           </a:lstStyle>
           <a:p>
@@ -982,18 +3310,13 @@
               <a:rPr lang="en-US"/>
               <a:t>Click to edit Master title style</a:t>
             </a:r>
-          </a:p>
-        </p:txBody>
-      </p:sp>
-      <p:sp>
-        <p:nvSpPr>
-          <p:cNvPr id="3" name="Text Placeholder 2">
-            <a:extLst>
-              <a:ext uri="{FF2B5EF4-FFF2-40B4-BE49-F238E27FC236}">
-                <a16:creationId xmlns:a16="http://schemas.microsoft.com/office/drawing/2014/main" id="{7E0F41B2-20C9-90C9-C543-71C6042E78FA}"/>
-              </a:ext>
-            </a:extLst>
-          </p:cNvPr>
+            <a:endParaRPr lang="en-US" dirty="0"/>
+          </a:p>
+        </p:txBody>
+      </p:sp>
+      <p:sp>
+        <p:nvSpPr>
+          <p:cNvPr id="3" name="Text Placeholder 2"/>
           <p:cNvSpPr>
             <a:spLocks noGrp="1"/>
           </p:cNvSpPr>
@@ -1003,102 +3326,102 @@
         </p:nvSpPr>
         <p:spPr>
           <a:xfrm>
-            <a:off x="831850" y="4589463"/>
-            <a:ext cx="10515600" cy="1500187"/>
+            <a:off x="2015067" y="3846051"/>
+            <a:ext cx="8158690" cy="954547"/>
           </a:xfrm>
         </p:spPr>
         <p:txBody>
-          <a:bodyPr/>
+          <a:bodyPr anchor="t">
+            <a:normAutofit/>
+          </a:bodyPr>
           <a:lstStyle>
-            <a:lvl1pPr marL="0" indent="0">
+            <a:lvl1pPr marL="0" indent="0" algn="ctr">
               <a:buNone/>
               <a:defRPr sz="2400">
+                <a:solidFill>
+                  <a:schemeClr val="tx1"/>
+                </a:solidFill>
+              </a:defRPr>
+            </a:lvl1pPr>
+            <a:lvl2pPr marL="457200" indent="0">
+              <a:buNone/>
+              <a:defRPr sz="1800">
                 <a:solidFill>
                   <a:schemeClr val="tx1">
                     <a:tint val="75000"/>
                   </a:schemeClr>
                 </a:solidFill>
               </a:defRPr>
-            </a:lvl1pPr>
-            <a:lvl2pPr marL="457200" indent="0">
-              <a:buNone/>
-              <a:defRPr sz="2000">
+            </a:lvl2pPr>
+            <a:lvl3pPr marL="914400" indent="0">
+              <a:buNone/>
+              <a:defRPr sz="1600">
                 <a:solidFill>
                   <a:schemeClr val="tx1">
                     <a:tint val="75000"/>
                   </a:schemeClr>
                 </a:solidFill>
               </a:defRPr>
-            </a:lvl2pPr>
-            <a:lvl3pPr marL="914400" indent="0">
-              <a:buNone/>
-              <a:defRPr sz="1800">
+            </a:lvl3pPr>
+            <a:lvl4pPr marL="1371600" indent="0">
+              <a:buNone/>
+              <a:defRPr sz="1400">
                 <a:solidFill>
                   <a:schemeClr val="tx1">
                     <a:tint val="75000"/>
                   </a:schemeClr>
                 </a:solidFill>
               </a:defRPr>
-            </a:lvl3pPr>
-            <a:lvl4pPr marL="1371600" indent="0">
-              <a:buNone/>
-              <a:defRPr sz="1600">
+            </a:lvl4pPr>
+            <a:lvl5pPr marL="1828800" indent="0">
+              <a:buNone/>
+              <a:defRPr sz="1400">
                 <a:solidFill>
                   <a:schemeClr val="tx1">
                     <a:tint val="75000"/>
                   </a:schemeClr>
                 </a:solidFill>
               </a:defRPr>
-            </a:lvl4pPr>
-            <a:lvl5pPr marL="1828800" indent="0">
-              <a:buNone/>
-              <a:defRPr sz="1600">
+            </a:lvl5pPr>
+            <a:lvl6pPr marL="2286000" indent="0">
+              <a:buNone/>
+              <a:defRPr sz="1400">
                 <a:solidFill>
                   <a:schemeClr val="tx1">
                     <a:tint val="75000"/>
                   </a:schemeClr>
                 </a:solidFill>
               </a:defRPr>
-            </a:lvl5pPr>
-            <a:lvl6pPr marL="2286000" indent="0">
-              <a:buNone/>
-              <a:defRPr sz="1600">
+            </a:lvl6pPr>
+            <a:lvl7pPr marL="2743200" indent="0">
+              <a:buNone/>
+              <a:defRPr sz="1400">
                 <a:solidFill>
                   <a:schemeClr val="tx1">
                     <a:tint val="75000"/>
                   </a:schemeClr>
                 </a:solidFill>
               </a:defRPr>
-            </a:lvl6pPr>
-            <a:lvl7pPr marL="2743200" indent="0">
-              <a:buNone/>
-              <a:defRPr sz="1600">
+            </a:lvl7pPr>
+            <a:lvl8pPr marL="3200400" indent="0">
+              <a:buNone/>
+              <a:defRPr sz="1400">
                 <a:solidFill>
                   <a:schemeClr val="tx1">
                     <a:tint val="75000"/>
                   </a:schemeClr>
                 </a:solidFill>
               </a:defRPr>
-            </a:lvl7pPr>
-            <a:lvl8pPr marL="3200400" indent="0">
-              <a:buNone/>
-              <a:defRPr sz="1600">
+            </a:lvl8pPr>
+            <a:lvl9pPr marL="3657600" indent="0">
+              <a:buNone/>
+              <a:defRPr sz="1400">
                 <a:solidFill>
                   <a:schemeClr val="tx1">
                     <a:tint val="75000"/>
                   </a:schemeClr>
                 </a:solidFill>
               </a:defRPr>
-            </a:lvl8pPr>
-            <a:lvl9pPr marL="3657600" indent="0">
-              <a:buNone/>
-              <a:defRPr sz="1600">
-                <a:solidFill>
-                  <a:schemeClr val="tx1">
-                    <a:tint val="75000"/>
-                  </a:schemeClr>
-                </a:solidFill>
-              </a:defRPr>
             </a:lvl9pPr>
           </a:lstStyle>
           <a:p>
@@ -1112,13 +3435,7 @@
       </p:sp>
       <p:sp>
         <p:nvSpPr>
-          <p:cNvPr id="4" name="Date Placeholder 3">
-            <a:extLst>
-              <a:ext uri="{FF2B5EF4-FFF2-40B4-BE49-F238E27FC236}">
-                <a16:creationId xmlns:a16="http://schemas.microsoft.com/office/drawing/2014/main" id="{24948D8B-966C-861C-B714-600C8FCB59AA}"/>
-              </a:ext>
-            </a:extLst>
-          </p:cNvPr>
+          <p:cNvPr id="4" name="Date Placeholder 3"/>
           <p:cNvSpPr>
             <a:spLocks noGrp="1"/>
           </p:cNvSpPr>
@@ -1133,7 +3450,7 @@
           <a:p>
             <a:fld id="{770ACC15-3B6C-44B3-9657-2837D8130729}" type="datetimeFigureOut">
               <a:rPr lang="en-US" smtClean="0"/>
-              <a:t>3/4/2026</a:t>
+              <a:t>3/5/2026</a:t>
             </a:fld>
             <a:endParaRPr lang="en-US"/>
           </a:p>
@@ -1141,13 +3458,7 @@
       </p:sp>
       <p:sp>
         <p:nvSpPr>
-          <p:cNvPr id="5" name="Footer Placeholder 4">
-            <a:extLst>
-              <a:ext uri="{FF2B5EF4-FFF2-40B4-BE49-F238E27FC236}">
-                <a16:creationId xmlns:a16="http://schemas.microsoft.com/office/drawing/2014/main" id="{8F816FC1-739B-6352-51D7-45AB2C3646D0}"/>
-              </a:ext>
-            </a:extLst>
-          </p:cNvPr>
+          <p:cNvPr id="5" name="Footer Placeholder 4"/>
           <p:cNvSpPr>
             <a:spLocks noGrp="1"/>
           </p:cNvSpPr>
@@ -1166,13 +3477,7 @@
       </p:sp>
       <p:sp>
         <p:nvSpPr>
-          <p:cNvPr id="6" name="Slide Number Placeholder 5">
-            <a:extLst>
-              <a:ext uri="{FF2B5EF4-FFF2-40B4-BE49-F238E27FC236}">
-                <a16:creationId xmlns:a16="http://schemas.microsoft.com/office/drawing/2014/main" id="{E3A24857-B3FF-87FF-A4F3-3545633C1D5C}"/>
-              </a:ext>
-            </a:extLst>
-          </p:cNvPr>
+          <p:cNvPr id="6" name="Slide Number Placeholder 5"/>
           <p:cNvSpPr>
             <a:spLocks noGrp="1"/>
           </p:cNvSpPr>
@@ -1193,10 +3498,41 @@
           </a:p>
         </p:txBody>
       </p:sp>
+      <p:cxnSp>
+        <p:nvCxnSpPr>
+          <p:cNvPr id="16" name="Straight Connector 15"/>
+          <p:cNvCxnSpPr/>
+          <p:nvPr/>
+        </p:nvCxnSpPr>
+        <p:spPr>
+          <a:xfrm>
+            <a:off x="2012723" y="3710585"/>
+            <a:ext cx="8163380" cy="0"/>
+          </a:xfrm>
+          <a:prstGeom prst="line">
+            <a:avLst/>
+          </a:prstGeom>
+          <a:ln w="15875"/>
+        </p:spPr>
+        <p:style>
+          <a:lnRef idx="2">
+            <a:schemeClr val="accent1"/>
+          </a:lnRef>
+          <a:fillRef idx="0">
+            <a:schemeClr val="accent1"/>
+          </a:fillRef>
+          <a:effectRef idx="1">
+            <a:schemeClr val="accent1"/>
+          </a:effectRef>
+          <a:fontRef idx="minor">
+            <a:schemeClr val="tx1"/>
+          </a:fontRef>
+        </p:style>
+      </p:cxnSp>
     </p:spTree>
     <p:extLst>
       <p:ext uri="{BB962C8B-B14F-4D97-AF65-F5344CB8AC3E}">
-        <p14:creationId xmlns:p14="http://schemas.microsoft.com/office/powerpoint/2010/main" val="3331464187"/>
+        <p14:creationId xmlns:p14="http://schemas.microsoft.com/office/powerpoint/2010/main" val="3944752659"/>
       </p:ext>
     </p:extLst>
   </p:cSld>
@@ -1223,15 +3559,40 @@
           <a:chExt cx="0" cy="0"/>
         </a:xfrm>
       </p:grpSpPr>
-      <p:sp>
-        <p:nvSpPr>
-          <p:cNvPr id="2" name="Title 1">
-            <a:extLst>
-              <a:ext uri="{FF2B5EF4-FFF2-40B4-BE49-F238E27FC236}">
-                <a16:creationId xmlns:a16="http://schemas.microsoft.com/office/drawing/2014/main" id="{9388324C-404C-76FA-11A7-31754B648608}"/>
-              </a:ext>
-            </a:extLst>
-          </p:cNvPr>
+      <p:cxnSp>
+        <p:nvCxnSpPr>
+          <p:cNvPr id="8" name="Straight Connector 7"/>
+          <p:cNvCxnSpPr/>
+          <p:nvPr/>
+        </p:nvCxnSpPr>
+        <p:spPr>
+          <a:xfrm>
+            <a:off x="1396169" y="2421466"/>
+            <a:ext cx="9407298" cy="0"/>
+          </a:xfrm>
+          <a:prstGeom prst="line">
+            <a:avLst/>
+          </a:prstGeom>
+          <a:ln w="15875"/>
+        </p:spPr>
+        <p:style>
+          <a:lnRef idx="2">
+            <a:schemeClr val="accent1"/>
+          </a:lnRef>
+          <a:fillRef idx="0">
+            <a:schemeClr val="accent1"/>
+          </a:fillRef>
+          <a:effectRef idx="1">
+            <a:schemeClr val="accent1"/>
+          </a:effectRef>
+          <a:fontRef idx="minor">
+            <a:schemeClr val="tx1"/>
+          </a:fontRef>
+        </p:style>
+      </p:cxnSp>
+      <p:sp>
+        <p:nvSpPr>
+          <p:cNvPr id="2" name="Title 1"/>
           <p:cNvSpPr>
             <a:spLocks noGrp="1"/>
           </p:cNvSpPr>
@@ -1248,18 +3609,13 @@
               <a:rPr lang="en-US"/>
               <a:t>Click to edit Master title style</a:t>
             </a:r>
-          </a:p>
-        </p:txBody>
-      </p:sp>
-      <p:sp>
-        <p:nvSpPr>
-          <p:cNvPr id="3" name="Content Placeholder 2">
-            <a:extLst>
-              <a:ext uri="{FF2B5EF4-FFF2-40B4-BE49-F238E27FC236}">
-                <a16:creationId xmlns:a16="http://schemas.microsoft.com/office/drawing/2014/main" id="{86542F42-01BB-B6F3-EA37-E147E44B96E3}"/>
-              </a:ext>
-            </a:extLst>
-          </p:cNvPr>
+            <a:endParaRPr lang="en-US" dirty="0"/>
+          </a:p>
+        </p:txBody>
+      </p:sp>
+      <p:sp>
+        <p:nvSpPr>
+          <p:cNvPr id="3" name="Content Placeholder 2"/>
           <p:cNvSpPr>
             <a:spLocks noGrp="1"/>
           </p:cNvSpPr>
@@ -1269,175 +3625,157 @@
         </p:nvSpPr>
         <p:spPr>
           <a:xfrm>
-            <a:off x="838200" y="1825625"/>
-            <a:ext cx="5181600" cy="4351338"/>
+            <a:off x="1298448" y="2560320"/>
+            <a:ext cx="4718304" cy="3310128"/>
           </a:xfrm>
         </p:spPr>
         <p:txBody>
+          <a:bodyPr>
+            <a:normAutofit/>
+          </a:bodyPr>
+          <a:lstStyle/>
+          <a:p>
+            <a:pPr lvl="0"/>
+            <a:r>
+              <a:rPr lang="en-US"/>
+              <a:t>Click to edit Master text styles</a:t>
+            </a:r>
+          </a:p>
+          <a:p>
+            <a:pPr lvl="1"/>
+            <a:r>
+              <a:rPr lang="en-US"/>
+              <a:t>Second level</a:t>
+            </a:r>
+          </a:p>
+          <a:p>
+            <a:pPr lvl="2"/>
+            <a:r>
+              <a:rPr lang="en-US"/>
+              <a:t>Third level</a:t>
+            </a:r>
+          </a:p>
+          <a:p>
+            <a:pPr lvl="3"/>
+            <a:r>
+              <a:rPr lang="en-US"/>
+              <a:t>Fourth level</a:t>
+            </a:r>
+          </a:p>
+          <a:p>
+            <a:pPr lvl="4"/>
+            <a:r>
+              <a:rPr lang="en-US"/>
+              <a:t>Fifth level</a:t>
+            </a:r>
+            <a:endParaRPr lang="en-US" dirty="0"/>
+          </a:p>
+        </p:txBody>
+      </p:sp>
+      <p:sp>
+        <p:nvSpPr>
+          <p:cNvPr id="4" name="Content Placeholder 3"/>
+          <p:cNvSpPr>
+            <a:spLocks noGrp="1"/>
+          </p:cNvSpPr>
+          <p:nvPr>
+            <p:ph sz="half" idx="2"/>
+          </p:nvPr>
+        </p:nvSpPr>
+        <p:spPr>
+          <a:xfrm>
+            <a:off x="6181344" y="2560320"/>
+            <a:ext cx="4718304" cy="3310128"/>
+          </a:xfrm>
+        </p:spPr>
+        <p:txBody>
+          <a:bodyPr>
+            <a:normAutofit/>
+          </a:bodyPr>
+          <a:lstStyle/>
+          <a:p>
+            <a:pPr lvl="0"/>
+            <a:r>
+              <a:rPr lang="en-US"/>
+              <a:t>Click to edit Master text styles</a:t>
+            </a:r>
+          </a:p>
+          <a:p>
+            <a:pPr lvl="1"/>
+            <a:r>
+              <a:rPr lang="en-US"/>
+              <a:t>Second level</a:t>
+            </a:r>
+          </a:p>
+          <a:p>
+            <a:pPr lvl="2"/>
+            <a:r>
+              <a:rPr lang="en-US"/>
+              <a:t>Third level</a:t>
+            </a:r>
+          </a:p>
+          <a:p>
+            <a:pPr lvl="3"/>
+            <a:r>
+              <a:rPr lang="en-US"/>
+              <a:t>Fourth level</a:t>
+            </a:r>
+          </a:p>
+          <a:p>
+            <a:pPr lvl="4"/>
+            <a:r>
+              <a:rPr lang="en-US"/>
+              <a:t>Fifth level</a:t>
+            </a:r>
+            <a:endParaRPr lang="en-US" dirty="0"/>
+          </a:p>
+        </p:txBody>
+      </p:sp>
+      <p:sp>
+        <p:nvSpPr>
+          <p:cNvPr id="5" name="Date Placeholder 4"/>
+          <p:cNvSpPr>
+            <a:spLocks noGrp="1"/>
+          </p:cNvSpPr>
+          <p:nvPr>
+            <p:ph type="dt" sz="half" idx="10"/>
+          </p:nvPr>
+        </p:nvSpPr>
+        <p:spPr/>
+        <p:txBody>
           <a:bodyPr/>
           <a:lstStyle/>
           <a:p>
-            <a:pPr lvl="0"/>
-            <a:r>
-              <a:rPr lang="en-US"/>
-              <a:t>Click to edit Master text styles</a:t>
-            </a:r>
-          </a:p>
-          <a:p>
-            <a:pPr lvl="1"/>
-            <a:r>
-              <a:rPr lang="en-US"/>
-              <a:t>Second level</a:t>
-            </a:r>
-          </a:p>
-          <a:p>
-            <a:pPr lvl="2"/>
-            <a:r>
-              <a:rPr lang="en-US"/>
-              <a:t>Third level</a:t>
-            </a:r>
-          </a:p>
-          <a:p>
-            <a:pPr lvl="3"/>
-            <a:r>
-              <a:rPr lang="en-US"/>
-              <a:t>Fourth level</a:t>
-            </a:r>
-          </a:p>
-          <a:p>
-            <a:pPr lvl="4"/>
-            <a:r>
-              <a:rPr lang="en-US"/>
-              <a:t>Fifth level</a:t>
-            </a:r>
-          </a:p>
-        </p:txBody>
-      </p:sp>
-      <p:sp>
-        <p:nvSpPr>
-          <p:cNvPr id="4" name="Content Placeholder 3">
-            <a:extLst>
-              <a:ext uri="{FF2B5EF4-FFF2-40B4-BE49-F238E27FC236}">
-                <a16:creationId xmlns:a16="http://schemas.microsoft.com/office/drawing/2014/main" id="{DA505580-9B6C-9CFA-4687-4C887D39090B}"/>
-              </a:ext>
-            </a:extLst>
-          </p:cNvPr>
-          <p:cNvSpPr>
-            <a:spLocks noGrp="1"/>
-          </p:cNvSpPr>
-          <p:nvPr>
-            <p:ph sz="half" idx="2"/>
-          </p:nvPr>
-        </p:nvSpPr>
-        <p:spPr>
-          <a:xfrm>
-            <a:off x="6172200" y="1825625"/>
-            <a:ext cx="5181600" cy="4351338"/>
-          </a:xfrm>
-        </p:spPr>
+            <a:fld id="{770ACC15-3B6C-44B3-9657-2837D8130729}" type="datetimeFigureOut">
+              <a:rPr lang="en-US" smtClean="0"/>
+              <a:t>3/5/2026</a:t>
+            </a:fld>
+            <a:endParaRPr lang="en-US"/>
+          </a:p>
+        </p:txBody>
+      </p:sp>
+      <p:sp>
+        <p:nvSpPr>
+          <p:cNvPr id="6" name="Footer Placeholder 5"/>
+          <p:cNvSpPr>
+            <a:spLocks noGrp="1"/>
+          </p:cNvSpPr>
+          <p:nvPr>
+            <p:ph type="ftr" sz="quarter" idx="11"/>
+          </p:nvPr>
+        </p:nvSpPr>
+        <p:spPr/>
         <p:txBody>
           <a:bodyPr/>
           <a:lstStyle/>
           <a:p>
-            <a:pPr lvl="0"/>
-            <a:r>
-              <a:rPr lang="en-US"/>
-              <a:t>Click to edit Master text styles</a:t>
-            </a:r>
-          </a:p>
-          <a:p>
-            <a:pPr lvl="1"/>
-            <a:r>
-              <a:rPr lang="en-US"/>
-              <a:t>Second level</a:t>
-            </a:r>
-          </a:p>
-          <a:p>
-            <a:pPr lvl="2"/>
-            <a:r>
-              <a:rPr lang="en-US"/>
-              <a:t>Third level</a:t>
-            </a:r>
-          </a:p>
-          <a:p>
-            <a:pPr lvl="3"/>
-            <a:r>
-              <a:rPr lang="en-US"/>
-              <a:t>Fourth level</a:t>
-            </a:r>
-          </a:p>
-          <a:p>
-            <a:pPr lvl="4"/>
-            <a:r>
-              <a:rPr lang="en-US"/>
-              <a:t>Fifth level</a:t>
-            </a:r>
-          </a:p>
-        </p:txBody>
-      </p:sp>
-      <p:sp>
-        <p:nvSpPr>
-          <p:cNvPr id="5" name="Date Placeholder 4">
-            <a:extLst>
-              <a:ext uri="{FF2B5EF4-FFF2-40B4-BE49-F238E27FC236}">
-                <a16:creationId xmlns:a16="http://schemas.microsoft.com/office/drawing/2014/main" id="{017AE824-B1FB-4EC5-0EAA-18EB50286360}"/>
-              </a:ext>
-            </a:extLst>
-          </p:cNvPr>
-          <p:cNvSpPr>
-            <a:spLocks noGrp="1"/>
-          </p:cNvSpPr>
-          <p:nvPr>
-            <p:ph type="dt" sz="half" idx="10"/>
-          </p:nvPr>
-        </p:nvSpPr>
-        <p:spPr/>
-        <p:txBody>
-          <a:bodyPr/>
-          <a:lstStyle/>
-          <a:p>
-            <a:fld id="{770ACC15-3B6C-44B3-9657-2837D8130729}" type="datetimeFigureOut">
-              <a:rPr lang="en-US" smtClean="0"/>
-              <a:t>3/4/2026</a:t>
-            </a:fld>
             <a:endParaRPr lang="en-US"/>
           </a:p>
         </p:txBody>
       </p:sp>
       <p:sp>
         <p:nvSpPr>
-          <p:cNvPr id="6" name="Footer Placeholder 5">
-            <a:extLst>
-              <a:ext uri="{FF2B5EF4-FFF2-40B4-BE49-F238E27FC236}">
-                <a16:creationId xmlns:a16="http://schemas.microsoft.com/office/drawing/2014/main" id="{8E0ADEAB-4E1E-264C-F619-4D999A3949EF}"/>
-              </a:ext>
-            </a:extLst>
-          </p:cNvPr>
-          <p:cNvSpPr>
-            <a:spLocks noGrp="1"/>
-          </p:cNvSpPr>
-          <p:nvPr>
-            <p:ph type="ftr" sz="quarter" idx="11"/>
-          </p:nvPr>
-        </p:nvSpPr>
-        <p:spPr/>
-        <p:txBody>
-          <a:bodyPr/>
-          <a:lstStyle/>
-          <a:p>
-            <a:endParaRPr lang="en-US"/>
-          </a:p>
-        </p:txBody>
-      </p:sp>
-      <p:sp>
-        <p:nvSpPr>
-          <p:cNvPr id="7" name="Slide Number Placeholder 6">
-            <a:extLst>
-              <a:ext uri="{FF2B5EF4-FFF2-40B4-BE49-F238E27FC236}">
-                <a16:creationId xmlns:a16="http://schemas.microsoft.com/office/drawing/2014/main" id="{0A250E99-3906-1C8C-8564-6A31487E6830}"/>
-              </a:ext>
-            </a:extLst>
-          </p:cNvPr>
+          <p:cNvPr id="7" name="Slide Number Placeholder 6"/>
           <p:cNvSpPr>
             <a:spLocks noGrp="1"/>
           </p:cNvSpPr>
@@ -1461,7 +3799,7 @@
     </p:spTree>
     <p:extLst>
       <p:ext uri="{BB962C8B-B14F-4D97-AF65-F5344CB8AC3E}">
-        <p14:creationId xmlns:p14="http://schemas.microsoft.com/office/powerpoint/2010/main" val="343522917"/>
+        <p14:creationId xmlns:p14="http://schemas.microsoft.com/office/powerpoint/2010/main" val="2892528289"/>
       </p:ext>
     </p:extLst>
   </p:cSld>
@@ -1490,65 +3828,65 @@
       </p:grpSpPr>
       <p:sp>
         <p:nvSpPr>
-          <p:cNvPr id="2" name="Title 1">
-            <a:extLst>
-              <a:ext uri="{FF2B5EF4-FFF2-40B4-BE49-F238E27FC236}">
-                <a16:creationId xmlns:a16="http://schemas.microsoft.com/office/drawing/2014/main" id="{91E28473-EBCD-6020-45D8-D168F99965F6}"/>
-              </a:ext>
-            </a:extLst>
-          </p:cNvPr>
+          <p:cNvPr id="2" name="Title 1"/>
           <p:cNvSpPr>
             <a:spLocks noGrp="1"/>
           </p:cNvSpPr>
           <p:nvPr>
             <p:ph type="title"/>
+          </p:nvPr>
+        </p:nvSpPr>
+        <p:spPr/>
+        <p:txBody>
+          <a:bodyPr/>
+          <a:lstStyle>
+            <a:lvl1pPr>
+              <a:defRPr/>
+            </a:lvl1pPr>
+          </a:lstStyle>
+          <a:p>
+            <a:r>
+              <a:rPr lang="en-US"/>
+              <a:t>Click to edit Master title style</a:t>
+            </a:r>
+            <a:endParaRPr lang="en-US" dirty="0"/>
+          </a:p>
+        </p:txBody>
+      </p:sp>
+      <p:sp>
+        <p:nvSpPr>
+          <p:cNvPr id="3" name="Text Placeholder 2"/>
+          <p:cNvSpPr>
+            <a:spLocks noGrp="1"/>
+          </p:cNvSpPr>
+          <p:nvPr>
+            <p:ph type="body" idx="1"/>
           </p:nvPr>
         </p:nvSpPr>
         <p:spPr>
           <a:xfrm>
-            <a:off x="839788" y="365125"/>
-            <a:ext cx="10515600" cy="1325563"/>
+            <a:off x="1295400" y="2658533"/>
+            <a:ext cx="4718304" cy="576262"/>
           </a:xfrm>
         </p:spPr>
         <p:txBody>
-          <a:bodyPr/>
-          <a:lstStyle/>
-          <a:p>
-            <a:r>
-              <a:rPr lang="en-US"/>
-              <a:t>Click to edit Master title style</a:t>
-            </a:r>
-          </a:p>
-        </p:txBody>
-      </p:sp>
-      <p:sp>
-        <p:nvSpPr>
-          <p:cNvPr id="3" name="Text Placeholder 2">
-            <a:extLst>
-              <a:ext uri="{FF2B5EF4-FFF2-40B4-BE49-F238E27FC236}">
-                <a16:creationId xmlns:a16="http://schemas.microsoft.com/office/drawing/2014/main" id="{B5FB244D-E745-7708-ADFB-586BCD136ECE}"/>
-              </a:ext>
-            </a:extLst>
-          </p:cNvPr>
-          <p:cNvSpPr>
-            <a:spLocks noGrp="1"/>
-          </p:cNvSpPr>
-          <p:nvPr>
-            <p:ph type="body" idx="1"/>
-          </p:nvPr>
-        </p:nvSpPr>
-        <p:spPr>
-          <a:xfrm>
-            <a:off x="839788" y="1681163"/>
-            <a:ext cx="5157787" cy="823912"/>
-          </a:xfrm>
-        </p:spPr>
-        <p:txBody>
-          <a:bodyPr anchor="b"/>
+          <a:bodyPr anchor="b">
+            <a:noAutofit/>
+          </a:bodyPr>
           <a:lstStyle>
             <a:lvl1pPr marL="0" indent="0">
-              <a:buNone/>
-              <a:defRPr sz="2400" b="1"/>
+              <a:spcBef>
+                <a:spcPts val="672"/>
+              </a:spcBef>
+              <a:spcAft>
+                <a:spcPts val="600"/>
+              </a:spcAft>
+              <a:buNone/>
+              <a:defRPr sz="2800" b="0">
+                <a:solidFill>
+                  <a:schemeClr val="accent1"/>
+                </a:solidFill>
+              </a:defRPr>
             </a:lvl1pPr>
             <a:lvl2pPr marL="457200" indent="0">
               <a:buNone/>
@@ -1594,13 +3932,7 @@
       </p:sp>
       <p:sp>
         <p:nvSpPr>
-          <p:cNvPr id="4" name="Content Placeholder 3">
-            <a:extLst>
-              <a:ext uri="{FF2B5EF4-FFF2-40B4-BE49-F238E27FC236}">
-                <a16:creationId xmlns:a16="http://schemas.microsoft.com/office/drawing/2014/main" id="{79F7C604-D41D-E95A-7213-FD1C4B38D415}"/>
-              </a:ext>
-            </a:extLst>
-          </p:cNvPr>
+          <p:cNvPr id="4" name="Content Placeholder 3"/>
           <p:cNvSpPr>
             <a:spLocks noGrp="1"/>
           </p:cNvSpPr>
@@ -1610,12 +3942,14 @@
         </p:nvSpPr>
         <p:spPr>
           <a:xfrm>
-            <a:off x="839788" y="2505075"/>
-            <a:ext cx="5157787" cy="3684588"/>
+            <a:off x="1295400" y="3243262"/>
+            <a:ext cx="4718304" cy="2632605"/>
           </a:xfrm>
         </p:spPr>
         <p:txBody>
-          <a:bodyPr/>
+          <a:bodyPr anchor="t">
+            <a:normAutofit/>
+          </a:bodyPr>
           <a:lstStyle/>
           <a:p>
             <a:pPr lvl="0"/>
@@ -1651,18 +3985,13 @@
               <a:rPr lang="en-US"/>
               <a:t>Fifth level</a:t>
             </a:r>
-          </a:p>
-        </p:txBody>
-      </p:sp>
-      <p:sp>
-        <p:nvSpPr>
-          <p:cNvPr id="5" name="Text Placeholder 4">
-            <a:extLst>
-              <a:ext uri="{FF2B5EF4-FFF2-40B4-BE49-F238E27FC236}">
-                <a16:creationId xmlns:a16="http://schemas.microsoft.com/office/drawing/2014/main" id="{0E6D65F8-A4A7-BEA5-2530-BD72A3DD9ADA}"/>
-              </a:ext>
-            </a:extLst>
-          </p:cNvPr>
+            <a:endParaRPr lang="en-US" dirty="0"/>
+          </a:p>
+        </p:txBody>
+      </p:sp>
+      <p:sp>
+        <p:nvSpPr>
+          <p:cNvPr id="5" name="Text Placeholder 4"/>
           <p:cNvSpPr>
             <a:spLocks noGrp="1"/>
           </p:cNvSpPr>
@@ -1672,16 +4001,28 @@
         </p:nvSpPr>
         <p:spPr>
           <a:xfrm>
-            <a:off x="6172200" y="1681163"/>
-            <a:ext cx="5183188" cy="823912"/>
+            <a:off x="6180670" y="2658533"/>
+            <a:ext cx="4718304" cy="576262"/>
           </a:xfrm>
         </p:spPr>
         <p:txBody>
-          <a:bodyPr anchor="b"/>
+          <a:bodyPr anchor="b">
+            <a:noAutofit/>
+          </a:bodyPr>
           <a:lstStyle>
             <a:lvl1pPr marL="0" indent="0">
-              <a:buNone/>
-              <a:defRPr sz="2400" b="1"/>
+              <a:spcBef>
+                <a:spcPts val="672"/>
+              </a:spcBef>
+              <a:spcAft>
+                <a:spcPts val="600"/>
+              </a:spcAft>
+              <a:buNone/>
+              <a:defRPr sz="2800" b="0">
+                <a:solidFill>
+                  <a:schemeClr val="accent1"/>
+                </a:solidFill>
+              </a:defRPr>
             </a:lvl1pPr>
             <a:lvl2pPr marL="457200" indent="0">
               <a:buNone/>
@@ -1727,13 +4068,7 @@
       </p:sp>
       <p:sp>
         <p:nvSpPr>
-          <p:cNvPr id="6" name="Content Placeholder 5">
-            <a:extLst>
-              <a:ext uri="{FF2B5EF4-FFF2-40B4-BE49-F238E27FC236}">
-                <a16:creationId xmlns:a16="http://schemas.microsoft.com/office/drawing/2014/main" id="{DCC22F7F-C006-15AA-3F77-1657B7FA6116}"/>
-              </a:ext>
-            </a:extLst>
-          </p:cNvPr>
+          <p:cNvPr id="6" name="Content Placeholder 5"/>
           <p:cNvSpPr>
             <a:spLocks noGrp="1"/>
           </p:cNvSpPr>
@@ -1743,64 +4078,84 @@
         </p:nvSpPr>
         <p:spPr>
           <a:xfrm>
-            <a:off x="6172200" y="2505075"/>
-            <a:ext cx="5183188" cy="3684588"/>
+            <a:off x="6180670" y="3243262"/>
+            <a:ext cx="4718304" cy="2632605"/>
           </a:xfrm>
         </p:spPr>
         <p:txBody>
+          <a:bodyPr anchor="t">
+            <a:normAutofit/>
+          </a:bodyPr>
+          <a:lstStyle/>
+          <a:p>
+            <a:pPr lvl="0"/>
+            <a:r>
+              <a:rPr lang="en-US"/>
+              <a:t>Click to edit Master text styles</a:t>
+            </a:r>
+          </a:p>
+          <a:p>
+            <a:pPr lvl="1"/>
+            <a:r>
+              <a:rPr lang="en-US"/>
+              <a:t>Second level</a:t>
+            </a:r>
+          </a:p>
+          <a:p>
+            <a:pPr lvl="2"/>
+            <a:r>
+              <a:rPr lang="en-US"/>
+              <a:t>Third level</a:t>
+            </a:r>
+          </a:p>
+          <a:p>
+            <a:pPr lvl="3"/>
+            <a:r>
+              <a:rPr lang="en-US"/>
+              <a:t>Fourth level</a:t>
+            </a:r>
+          </a:p>
+          <a:p>
+            <a:pPr lvl="4"/>
+            <a:r>
+              <a:rPr lang="en-US"/>
+              <a:t>Fifth level</a:t>
+            </a:r>
+            <a:endParaRPr lang="en-US" dirty="0"/>
+          </a:p>
+        </p:txBody>
+      </p:sp>
+      <p:sp>
+        <p:nvSpPr>
+          <p:cNvPr id="7" name="Date Placeholder 6"/>
+          <p:cNvSpPr>
+            <a:spLocks noGrp="1"/>
+          </p:cNvSpPr>
+          <p:nvPr>
+            <p:ph type="dt" sz="half" idx="10"/>
+          </p:nvPr>
+        </p:nvSpPr>
+        <p:spPr/>
+        <p:txBody>
           <a:bodyPr/>
           <a:lstStyle/>
           <a:p>
-            <a:pPr lvl="0"/>
-            <a:r>
-              <a:rPr lang="en-US"/>
-              <a:t>Click to edit Master text styles</a:t>
-            </a:r>
-          </a:p>
-          <a:p>
-            <a:pPr lvl="1"/>
-            <a:r>
-              <a:rPr lang="en-US"/>
-              <a:t>Second level</a:t>
-            </a:r>
-          </a:p>
-          <a:p>
-            <a:pPr lvl="2"/>
-            <a:r>
-              <a:rPr lang="en-US"/>
-              <a:t>Third level</a:t>
-            </a:r>
-          </a:p>
-          <a:p>
-            <a:pPr lvl="3"/>
-            <a:r>
-              <a:rPr lang="en-US"/>
-              <a:t>Fourth level</a:t>
-            </a:r>
-          </a:p>
-          <a:p>
-            <a:pPr lvl="4"/>
-            <a:r>
-              <a:rPr lang="en-US"/>
-              <a:t>Fifth level</a:t>
-            </a:r>
-          </a:p>
-        </p:txBody>
-      </p:sp>
-      <p:sp>
-        <p:nvSpPr>
-          <p:cNvPr id="7" name="Date Placeholder 6">
-            <a:extLst>
-              <a:ext uri="{FF2B5EF4-FFF2-40B4-BE49-F238E27FC236}">
-                <a16:creationId xmlns:a16="http://schemas.microsoft.com/office/drawing/2014/main" id="{9D853EC9-7A6C-8B29-2365-028CDD7D1662}"/>
-              </a:ext>
-            </a:extLst>
-          </p:cNvPr>
-          <p:cNvSpPr>
-            <a:spLocks noGrp="1"/>
-          </p:cNvSpPr>
-          <p:nvPr>
-            <p:ph type="dt" sz="half" idx="10"/>
+            <a:fld id="{770ACC15-3B6C-44B3-9657-2837D8130729}" type="datetimeFigureOut">
+              <a:rPr lang="en-US" smtClean="0"/>
+              <a:t>3/5/2026</a:t>
+            </a:fld>
+            <a:endParaRPr lang="en-US"/>
+          </a:p>
+        </p:txBody>
+      </p:sp>
+      <p:sp>
+        <p:nvSpPr>
+          <p:cNvPr id="8" name="Footer Placeholder 7"/>
+          <p:cNvSpPr>
+            <a:spLocks noGrp="1"/>
+          </p:cNvSpPr>
+          <p:nvPr>
+            <p:ph type="ftr" sz="quarter" idx="11"/>
           </p:nvPr>
         </p:nvSpPr>
         <p:spPr/>
@@ -1808,48 +4163,13 @@
           <a:bodyPr/>
           <a:lstStyle/>
           <a:p>
-            <a:fld id="{770ACC15-3B6C-44B3-9657-2837D8130729}" type="datetimeFigureOut">
-              <a:rPr lang="en-US" smtClean="0"/>
-              <a:t>3/4/2026</a:t>
-            </a:fld>
             <a:endParaRPr lang="en-US"/>
           </a:p>
         </p:txBody>
       </p:sp>
       <p:sp>
         <p:nvSpPr>
-          <p:cNvPr id="8" name="Footer Placeholder 7">
-            <a:extLst>
-              <a:ext uri="{FF2B5EF4-FFF2-40B4-BE49-F238E27FC236}">
-                <a16:creationId xmlns:a16="http://schemas.microsoft.com/office/drawing/2014/main" id="{782C046D-FB6B-E843-4FB0-68B1BE5626A8}"/>
-              </a:ext>
-            </a:extLst>
-          </p:cNvPr>
-          <p:cNvSpPr>
-            <a:spLocks noGrp="1"/>
-          </p:cNvSpPr>
-          <p:nvPr>
-            <p:ph type="ftr" sz="quarter" idx="11"/>
-          </p:nvPr>
-        </p:nvSpPr>
-        <p:spPr/>
-        <p:txBody>
-          <a:bodyPr/>
-          <a:lstStyle/>
-          <a:p>
-            <a:endParaRPr lang="en-US"/>
-          </a:p>
-        </p:txBody>
-      </p:sp>
-      <p:sp>
-        <p:nvSpPr>
-          <p:cNvPr id="9" name="Slide Number Placeholder 8">
-            <a:extLst>
-              <a:ext uri="{FF2B5EF4-FFF2-40B4-BE49-F238E27FC236}">
-                <a16:creationId xmlns:a16="http://schemas.microsoft.com/office/drawing/2014/main" id="{B6AEC19F-8CFB-775F-68BF-0ADB446DA8D9}"/>
-              </a:ext>
-            </a:extLst>
-          </p:cNvPr>
+          <p:cNvPr id="9" name="Slide Number Placeholder 8"/>
           <p:cNvSpPr>
             <a:spLocks noGrp="1"/>
           </p:cNvSpPr>
@@ -1870,10 +4190,41 @@
           </a:p>
         </p:txBody>
       </p:sp>
+      <p:cxnSp>
+        <p:nvCxnSpPr>
+          <p:cNvPr id="18" name="Straight Connector 17"/>
+          <p:cNvCxnSpPr/>
+          <p:nvPr/>
+        </p:nvCxnSpPr>
+        <p:spPr>
+          <a:xfrm>
+            <a:off x="1396169" y="2421466"/>
+            <a:ext cx="9407298" cy="0"/>
+          </a:xfrm>
+          <a:prstGeom prst="line">
+            <a:avLst/>
+          </a:prstGeom>
+          <a:ln w="15875"/>
+        </p:spPr>
+        <p:style>
+          <a:lnRef idx="2">
+            <a:schemeClr val="accent1"/>
+          </a:lnRef>
+          <a:fillRef idx="0">
+            <a:schemeClr val="accent1"/>
+          </a:fillRef>
+          <a:effectRef idx="1">
+            <a:schemeClr val="accent1"/>
+          </a:effectRef>
+          <a:fontRef idx="minor">
+            <a:schemeClr val="tx1"/>
+          </a:fontRef>
+        </p:style>
+      </p:cxnSp>
     </p:spTree>
     <p:extLst>
       <p:ext uri="{BB962C8B-B14F-4D97-AF65-F5344CB8AC3E}">
-        <p14:creationId xmlns:p14="http://schemas.microsoft.com/office/powerpoint/2010/main" val="3509304426"/>
+        <p14:creationId xmlns:p14="http://schemas.microsoft.com/office/powerpoint/2010/main" val="215344669"/>
       </p:ext>
     </p:extLst>
   </p:cSld>
@@ -1902,13 +4253,7 @@
       </p:grpSpPr>
       <p:sp>
         <p:nvSpPr>
-          <p:cNvPr id="2" name="Title 1">
-            <a:extLst>
-              <a:ext uri="{FF2B5EF4-FFF2-40B4-BE49-F238E27FC236}">
-                <a16:creationId xmlns:a16="http://schemas.microsoft.com/office/drawing/2014/main" id="{F15628A6-F119-F905-2E45-396F47AB5052}"/>
-              </a:ext>
-            </a:extLst>
-          </p:cNvPr>
+          <p:cNvPr id="2" name="Title 1"/>
           <p:cNvSpPr>
             <a:spLocks noGrp="1"/>
           </p:cNvSpPr>
@@ -1925,18 +4270,13 @@
               <a:rPr lang="en-US"/>
               <a:t>Click to edit Master title style</a:t>
             </a:r>
-          </a:p>
-        </p:txBody>
-      </p:sp>
-      <p:sp>
-        <p:nvSpPr>
-          <p:cNvPr id="3" name="Date Placeholder 2">
-            <a:extLst>
-              <a:ext uri="{FF2B5EF4-FFF2-40B4-BE49-F238E27FC236}">
-                <a16:creationId xmlns:a16="http://schemas.microsoft.com/office/drawing/2014/main" id="{7C2EE3FD-2390-E1FE-0CCE-AF465DE6F480}"/>
-              </a:ext>
-            </a:extLst>
-          </p:cNvPr>
+            <a:endParaRPr lang="en-US" dirty="0"/>
+          </a:p>
+        </p:txBody>
+      </p:sp>
+      <p:sp>
+        <p:nvSpPr>
+          <p:cNvPr id="3" name="Date Placeholder 2"/>
           <p:cNvSpPr>
             <a:spLocks noGrp="1"/>
           </p:cNvSpPr>
@@ -1951,7 +4291,7 @@
           <a:p>
             <a:fld id="{770ACC15-3B6C-44B3-9657-2837D8130729}" type="datetimeFigureOut">
               <a:rPr lang="en-US" smtClean="0"/>
-              <a:t>3/4/2026</a:t>
+              <a:t>3/5/2026</a:t>
             </a:fld>
             <a:endParaRPr lang="en-US"/>
           </a:p>
@@ -1959,13 +4299,7 @@
       </p:sp>
       <p:sp>
         <p:nvSpPr>
-          <p:cNvPr id="4" name="Footer Placeholder 3">
-            <a:extLst>
-              <a:ext uri="{FF2B5EF4-FFF2-40B4-BE49-F238E27FC236}">
-                <a16:creationId xmlns:a16="http://schemas.microsoft.com/office/drawing/2014/main" id="{6F1998DD-4527-F9BD-271A-67EBC87399FF}"/>
-              </a:ext>
-            </a:extLst>
-          </p:cNvPr>
+          <p:cNvPr id="4" name="Footer Placeholder 3"/>
           <p:cNvSpPr>
             <a:spLocks noGrp="1"/>
           </p:cNvSpPr>
@@ -1984,13 +4318,7 @@
       </p:sp>
       <p:sp>
         <p:nvSpPr>
-          <p:cNvPr id="5" name="Slide Number Placeholder 4">
-            <a:extLst>
-              <a:ext uri="{FF2B5EF4-FFF2-40B4-BE49-F238E27FC236}">
-                <a16:creationId xmlns:a16="http://schemas.microsoft.com/office/drawing/2014/main" id="{B437D6BF-292E-9A2C-5F0B-8DC0C9619F25}"/>
-              </a:ext>
-            </a:extLst>
-          </p:cNvPr>
+          <p:cNvPr id="5" name="Slide Number Placeholder 4"/>
           <p:cNvSpPr>
             <a:spLocks noGrp="1"/>
           </p:cNvSpPr>
@@ -2011,10 +4339,41 @@
           </a:p>
         </p:txBody>
       </p:sp>
+      <p:cxnSp>
+        <p:nvCxnSpPr>
+          <p:cNvPr id="14" name="Straight Connector 13"/>
+          <p:cNvCxnSpPr/>
+          <p:nvPr/>
+        </p:nvCxnSpPr>
+        <p:spPr>
+          <a:xfrm>
+            <a:off x="1396169" y="2421466"/>
+            <a:ext cx="9407298" cy="0"/>
+          </a:xfrm>
+          <a:prstGeom prst="line">
+            <a:avLst/>
+          </a:prstGeom>
+          <a:ln w="15875"/>
+        </p:spPr>
+        <p:style>
+          <a:lnRef idx="2">
+            <a:schemeClr val="accent1"/>
+          </a:lnRef>
+          <a:fillRef idx="0">
+            <a:schemeClr val="accent1"/>
+          </a:fillRef>
+          <a:effectRef idx="1">
+            <a:schemeClr val="accent1"/>
+          </a:effectRef>
+          <a:fontRef idx="minor">
+            <a:schemeClr val="tx1"/>
+          </a:fontRef>
+        </p:style>
+      </p:cxnSp>
     </p:spTree>
     <p:extLst>
       <p:ext uri="{BB962C8B-B14F-4D97-AF65-F5344CB8AC3E}">
-        <p14:creationId xmlns:p14="http://schemas.microsoft.com/office/powerpoint/2010/main" val="1967605026"/>
+        <p14:creationId xmlns:p14="http://schemas.microsoft.com/office/powerpoint/2010/main" val="4246589384"/>
       </p:ext>
     </p:extLst>
   </p:cSld>
@@ -2043,13 +4402,7 @@
       </p:grpSpPr>
       <p:sp>
         <p:nvSpPr>
-          <p:cNvPr id="2" name="Date Placeholder 1">
-            <a:extLst>
-              <a:ext uri="{FF2B5EF4-FFF2-40B4-BE49-F238E27FC236}">
-                <a16:creationId xmlns:a16="http://schemas.microsoft.com/office/drawing/2014/main" id="{FDC022B4-A142-990B-C501-71F7AF9263E3}"/>
-              </a:ext>
-            </a:extLst>
-          </p:cNvPr>
+          <p:cNvPr id="2" name="Date Placeholder 1"/>
           <p:cNvSpPr>
             <a:spLocks noGrp="1"/>
           </p:cNvSpPr>
@@ -2064,7 +4417,7 @@
           <a:p>
             <a:fld id="{770ACC15-3B6C-44B3-9657-2837D8130729}" type="datetimeFigureOut">
               <a:rPr lang="en-US" smtClean="0"/>
-              <a:t>3/4/2026</a:t>
+              <a:t>3/5/2026</a:t>
             </a:fld>
             <a:endParaRPr lang="en-US"/>
           </a:p>
@@ -2072,13 +4425,7 @@
       </p:sp>
       <p:sp>
         <p:nvSpPr>
-          <p:cNvPr id="3" name="Footer Placeholder 2">
-            <a:extLst>
-              <a:ext uri="{FF2B5EF4-FFF2-40B4-BE49-F238E27FC236}">
-                <a16:creationId xmlns:a16="http://schemas.microsoft.com/office/drawing/2014/main" id="{8002E425-0E7E-763E-E8BB-9978884DB6F0}"/>
-              </a:ext>
-            </a:extLst>
-          </p:cNvPr>
+          <p:cNvPr id="3" name="Footer Placeholder 2"/>
           <p:cNvSpPr>
             <a:spLocks noGrp="1"/>
           </p:cNvSpPr>
@@ -2097,13 +4444,7 @@
       </p:sp>
       <p:sp>
         <p:nvSpPr>
-          <p:cNvPr id="4" name="Slide Number Placeholder 3">
-            <a:extLst>
-              <a:ext uri="{FF2B5EF4-FFF2-40B4-BE49-F238E27FC236}">
-                <a16:creationId xmlns:a16="http://schemas.microsoft.com/office/drawing/2014/main" id="{620337D5-EAD2-33A5-CFA9-96A99C356E18}"/>
-              </a:ext>
-            </a:extLst>
-          </p:cNvPr>
+          <p:cNvPr id="4" name="Slide Number Placeholder 3"/>
           <p:cNvSpPr>
             <a:spLocks noGrp="1"/>
           </p:cNvSpPr>
@@ -2127,7 +4468,7 @@
     </p:spTree>
     <p:extLst>
       <p:ext uri="{BB962C8B-B14F-4D97-AF65-F5344CB8AC3E}">
-        <p14:creationId xmlns:p14="http://schemas.microsoft.com/office/powerpoint/2010/main" val="198754056"/>
+        <p14:creationId xmlns:p14="http://schemas.microsoft.com/office/powerpoint/2010/main" val="2132466342"/>
       </p:ext>
     </p:extLst>
   </p:cSld>
@@ -2156,13 +4497,7 @@
       </p:grpSpPr>
       <p:sp>
         <p:nvSpPr>
-          <p:cNvPr id="2" name="Title 1">
-            <a:extLst>
-              <a:ext uri="{FF2B5EF4-FFF2-40B4-BE49-F238E27FC236}">
-                <a16:creationId xmlns:a16="http://schemas.microsoft.com/office/drawing/2014/main" id="{12DC9339-6778-A7DE-D653-4F091CCE2393}"/>
-              </a:ext>
-            </a:extLst>
-          </p:cNvPr>
+          <p:cNvPr id="2" name="Title 1"/>
           <p:cNvSpPr>
             <a:spLocks noGrp="1"/>
           </p:cNvSpPr>
@@ -2172,15 +4507,17 @@
         </p:nvSpPr>
         <p:spPr>
           <a:xfrm>
-            <a:off x="839788" y="457200"/>
-            <a:ext cx="3932237" cy="1600200"/>
+            <a:off x="1293811" y="1388534"/>
+            <a:ext cx="3718455" cy="1371600"/>
           </a:xfrm>
         </p:spPr>
         <p:txBody>
-          <a:bodyPr anchor="b"/>
+          <a:bodyPr anchor="b">
+            <a:normAutofit/>
+          </a:bodyPr>
           <a:lstStyle>
-            <a:lvl1pPr>
-              <a:defRPr sz="3200"/>
+            <a:lvl1pPr algn="ctr">
+              <a:defRPr sz="2400" b="0"/>
             </a:lvl1pPr>
           </a:lstStyle>
           <a:p>
@@ -2188,18 +4525,13 @@
               <a:rPr lang="en-US"/>
               <a:t>Click to edit Master title style</a:t>
             </a:r>
-          </a:p>
-        </p:txBody>
-      </p:sp>
-      <p:sp>
-        <p:nvSpPr>
-          <p:cNvPr id="3" name="Content Placeholder 2">
-            <a:extLst>
-              <a:ext uri="{FF2B5EF4-FFF2-40B4-BE49-F238E27FC236}">
-                <a16:creationId xmlns:a16="http://schemas.microsoft.com/office/drawing/2014/main" id="{1DCE1E5E-DF1B-299C-D87B-81A96C2617EC}"/>
-              </a:ext>
-            </a:extLst>
-          </p:cNvPr>
+            <a:endParaRPr lang="en-US" dirty="0"/>
+          </a:p>
+        </p:txBody>
+      </p:sp>
+      <p:sp>
+        <p:nvSpPr>
+          <p:cNvPr id="3" name="Content Placeholder 2"/>
           <p:cNvSpPr>
             <a:spLocks noGrp="1"/>
           </p:cNvSpPr>
@@ -2209,41 +4541,15 @@
         </p:nvSpPr>
         <p:spPr>
           <a:xfrm>
-            <a:off x="5183188" y="987425"/>
-            <a:ext cx="6172200" cy="4873625"/>
+            <a:off x="5418668" y="982131"/>
+            <a:ext cx="5469466" cy="4893735"/>
           </a:xfrm>
         </p:spPr>
         <p:txBody>
-          <a:bodyPr/>
-          <a:lstStyle>
-            <a:lvl1pPr>
-              <a:defRPr sz="3200"/>
-            </a:lvl1pPr>
-            <a:lvl2pPr>
-              <a:defRPr sz="2800"/>
-            </a:lvl2pPr>
-            <a:lvl3pPr>
-              <a:defRPr sz="2400"/>
-            </a:lvl3pPr>
-            <a:lvl4pPr>
-              <a:defRPr sz="2000"/>
-            </a:lvl4pPr>
-            <a:lvl5pPr>
-              <a:defRPr sz="2000"/>
-            </a:lvl5pPr>
-            <a:lvl6pPr>
-              <a:defRPr sz="2000"/>
-            </a:lvl6pPr>
-            <a:lvl7pPr>
-              <a:defRPr sz="2000"/>
-            </a:lvl7pPr>
-            <a:lvl8pPr>
-              <a:defRPr sz="2000"/>
-            </a:lvl8pPr>
-            <a:lvl9pPr>
-              <a:defRPr sz="2000"/>
-            </a:lvl9pPr>
-          </a:lstStyle>
+          <a:bodyPr anchor="ctr">
+            <a:normAutofit/>
+          </a:bodyPr>
+          <a:lstStyle/>
           <a:p>
             <a:pPr lvl="0"/>
             <a:r>
@@ -2278,18 +4584,13 @@
               <a:rPr lang="en-US"/>
               <a:t>Fifth level</a:t>
             </a:r>
-          </a:p>
-        </p:txBody>
-      </p:sp>
-      <p:sp>
-        <p:nvSpPr>
-          <p:cNvPr id="4" name="Text Placeholder 3">
-            <a:extLst>
-              <a:ext uri="{FF2B5EF4-FFF2-40B4-BE49-F238E27FC236}">
-                <a16:creationId xmlns:a16="http://schemas.microsoft.com/office/drawing/2014/main" id="{83D2D8C8-33ED-9A8B-9774-ED961F50B05E}"/>
-              </a:ext>
-            </a:extLst>
-          </p:cNvPr>
+            <a:endParaRPr lang="en-US" dirty="0"/>
+          </a:p>
+        </p:txBody>
+      </p:sp>
+      <p:sp>
+        <p:nvSpPr>
+          <p:cNvPr id="4" name="Text Placeholder 3"/>
           <p:cNvSpPr>
             <a:spLocks noGrp="1"/>
           </p:cNvSpPr>
@@ -2299,48 +4600,50 @@
         </p:nvSpPr>
         <p:spPr>
           <a:xfrm>
-            <a:off x="839788" y="2057400"/>
-            <a:ext cx="3932237" cy="3811588"/>
+            <a:off x="1293811" y="3031065"/>
+            <a:ext cx="3718455" cy="2438404"/>
           </a:xfrm>
         </p:spPr>
         <p:txBody>
-          <a:bodyPr/>
+          <a:bodyPr anchor="t">
+            <a:normAutofit/>
+          </a:bodyPr>
           <a:lstStyle>
-            <a:lvl1pPr marL="0" indent="0">
+            <a:lvl1pPr marL="0" indent="0" algn="ctr">
               <a:buNone/>
               <a:defRPr sz="1600"/>
             </a:lvl1pPr>
             <a:lvl2pPr marL="457200" indent="0">
               <a:buNone/>
-              <a:defRPr sz="1400"/>
+              <a:defRPr sz="1200"/>
             </a:lvl2pPr>
             <a:lvl3pPr marL="914400" indent="0">
               <a:buNone/>
-              <a:defRPr sz="1200"/>
+              <a:defRPr sz="1000"/>
             </a:lvl3pPr>
             <a:lvl4pPr marL="1371600" indent="0">
               <a:buNone/>
-              <a:defRPr sz="1000"/>
+              <a:defRPr sz="900"/>
             </a:lvl4pPr>
             <a:lvl5pPr marL="1828800" indent="0">
               <a:buNone/>
-              <a:defRPr sz="1000"/>
+              <a:defRPr sz="900"/>
             </a:lvl5pPr>
             <a:lvl6pPr marL="2286000" indent="0">
               <a:buNone/>
-              <a:defRPr sz="1000"/>
+              <a:defRPr sz="900"/>
             </a:lvl6pPr>
             <a:lvl7pPr marL="2743200" indent="0">
               <a:buNone/>
-              <a:defRPr sz="1000"/>
+              <a:defRPr sz="900"/>
             </a:lvl7pPr>
             <a:lvl8pPr marL="3200400" indent="0">
               <a:buNone/>
-              <a:defRPr sz="1000"/>
+              <a:defRPr sz="900"/>
             </a:lvl8pPr>
             <a:lvl9pPr marL="3657600" indent="0">
               <a:buNone/>
-              <a:defRPr sz="1000"/>
+              <a:defRPr sz="900"/>
             </a:lvl9pPr>
           </a:lstStyle>
           <a:p>
@@ -2354,13 +4657,7 @@
       </p:sp>
       <p:sp>
         <p:nvSpPr>
-          <p:cNvPr id="5" name="Date Placeholder 4">
-            <a:extLst>
-              <a:ext uri="{FF2B5EF4-FFF2-40B4-BE49-F238E27FC236}">
-                <a16:creationId xmlns:a16="http://schemas.microsoft.com/office/drawing/2014/main" id="{E5432EF5-821C-0C23-3E28-FC70870F5B9F}"/>
-              </a:ext>
-            </a:extLst>
-          </p:cNvPr>
+          <p:cNvPr id="5" name="Date Placeholder 4"/>
           <p:cNvSpPr>
             <a:spLocks noGrp="1"/>
           </p:cNvSpPr>
@@ -2375,7 +4672,7 @@
           <a:p>
             <a:fld id="{770ACC15-3B6C-44B3-9657-2837D8130729}" type="datetimeFigureOut">
               <a:rPr lang="en-US" smtClean="0"/>
-              <a:t>3/4/2026</a:t>
+              <a:t>3/5/2026</a:t>
             </a:fld>
             <a:endParaRPr lang="en-US"/>
           </a:p>
@@ -2383,13 +4680,7 @@
       </p:sp>
       <p:sp>
         <p:nvSpPr>
-          <p:cNvPr id="6" name="Footer Placeholder 5">
-            <a:extLst>
-              <a:ext uri="{FF2B5EF4-FFF2-40B4-BE49-F238E27FC236}">
-                <a16:creationId xmlns:a16="http://schemas.microsoft.com/office/drawing/2014/main" id="{DBB85FB2-9F6D-CEFF-EE60-4D599F64D05C}"/>
-              </a:ext>
-            </a:extLst>
-          </p:cNvPr>
+          <p:cNvPr id="6" name="Footer Placeholder 5"/>
           <p:cNvSpPr>
             <a:spLocks noGrp="1"/>
           </p:cNvSpPr>
@@ -2408,13 +4699,7 @@
       </p:sp>
       <p:sp>
         <p:nvSpPr>
-          <p:cNvPr id="7" name="Slide Number Placeholder 6">
-            <a:extLst>
-              <a:ext uri="{FF2B5EF4-FFF2-40B4-BE49-F238E27FC236}">
-                <a16:creationId xmlns:a16="http://schemas.microsoft.com/office/drawing/2014/main" id="{0EE346FC-3158-25F5-4485-EBBBC314B9C5}"/>
-              </a:ext>
-            </a:extLst>
-          </p:cNvPr>
+          <p:cNvPr id="7" name="Slide Number Placeholder 6"/>
           <p:cNvSpPr>
             <a:spLocks noGrp="1"/>
           </p:cNvSpPr>
@@ -2435,10 +4720,41 @@
           </a:p>
         </p:txBody>
       </p:sp>
+      <p:cxnSp>
+        <p:nvCxnSpPr>
+          <p:cNvPr id="16" name="Straight Connector 15"/>
+          <p:cNvCxnSpPr/>
+          <p:nvPr/>
+        </p:nvCxnSpPr>
+        <p:spPr>
+          <a:xfrm>
+            <a:off x="1396169" y="2912533"/>
+            <a:ext cx="3514498" cy="0"/>
+          </a:xfrm>
+          <a:prstGeom prst="line">
+            <a:avLst/>
+          </a:prstGeom>
+          <a:ln w="15875"/>
+        </p:spPr>
+        <p:style>
+          <a:lnRef idx="2">
+            <a:schemeClr val="accent1"/>
+          </a:lnRef>
+          <a:fillRef idx="0">
+            <a:schemeClr val="accent1"/>
+          </a:fillRef>
+          <a:effectRef idx="1">
+            <a:schemeClr val="accent1"/>
+          </a:effectRef>
+          <a:fontRef idx="minor">
+            <a:schemeClr val="tx1"/>
+          </a:fontRef>
+        </p:style>
+      </p:cxnSp>
     </p:spTree>
     <p:extLst>
       <p:ext uri="{BB962C8B-B14F-4D97-AF65-F5344CB8AC3E}">
-        <p14:creationId xmlns:p14="http://schemas.microsoft.com/office/powerpoint/2010/main" val="1536222095"/>
+        <p14:creationId xmlns:p14="http://schemas.microsoft.com/office/powerpoint/2010/main" val="3232645743"/>
       </p:ext>
     </p:extLst>
   </p:cSld>
@@ -2467,13 +4783,7 @@
       </p:grpSpPr>
       <p:sp>
         <p:nvSpPr>
-          <p:cNvPr id="2" name="Title 1">
-            <a:extLst>
-              <a:ext uri="{FF2B5EF4-FFF2-40B4-BE49-F238E27FC236}">
-                <a16:creationId xmlns:a16="http://schemas.microsoft.com/office/drawing/2014/main" id="{85CED7E6-0C46-13C7-7CF1-8F66420B6DE1}"/>
-              </a:ext>
-            </a:extLst>
-          </p:cNvPr>
+          <p:cNvPr id="2" name="Title 1"/>
           <p:cNvSpPr>
             <a:spLocks noGrp="1"/>
           </p:cNvSpPr>
@@ -2483,15 +4793,17 @@
         </p:nvSpPr>
         <p:spPr>
           <a:xfrm>
-            <a:off x="839788" y="457200"/>
-            <a:ext cx="3932237" cy="1600200"/>
+            <a:off x="1295399" y="1883832"/>
+            <a:ext cx="6241816" cy="1371600"/>
           </a:xfrm>
         </p:spPr>
         <p:txBody>
-          <a:bodyPr anchor="b"/>
+          <a:bodyPr anchor="b">
+            <a:normAutofit/>
+          </a:bodyPr>
           <a:lstStyle>
-            <a:lvl1pPr>
-              <a:defRPr sz="3200"/>
+            <a:lvl1pPr algn="ctr">
+              <a:defRPr sz="2800" b="0"/>
             </a:lvl1pPr>
           </a:lstStyle>
           <a:p>
@@ -2499,20 +4811,15 @@
               <a:rPr lang="en-US"/>
               <a:t>Click to edit Master title style</a:t>
             </a:r>
-          </a:p>
-        </p:txBody>
-      </p:sp>
-      <p:sp>
-        <p:nvSpPr>
-          <p:cNvPr id="3" name="Picture Placeholder 2">
-            <a:extLst>
-              <a:ext uri="{FF2B5EF4-FFF2-40B4-BE49-F238E27FC236}">
-                <a16:creationId xmlns:a16="http://schemas.microsoft.com/office/drawing/2014/main" id="{891637BC-17EF-FA3E-B67C-4DE9ABCCA7A2}"/>
-              </a:ext>
-            </a:extLst>
-          </p:cNvPr>
-          <p:cNvSpPr>
-            <a:spLocks noGrp="1"/>
+            <a:endParaRPr lang="en-US" dirty="0"/>
+          </a:p>
+        </p:txBody>
+      </p:sp>
+      <p:sp>
+        <p:nvSpPr>
+          <p:cNvPr id="17" name="Picture Placeholder 2"/>
+          <p:cNvSpPr>
+            <a:spLocks noGrp="1" noChangeAspect="1"/>
           </p:cNvSpPr>
           <p:nvPr>
             <p:ph type="pic" idx="1"/>
@@ -2520,118 +4827,141 @@
         </p:nvSpPr>
         <p:spPr>
           <a:xfrm>
-            <a:off x="5183188" y="987425"/>
-            <a:ext cx="6172200" cy="4873625"/>
+            <a:off x="8094831" y="1041400"/>
+            <a:ext cx="3063347" cy="4775200"/>
           </a:xfrm>
+          <a:prstGeom prst="roundRect">
+            <a:avLst>
+              <a:gd name="adj" fmla="val 0"/>
+            </a:avLst>
+          </a:prstGeom>
+          <a:ln w="57150" cmpd="thickThin">
+            <a:solidFill>
+              <a:schemeClr val="tx1">
+                <a:lumMod val="50000"/>
+                <a:lumOff val="50000"/>
+              </a:schemeClr>
+            </a:solidFill>
+            <a:miter lim="800000"/>
+          </a:ln>
+          <a:effectLst>
+            <a:innerShdw blurRad="57150" dist="38100" dir="14460000">
+              <a:srgbClr val="000000">
+                <a:alpha val="70000"/>
+              </a:srgbClr>
+            </a:innerShdw>
+          </a:effectLst>
         </p:spPr>
         <p:txBody>
-          <a:bodyPr/>
+          <a:bodyPr anchor="t">
+            <a:normAutofit/>
+          </a:bodyPr>
           <a:lstStyle>
-            <a:lvl1pPr marL="0" indent="0">
-              <a:buNone/>
-              <a:defRPr sz="3200"/>
-            </a:lvl1pPr>
-            <a:lvl2pPr marL="457200" indent="0">
-              <a:buNone/>
-              <a:defRPr sz="2800"/>
-            </a:lvl2pPr>
-            <a:lvl3pPr marL="914400" indent="0">
-              <a:buNone/>
-              <a:defRPr sz="2400"/>
-            </a:lvl3pPr>
-            <a:lvl4pPr marL="1371600" indent="0">
-              <a:buNone/>
-              <a:defRPr sz="2000"/>
-            </a:lvl4pPr>
-            <a:lvl5pPr marL="1828800" indent="0">
-              <a:buNone/>
-              <a:defRPr sz="2000"/>
-            </a:lvl5pPr>
-            <a:lvl6pPr marL="2286000" indent="0">
-              <a:buNone/>
-              <a:defRPr sz="2000"/>
-            </a:lvl6pPr>
-            <a:lvl7pPr marL="2743200" indent="0">
-              <a:buNone/>
-              <a:defRPr sz="2000"/>
-            </a:lvl7pPr>
-            <a:lvl8pPr marL="3200400" indent="0">
-              <a:buNone/>
-              <a:defRPr sz="2000"/>
-            </a:lvl8pPr>
-            <a:lvl9pPr marL="3657600" indent="0">
-              <a:buNone/>
-              <a:defRPr sz="2000"/>
-            </a:lvl9pPr>
-          </a:lstStyle>
-          <a:p>
-            <a:endParaRPr lang="en-US"/>
-          </a:p>
-        </p:txBody>
-      </p:sp>
-      <p:sp>
-        <p:nvSpPr>
-          <p:cNvPr id="4" name="Text Placeholder 3">
-            <a:extLst>
-              <a:ext uri="{FF2B5EF4-FFF2-40B4-BE49-F238E27FC236}">
-                <a16:creationId xmlns:a16="http://schemas.microsoft.com/office/drawing/2014/main" id="{03571067-2E15-4B47-4769-5D74CA171359}"/>
-              </a:ext>
-            </a:extLst>
-          </p:cNvPr>
-          <p:cNvSpPr>
-            <a:spLocks noGrp="1"/>
-          </p:cNvSpPr>
-          <p:nvPr>
-            <p:ph type="body" sz="half" idx="2"/>
-          </p:nvPr>
-        </p:nvSpPr>
-        <p:spPr>
-          <a:xfrm>
-            <a:off x="839788" y="2057400"/>
-            <a:ext cx="3932237" cy="3811588"/>
-          </a:xfrm>
-        </p:spPr>
-        <p:txBody>
-          <a:bodyPr/>
-          <a:lstStyle>
-            <a:lvl1pPr marL="0" indent="0">
+            <a:lvl1pPr marL="0" indent="0" algn="ctr">
               <a:buNone/>
               <a:defRPr sz="1600"/>
             </a:lvl1pPr>
             <a:lvl2pPr marL="457200" indent="0">
               <a:buNone/>
-              <a:defRPr sz="1400"/>
+              <a:defRPr sz="1600"/>
             </a:lvl2pPr>
             <a:lvl3pPr marL="914400" indent="0">
               <a:buNone/>
-              <a:defRPr sz="1200"/>
+              <a:defRPr sz="1600"/>
             </a:lvl3pPr>
             <a:lvl4pPr marL="1371600" indent="0">
               <a:buNone/>
-              <a:defRPr sz="1000"/>
+              <a:defRPr sz="1600"/>
             </a:lvl4pPr>
             <a:lvl5pPr marL="1828800" indent="0">
               <a:buNone/>
-              <a:defRPr sz="1000"/>
+              <a:defRPr sz="1600"/>
             </a:lvl5pPr>
             <a:lvl6pPr marL="2286000" indent="0">
               <a:buNone/>
-              <a:defRPr sz="1000"/>
+              <a:defRPr sz="1600"/>
             </a:lvl6pPr>
             <a:lvl7pPr marL="2743200" indent="0">
               <a:buNone/>
-              <a:defRPr sz="1000"/>
+              <a:defRPr sz="1600"/>
             </a:lvl7pPr>
             <a:lvl8pPr marL="3200400" indent="0">
               <a:buNone/>
-              <a:defRPr sz="1000"/>
+              <a:defRPr sz="1600"/>
             </a:lvl8pPr>
             <a:lvl9pPr marL="3657600" indent="0">
               <a:buNone/>
-              <a:defRPr sz="1000"/>
+              <a:defRPr sz="1600"/>
             </a:lvl9pPr>
           </a:lstStyle>
           <a:p>
+            <a:r>
+              <a:rPr lang="en-US"/>
+              <a:t>Click icon to add picture</a:t>
+            </a:r>
+            <a:endParaRPr lang="en-US" dirty="0"/>
+          </a:p>
+        </p:txBody>
+      </p:sp>
+      <p:sp>
+        <p:nvSpPr>
+          <p:cNvPr id="4" name="Text Placeholder 3"/>
+          <p:cNvSpPr>
+            <a:spLocks noGrp="1"/>
+          </p:cNvSpPr>
+          <p:nvPr>
+            <p:ph type="body" sz="half" idx="2"/>
+          </p:nvPr>
+        </p:nvSpPr>
+        <p:spPr>
+          <a:xfrm>
+            <a:off x="1295399" y="3255432"/>
+            <a:ext cx="6241816" cy="1828800"/>
+          </a:xfrm>
+        </p:spPr>
+        <p:txBody>
+          <a:bodyPr anchor="t">
+            <a:normAutofit/>
+          </a:bodyPr>
+          <a:lstStyle>
+            <a:lvl1pPr marL="0" indent="0" algn="ctr">
+              <a:buNone/>
+              <a:defRPr sz="1800"/>
+            </a:lvl1pPr>
+            <a:lvl2pPr marL="457200" indent="0">
+              <a:buNone/>
+              <a:defRPr sz="1200"/>
+            </a:lvl2pPr>
+            <a:lvl3pPr marL="914400" indent="0">
+              <a:buNone/>
+              <a:defRPr sz="1000"/>
+            </a:lvl3pPr>
+            <a:lvl4pPr marL="1371600" indent="0">
+              <a:buNone/>
+              <a:defRPr sz="900"/>
+            </a:lvl4pPr>
+            <a:lvl5pPr marL="1828800" indent="0">
+              <a:buNone/>
+              <a:defRPr sz="900"/>
+            </a:lvl5pPr>
+            <a:lvl6pPr marL="2286000" indent="0">
+              <a:buNone/>
+              <a:defRPr sz="900"/>
+            </a:lvl6pPr>
+            <a:lvl7pPr marL="2743200" indent="0">
+              <a:buNone/>
+              <a:defRPr sz="900"/>
+            </a:lvl7pPr>
+            <a:lvl8pPr marL="3200400" indent="0">
+              <a:buNone/>
+              <a:defRPr sz="900"/>
+            </a:lvl8pPr>
+            <a:lvl9pPr marL="3657600" indent="0">
+              <a:buNone/>
+              <a:defRPr sz="900"/>
+            </a:lvl9pPr>
+          </a:lstStyle>
+          <a:p>
             <a:pPr lvl="0"/>
             <a:r>
               <a:rPr lang="en-US"/>
@@ -2642,13 +4972,7 @@
       </p:sp>
       <p:sp>
         <p:nvSpPr>
-          <p:cNvPr id="5" name="Date Placeholder 4">
-            <a:extLst>
-              <a:ext uri="{FF2B5EF4-FFF2-40B4-BE49-F238E27FC236}">
-                <a16:creationId xmlns:a16="http://schemas.microsoft.com/office/drawing/2014/main" id="{0382E2E4-498C-3F73-C83F-95674753A411}"/>
-              </a:ext>
-            </a:extLst>
-          </p:cNvPr>
+          <p:cNvPr id="5" name="Date Placeholder 4"/>
           <p:cNvSpPr>
             <a:spLocks noGrp="1"/>
           </p:cNvSpPr>
@@ -2663,7 +4987,7 @@
           <a:p>
             <a:fld id="{770ACC15-3B6C-44B3-9657-2837D8130729}" type="datetimeFigureOut">
               <a:rPr lang="en-US" smtClean="0"/>
-              <a:t>3/4/2026</a:t>
+              <a:t>3/5/2026</a:t>
             </a:fld>
             <a:endParaRPr lang="en-US"/>
           </a:p>
@@ -2671,13 +4995,7 @@
       </p:sp>
       <p:sp>
         <p:nvSpPr>
-          <p:cNvPr id="6" name="Footer Placeholder 5">
-            <a:extLst>
-              <a:ext uri="{FF2B5EF4-FFF2-40B4-BE49-F238E27FC236}">
-                <a16:creationId xmlns:a16="http://schemas.microsoft.com/office/drawing/2014/main" id="{415ADBF4-521B-0A06-ACE1-954F8B8D5B65}"/>
-              </a:ext>
-            </a:extLst>
-          </p:cNvPr>
+          <p:cNvPr id="6" name="Footer Placeholder 5"/>
           <p:cNvSpPr>
             <a:spLocks noGrp="1"/>
           </p:cNvSpPr>
@@ -2696,13 +5014,7 @@
       </p:sp>
       <p:sp>
         <p:nvSpPr>
-          <p:cNvPr id="7" name="Slide Number Placeholder 6">
-            <a:extLst>
-              <a:ext uri="{FF2B5EF4-FFF2-40B4-BE49-F238E27FC236}">
-                <a16:creationId xmlns:a16="http://schemas.microsoft.com/office/drawing/2014/main" id="{334D10DA-5BD3-BE04-FF8A-62ED0F54E174}"/>
-              </a:ext>
-            </a:extLst>
-          </p:cNvPr>
+          <p:cNvPr id="7" name="Slide Number Placeholder 6"/>
           <p:cNvSpPr>
             <a:spLocks noGrp="1"/>
           </p:cNvSpPr>
@@ -2726,7 +5038,7 @@
     </p:spTree>
     <p:extLst>
       <p:ext uri="{BB962C8B-B14F-4D97-AF65-F5344CB8AC3E}">
-        <p14:creationId xmlns:p14="http://schemas.microsoft.com/office/powerpoint/2010/main" val="144258729"/>
+        <p14:creationId xmlns:p14="http://schemas.microsoft.com/office/powerpoint/2010/main" val="245457515"/>
       </p:ext>
     </p:extLst>
   </p:cSld>
@@ -2740,7 +5052,7 @@
 <p:sldMaster xmlns:a="http://schemas.openxmlformats.org/drawingml/2006/main" xmlns:r="http://schemas.openxmlformats.org/officeDocument/2006/relationships" xmlns:p="http://schemas.openxmlformats.org/presentationml/2006/main">
   <p:cSld>
     <p:bg>
-      <p:bgRef idx="1001">
+      <p:bgRef idx="1003">
         <a:schemeClr val="bg1"/>
       </p:bgRef>
     </p:bg>
@@ -2758,15 +5070,146 @@
           <a:chExt cx="0" cy="0"/>
         </a:xfrm>
       </p:grpSpPr>
-      <p:sp>
-        <p:nvSpPr>
-          <p:cNvPr id="2" name="Title Placeholder 1">
-            <a:extLst>
-              <a:ext uri="{FF2B5EF4-FFF2-40B4-BE49-F238E27FC236}">
-                <a16:creationId xmlns:a16="http://schemas.microsoft.com/office/drawing/2014/main" id="{B9AB52E6-ECFC-3255-FB47-D889F356C3EC}"/>
-              </a:ext>
-            </a:extLst>
-          </p:cNvPr>
+      <p:grpSp>
+        <p:nvGrpSpPr>
+          <p:cNvPr id="7" name="Group 6"/>
+          <p:cNvGrpSpPr/>
+          <p:nvPr/>
+        </p:nvGrpSpPr>
+        <p:grpSpPr>
+          <a:xfrm>
+            <a:off x="-15736" y="0"/>
+            <a:ext cx="12229962" cy="6856214"/>
+            <a:chOff x="-15736" y="0"/>
+            <a:chExt cx="12229962" cy="6856214"/>
+          </a:xfrm>
+        </p:grpSpPr>
+        <p:pic>
+          <p:nvPicPr>
+            <p:cNvPr id="8" name="Picture 7" descr="HD-PanelContent.png"/>
+            <p:cNvPicPr>
+              <a:picLocks noChangeAspect="1"/>
+            </p:cNvPicPr>
+            <p:nvPr/>
+          </p:nvPicPr>
+          <p:blipFill>
+            <a:blip r:embed="rId19">
+              <a:extLst>
+                <a:ext uri="{28A0092B-C50C-407E-A947-70E740481C1C}">
+                  <a14:useLocalDpi xmlns:a14="http://schemas.microsoft.com/office/drawing/2010/main" val="0"/>
+                </a:ext>
+              </a:extLst>
+            </a:blip>
+            <a:stretch>
+              <a:fillRect/>
+            </a:stretch>
+          </p:blipFill>
+          <p:spPr>
+            <a:xfrm>
+              <a:off x="0" y="0"/>
+              <a:ext cx="12188825" cy="6856214"/>
+            </a:xfrm>
+            <a:prstGeom prst="rect">
+              <a:avLst/>
+            </a:prstGeom>
+          </p:spPr>
+        </p:pic>
+        <p:sp>
+          <p:nvSpPr>
+            <p:cNvPr id="9" name="Rectangle 8"/>
+            <p:cNvSpPr/>
+            <p:nvPr/>
+          </p:nvSpPr>
+          <p:spPr>
+            <a:xfrm>
+              <a:off x="608012" y="609600"/>
+              <a:ext cx="10972800" cy="5638800"/>
+            </a:xfrm>
+            <a:prstGeom prst="rect">
+              <a:avLst/>
+            </a:prstGeom>
+            <a:noFill/>
+            <a:ln w="15875" cap="flat">
+              <a:miter lim="800000"/>
+            </a:ln>
+          </p:spPr>
+          <p:style>
+            <a:lnRef idx="1">
+              <a:schemeClr val="accent1"/>
+            </a:lnRef>
+            <a:fillRef idx="3">
+              <a:schemeClr val="accent1"/>
+            </a:fillRef>
+            <a:effectRef idx="2">
+              <a:schemeClr val="accent1"/>
+            </a:effectRef>
+            <a:fontRef idx="minor">
+              <a:schemeClr val="lt1"/>
+            </a:fontRef>
+          </p:style>
+        </p:sp>
+        <p:pic>
+          <p:nvPicPr>
+            <p:cNvPr id="10" name="Picture 9" descr="HDRibbonContent-UniformTrim.png"/>
+            <p:cNvPicPr>
+              <a:picLocks noChangeAspect="1"/>
+            </p:cNvPicPr>
+            <p:nvPr/>
+          </p:nvPicPr>
+          <p:blipFill rotWithShape="1">
+            <a:blip r:embed="rId20">
+              <a:extLst>
+                <a:ext uri="{28A0092B-C50C-407E-A947-70E740481C1C}">
+                  <a14:useLocalDpi xmlns:a14="http://schemas.microsoft.com/office/drawing/2010/main" val="0"/>
+                </a:ext>
+              </a:extLst>
+            </a:blip>
+            <a:srcRect/>
+            <a:stretch/>
+          </p:blipFill>
+          <p:spPr>
+            <a:xfrm>
+              <a:off x="-15736" y="3153832"/>
+              <a:ext cx="777240" cy="606425"/>
+            </a:xfrm>
+            <a:prstGeom prst="rect">
+              <a:avLst/>
+            </a:prstGeom>
+          </p:spPr>
+        </p:pic>
+        <p:pic>
+          <p:nvPicPr>
+            <p:cNvPr id="11" name="Picture 10" descr="HDRibbonContent-UniformTrim.png"/>
+            <p:cNvPicPr>
+              <a:picLocks noChangeAspect="1"/>
+            </p:cNvPicPr>
+            <p:nvPr/>
+          </p:nvPicPr>
+          <p:blipFill rotWithShape="1">
+            <a:blip r:embed="rId20">
+              <a:extLst>
+                <a:ext uri="{28A0092B-C50C-407E-A947-70E740481C1C}">
+                  <a14:useLocalDpi xmlns:a14="http://schemas.microsoft.com/office/drawing/2010/main" val="0"/>
+                </a:ext>
+              </a:extLst>
+            </a:blip>
+            <a:srcRect/>
+            <a:stretch/>
+          </p:blipFill>
+          <p:spPr>
+            <a:xfrm>
+              <a:off x="11436986" y="3153832"/>
+              <a:ext cx="777240" cy="606425"/>
+            </a:xfrm>
+            <a:prstGeom prst="rect">
+              <a:avLst/>
+            </a:prstGeom>
+          </p:spPr>
+        </p:pic>
+      </p:grpSp>
+      <p:sp>
+        <p:nvSpPr>
+          <p:cNvPr id="2" name="Title Placeholder 1"/>
           <p:cNvSpPr>
             <a:spLocks noGrp="1"/>
           </p:cNvSpPr>
@@ -2776,113 +5219,145 @@
         </p:nvSpPr>
         <p:spPr>
           <a:xfrm>
-            <a:off x="838200" y="365125"/>
-            <a:ext cx="10515600" cy="1325563"/>
+            <a:off x="1295402" y="982132"/>
+            <a:ext cx="9601196" cy="1303867"/>
+          </a:xfrm>
+          <a:prstGeom prst="rect">
+            <a:avLst/>
+          </a:prstGeom>
+          <a:effectLst/>
+        </p:spPr>
+        <p:txBody>
+          <a:bodyPr vert="horz" lIns="91440" tIns="45720" rIns="91440" bIns="45720" rtlCol="0" anchor="ctr">
+            <a:normAutofit/>
+          </a:bodyPr>
+          <a:lstStyle/>
+          <a:p>
+            <a:r>
+              <a:rPr lang="en-US"/>
+              <a:t>Click to edit Master title style</a:t>
+            </a:r>
+            <a:endParaRPr lang="en-US" dirty="0"/>
+          </a:p>
+        </p:txBody>
+      </p:sp>
+      <p:sp>
+        <p:nvSpPr>
+          <p:cNvPr id="3" name="Text Placeholder 2"/>
+          <p:cNvSpPr>
+            <a:spLocks noGrp="1"/>
+          </p:cNvSpPr>
+          <p:nvPr>
+            <p:ph type="body" idx="1"/>
+          </p:nvPr>
+        </p:nvSpPr>
+        <p:spPr>
+          <a:xfrm>
+            <a:off x="1295401" y="2556932"/>
+            <a:ext cx="9601196" cy="3318936"/>
           </a:xfrm>
           <a:prstGeom prst="rect">
             <a:avLst/>
           </a:prstGeom>
         </p:spPr>
         <p:txBody>
-          <a:bodyPr vert="horz" lIns="91440" tIns="45720" rIns="91440" bIns="45720" rtlCol="0" anchor="ctr">
+          <a:bodyPr vert="horz" lIns="91440" tIns="45720" rIns="91440" bIns="45720" rtlCol="0" anchor="t">
             <a:normAutofit/>
           </a:bodyPr>
           <a:lstStyle/>
           <a:p>
+            <a:pPr lvl="0"/>
             <a:r>
               <a:rPr lang="en-US"/>
-              <a:t>Click to edit Master title style</a:t>
-            </a:r>
-          </a:p>
-        </p:txBody>
-      </p:sp>
-      <p:sp>
-        <p:nvSpPr>
-          <p:cNvPr id="3" name="Text Placeholder 2">
-            <a:extLst>
-              <a:ext uri="{FF2B5EF4-FFF2-40B4-BE49-F238E27FC236}">
-                <a16:creationId xmlns:a16="http://schemas.microsoft.com/office/drawing/2014/main" id="{9805DD74-6AC1-2BDC-D9B6-D19400AB09FD}"/>
-              </a:ext>
-            </a:extLst>
-          </p:cNvPr>
-          <p:cNvSpPr>
-            <a:spLocks noGrp="1"/>
-          </p:cNvSpPr>
-          <p:nvPr>
-            <p:ph type="body" idx="1"/>
+              <a:t>Click to edit Master text styles</a:t>
+            </a:r>
+          </a:p>
+          <a:p>
+            <a:pPr lvl="1"/>
+            <a:r>
+              <a:rPr lang="en-US"/>
+              <a:t>Second level</a:t>
+            </a:r>
+          </a:p>
+          <a:p>
+            <a:pPr lvl="2"/>
+            <a:r>
+              <a:rPr lang="en-US"/>
+              <a:t>Third level</a:t>
+            </a:r>
+          </a:p>
+          <a:p>
+            <a:pPr lvl="3"/>
+            <a:r>
+              <a:rPr lang="en-US"/>
+              <a:t>Fourth level</a:t>
+            </a:r>
+          </a:p>
+          <a:p>
+            <a:pPr lvl="4"/>
+            <a:r>
+              <a:rPr lang="en-US"/>
+              <a:t>Fifth level</a:t>
+            </a:r>
+            <a:endParaRPr lang="en-US" dirty="0"/>
+          </a:p>
+        </p:txBody>
+      </p:sp>
+      <p:sp>
+        <p:nvSpPr>
+          <p:cNvPr id="4" name="Date Placeholder 3"/>
+          <p:cNvSpPr>
+            <a:spLocks noGrp="1"/>
+          </p:cNvSpPr>
+          <p:nvPr>
+            <p:ph type="dt" sz="half" idx="2"/>
           </p:nvPr>
         </p:nvSpPr>
         <p:spPr>
           <a:xfrm>
-            <a:off x="838200" y="1825625"/>
-            <a:ext cx="10515600" cy="4351338"/>
+            <a:off x="8677501" y="5969000"/>
+            <a:ext cx="1600200" cy="279400"/>
           </a:xfrm>
           <a:prstGeom prst="rect">
             <a:avLst/>
           </a:prstGeom>
         </p:spPr>
         <p:txBody>
-          <a:bodyPr vert="horz" lIns="91440" tIns="45720" rIns="91440" bIns="45720" rtlCol="0">
-            <a:normAutofit/>
-          </a:bodyPr>
-          <a:lstStyle/>
-          <a:p>
-            <a:pPr lvl="0"/>
-            <a:r>
-              <a:rPr lang="en-US"/>
-              <a:t>Click to edit Master text styles</a:t>
-            </a:r>
-          </a:p>
-          <a:p>
-            <a:pPr lvl="1"/>
-            <a:r>
-              <a:rPr lang="en-US"/>
-              <a:t>Second level</a:t>
-            </a:r>
-          </a:p>
-          <a:p>
-            <a:pPr lvl="2"/>
-            <a:r>
-              <a:rPr lang="en-US"/>
-              <a:t>Third level</a:t>
-            </a:r>
-          </a:p>
-          <a:p>
-            <a:pPr lvl="3"/>
-            <a:r>
-              <a:rPr lang="en-US"/>
-              <a:t>Fourth level</a:t>
-            </a:r>
-          </a:p>
-          <a:p>
-            <a:pPr lvl="4"/>
-            <a:r>
-              <a:rPr lang="en-US"/>
-              <a:t>Fifth level</a:t>
-            </a:r>
-          </a:p>
-        </p:txBody>
-      </p:sp>
-      <p:sp>
-        <p:nvSpPr>
-          <p:cNvPr id="4" name="Date Placeholder 3">
-            <a:extLst>
-              <a:ext uri="{FF2B5EF4-FFF2-40B4-BE49-F238E27FC236}">
-                <a16:creationId xmlns:a16="http://schemas.microsoft.com/office/drawing/2014/main" id="{28409BEC-41FD-CF2D-864C-33DC0AA2C390}"/>
-              </a:ext>
-            </a:extLst>
-          </p:cNvPr>
-          <p:cNvSpPr>
-            <a:spLocks noGrp="1"/>
-          </p:cNvSpPr>
-          <p:nvPr>
-            <p:ph type="dt" sz="half" idx="2"/>
+          <a:bodyPr vert="horz" lIns="91440" tIns="45720" rIns="91440" bIns="45720" rtlCol="0" anchor="ctr"/>
+          <a:lstStyle>
+            <a:lvl1pPr algn="r">
+              <a:defRPr sz="1000" b="0" i="0">
+                <a:solidFill>
+                  <a:schemeClr val="tx1"/>
+                </a:solidFill>
+                <a:effectLst/>
+                <a:latin typeface="+mn-lt"/>
+              </a:defRPr>
+            </a:lvl1pPr>
+          </a:lstStyle>
+          <a:p>
+            <a:fld id="{770ACC15-3B6C-44B3-9657-2837D8130729}" type="datetimeFigureOut">
+              <a:rPr lang="en-US" smtClean="0"/>
+              <a:t>3/5/2026</a:t>
+            </a:fld>
+            <a:endParaRPr lang="en-US"/>
+          </a:p>
+        </p:txBody>
+      </p:sp>
+      <p:sp>
+        <p:nvSpPr>
+          <p:cNvPr id="5" name="Footer Placeholder 4"/>
+          <p:cNvSpPr>
+            <a:spLocks noGrp="1"/>
+          </p:cNvSpPr>
+          <p:nvPr>
+            <p:ph type="ftr" sz="quarter" idx="3"/>
           </p:nvPr>
         </p:nvSpPr>
         <p:spPr>
           <a:xfrm>
-            <a:off x="838200" y="6356350"/>
-            <a:ext cx="2743200" cy="365125"/>
+            <a:off x="1295401" y="5969000"/>
+            <a:ext cx="7305900" cy="279400"/>
           </a:xfrm>
           <a:prstGeom prst="rect">
             <a:avLst/>
@@ -2892,44 +5367,34 @@
           <a:bodyPr vert="horz" lIns="91440" tIns="45720" rIns="91440" bIns="45720" rtlCol="0" anchor="ctr"/>
           <a:lstStyle>
             <a:lvl1pPr algn="l">
-              <a:defRPr sz="1200">
-                <a:solidFill>
-                  <a:schemeClr val="tx1">
-                    <a:tint val="75000"/>
-                  </a:schemeClr>
-                </a:solidFill>
+              <a:defRPr sz="1000" b="0" i="0">
+                <a:solidFill>
+                  <a:schemeClr val="tx1"/>
+                </a:solidFill>
+                <a:effectLst/>
+                <a:latin typeface="+mn-lt"/>
               </a:defRPr>
             </a:lvl1pPr>
           </a:lstStyle>
           <a:p>
-            <a:fld id="{770ACC15-3B6C-44B3-9657-2837D8130729}" type="datetimeFigureOut">
-              <a:rPr lang="en-US" smtClean="0"/>
-              <a:t>3/4/2026</a:t>
-            </a:fld>
             <a:endParaRPr lang="en-US"/>
           </a:p>
         </p:txBody>
       </p:sp>
       <p:sp>
         <p:nvSpPr>
-          <p:cNvPr id="5" name="Footer Placeholder 4">
-            <a:extLst>
-              <a:ext uri="{FF2B5EF4-FFF2-40B4-BE49-F238E27FC236}">
-                <a16:creationId xmlns:a16="http://schemas.microsoft.com/office/drawing/2014/main" id="{C30CF5DD-C922-E746-EBBC-4DD3F133C8E1}"/>
-              </a:ext>
-            </a:extLst>
-          </p:cNvPr>
-          <p:cNvSpPr>
-            <a:spLocks noGrp="1"/>
-          </p:cNvSpPr>
-          <p:nvPr>
-            <p:ph type="ftr" sz="quarter" idx="3"/>
+          <p:cNvPr id="6" name="Slide Number Placeholder 5"/>
+          <p:cNvSpPr>
+            <a:spLocks noGrp="1"/>
+          </p:cNvSpPr>
+          <p:nvPr>
+            <p:ph type="sldNum" sz="quarter" idx="4"/>
           </p:nvPr>
         </p:nvSpPr>
         <p:spPr>
           <a:xfrm>
-            <a:off x="4038600" y="6356350"/>
-            <a:ext cx="4114800" cy="365125"/>
+            <a:off x="10353901" y="5969000"/>
+            <a:ext cx="542697" cy="279400"/>
           </a:xfrm>
           <a:prstGeom prst="rect">
             <a:avLst/>
@@ -2938,56 +5403,13 @@
         <p:txBody>
           <a:bodyPr vert="horz" lIns="91440" tIns="45720" rIns="91440" bIns="45720" rtlCol="0" anchor="ctr"/>
           <a:lstStyle>
-            <a:lvl1pPr algn="ctr">
-              <a:defRPr sz="1200">
-                <a:solidFill>
-                  <a:schemeClr val="tx1">
-                    <a:tint val="75000"/>
-                  </a:schemeClr>
-                </a:solidFill>
-              </a:defRPr>
-            </a:lvl1pPr>
-          </a:lstStyle>
-          <a:p>
-            <a:endParaRPr lang="en-US"/>
-          </a:p>
-        </p:txBody>
-      </p:sp>
-      <p:sp>
-        <p:nvSpPr>
-          <p:cNvPr id="6" name="Slide Number Placeholder 5">
-            <a:extLst>
-              <a:ext uri="{FF2B5EF4-FFF2-40B4-BE49-F238E27FC236}">
-                <a16:creationId xmlns:a16="http://schemas.microsoft.com/office/drawing/2014/main" id="{B6F9F5FF-AEF9-8B3E-C92E-3D884C2B4E9C}"/>
-              </a:ext>
-            </a:extLst>
-          </p:cNvPr>
-          <p:cNvSpPr>
-            <a:spLocks noGrp="1"/>
-          </p:cNvSpPr>
-          <p:nvPr>
-            <p:ph type="sldNum" sz="quarter" idx="4"/>
-          </p:nvPr>
-        </p:nvSpPr>
-        <p:spPr>
-          <a:xfrm>
-            <a:off x="8610600" y="6356350"/>
-            <a:ext cx="2743200" cy="365125"/>
-          </a:xfrm>
-          <a:prstGeom prst="rect">
-            <a:avLst/>
-          </a:prstGeom>
-        </p:spPr>
-        <p:txBody>
-          <a:bodyPr vert="horz" lIns="91440" tIns="45720" rIns="91440" bIns="45720" rtlCol="0" anchor="ctr"/>
-          <a:lstStyle>
             <a:lvl1pPr algn="r">
-              <a:defRPr sz="1200">
-                <a:solidFill>
-                  <a:schemeClr val="tx1">
-                    <a:tint val="75000"/>
-                  </a:schemeClr>
-                </a:solidFill>
+              <a:defRPr sz="1000" b="0" i="0">
+                <a:solidFill>
+                  <a:schemeClr val="tx1"/>
+                </a:solidFill>
+                <a:effectLst/>
+                <a:latin typeface="+mn-lt"/>
               </a:defRPr>
             </a:lvl1pPr>
           </a:lstStyle>
@@ -3003,202 +5425,340 @@
     </p:spTree>
     <p:extLst>
       <p:ext uri="{BB962C8B-B14F-4D97-AF65-F5344CB8AC3E}">
-        <p14:creationId xmlns:p14="http://schemas.microsoft.com/office/powerpoint/2010/main" val="356740782"/>
+        <p14:creationId xmlns:p14="http://schemas.microsoft.com/office/powerpoint/2010/main" val="1091457109"/>
       </p:ext>
     </p:extLst>
   </p:cSld>
   <p:clrMap bg1="lt1" tx1="dk1" bg2="lt2" tx2="dk2" accent1="accent1" accent2="accent2" accent3="accent3" accent4="accent4" accent5="accent5" accent6="accent6" hlink="hlink" folHlink="folHlink"/>
   <p:sldLayoutIdLst>
-    <p:sldLayoutId id="2147483649" r:id="rId1"/>
-    <p:sldLayoutId id="2147483650" r:id="rId2"/>
-    <p:sldLayoutId id="2147483651" r:id="rId3"/>
-    <p:sldLayoutId id="2147483652" r:id="rId4"/>
-    <p:sldLayoutId id="2147483653" r:id="rId5"/>
-    <p:sldLayoutId id="2147483654" r:id="rId6"/>
-    <p:sldLayoutId id="2147483655" r:id="rId7"/>
-    <p:sldLayoutId id="2147483656" r:id="rId8"/>
-    <p:sldLayoutId id="2147483657" r:id="rId9"/>
-    <p:sldLayoutId id="2147483658" r:id="rId10"/>
-    <p:sldLayoutId id="2147483659" r:id="rId11"/>
+    <p:sldLayoutId id="2147483661" r:id="rId1"/>
+    <p:sldLayoutId id="2147483662" r:id="rId2"/>
+    <p:sldLayoutId id="2147483663" r:id="rId3"/>
+    <p:sldLayoutId id="2147483664" r:id="rId4"/>
+    <p:sldLayoutId id="2147483665" r:id="rId5"/>
+    <p:sldLayoutId id="2147483666" r:id="rId6"/>
+    <p:sldLayoutId id="2147483667" r:id="rId7"/>
+    <p:sldLayoutId id="2147483668" r:id="rId8"/>
+    <p:sldLayoutId id="2147483669" r:id="rId9"/>
+    <p:sldLayoutId id="2147483670" r:id="rId10"/>
+    <p:sldLayoutId id="2147483671" r:id="rId11"/>
+    <p:sldLayoutId id="2147483672" r:id="rId12"/>
+    <p:sldLayoutId id="2147483673" r:id="rId13"/>
+    <p:sldLayoutId id="2147483674" r:id="rId14"/>
+    <p:sldLayoutId id="2147483675" r:id="rId15"/>
+    <p:sldLayoutId id="2147483676" r:id="rId16"/>
+    <p:sldLayoutId id="2147483677" r:id="rId17"/>
   </p:sldLayoutIdLst>
   <p:txStyles>
     <p:titleStyle>
-      <a:lvl1pPr algn="l" defTabSz="914400" rtl="0" eaLnBrk="1" latinLnBrk="0" hangingPunct="1">
-        <a:lnSpc>
-          <a:spcPct val="90000"/>
-        </a:lnSpc>
+      <a:lvl1pPr algn="ctr" defTabSz="457200" rtl="0" eaLnBrk="1" latinLnBrk="0" hangingPunct="1">
         <a:spcBef>
           <a:spcPct val="0"/>
         </a:spcBef>
         <a:buNone/>
-        <a:defRPr sz="4400" kern="1200">
+        <a:defRPr sz="4400" kern="1200" cap="none">
+          <a:ln w="3175" cmpd="sng">
+            <a:noFill/>
+          </a:ln>
           <a:solidFill>
-            <a:schemeClr val="tx1"/>
+            <a:schemeClr val="tx1">
+              <a:lumMod val="85000"/>
+              <a:lumOff val="15000"/>
+            </a:schemeClr>
           </a:solidFill>
+          <a:effectLst/>
           <a:latin typeface="+mj-lt"/>
           <a:ea typeface="+mj-ea"/>
           <a:cs typeface="+mj-cs"/>
         </a:defRPr>
       </a:lvl1pPr>
+      <a:lvl2pPr eaLnBrk="1" hangingPunct="1">
+        <a:defRPr>
+          <a:solidFill>
+            <a:schemeClr val="tx2"/>
+          </a:solidFill>
+        </a:defRPr>
+      </a:lvl2pPr>
+      <a:lvl3pPr eaLnBrk="1" hangingPunct="1">
+        <a:defRPr>
+          <a:solidFill>
+            <a:schemeClr val="tx2"/>
+          </a:solidFill>
+        </a:defRPr>
+      </a:lvl3pPr>
+      <a:lvl4pPr eaLnBrk="1" hangingPunct="1">
+        <a:defRPr>
+          <a:solidFill>
+            <a:schemeClr val="tx2"/>
+          </a:solidFill>
+        </a:defRPr>
+      </a:lvl4pPr>
+      <a:lvl5pPr eaLnBrk="1" hangingPunct="1">
+        <a:defRPr>
+          <a:solidFill>
+            <a:schemeClr val="tx2"/>
+          </a:solidFill>
+        </a:defRPr>
+      </a:lvl5pPr>
+      <a:lvl6pPr eaLnBrk="1" hangingPunct="1">
+        <a:defRPr>
+          <a:solidFill>
+            <a:schemeClr val="tx2"/>
+          </a:solidFill>
+        </a:defRPr>
+      </a:lvl6pPr>
+      <a:lvl7pPr eaLnBrk="1" hangingPunct="1">
+        <a:defRPr>
+          <a:solidFill>
+            <a:schemeClr val="tx2"/>
+          </a:solidFill>
+        </a:defRPr>
+      </a:lvl7pPr>
+      <a:lvl8pPr eaLnBrk="1" hangingPunct="1">
+        <a:defRPr>
+          <a:solidFill>
+            <a:schemeClr val="tx2"/>
+          </a:solidFill>
+        </a:defRPr>
+      </a:lvl8pPr>
+      <a:lvl9pPr eaLnBrk="1" hangingPunct="1">
+        <a:defRPr>
+          <a:solidFill>
+            <a:schemeClr val="tx2"/>
+          </a:solidFill>
+        </a:defRPr>
+      </a:lvl9pPr>
     </p:titleStyle>
     <p:bodyStyle>
-      <a:lvl1pPr marL="228600" indent="-228600" algn="l" defTabSz="914400" rtl="0" eaLnBrk="1" latinLnBrk="0" hangingPunct="1">
-        <a:lnSpc>
-          <a:spcPct val="90000"/>
-        </a:lnSpc>
+      <a:lvl1pPr marL="285750" indent="-285750" algn="l" defTabSz="457200" rtl="0" eaLnBrk="1" latinLnBrk="0" hangingPunct="1">
         <a:spcBef>
-          <a:spcPts val="1000"/>
+          <a:spcPct val="20000"/>
         </a:spcBef>
-        <a:buFont typeface="Arial" panose="020B0604020202020204" pitchFamily="34" charset="0"/>
+        <a:spcAft>
+          <a:spcPts val="600"/>
+        </a:spcAft>
+        <a:buClr>
+          <a:schemeClr val="accent1"/>
+        </a:buClr>
+        <a:buSzPct val="115000"/>
+        <a:buFont typeface="Arial"/>
         <a:buChar char="•"/>
-        <a:defRPr sz="2800" kern="1200">
+        <a:defRPr sz="2400" kern="1200" cap="none">
           <a:solidFill>
-            <a:schemeClr val="tx1"/>
+            <a:schemeClr val="tx1">
+              <a:lumMod val="85000"/>
+              <a:lumOff val="15000"/>
+            </a:schemeClr>
           </a:solidFill>
+          <a:effectLst/>
           <a:latin typeface="+mn-lt"/>
           <a:ea typeface="+mn-ea"/>
           <a:cs typeface="+mn-cs"/>
         </a:defRPr>
       </a:lvl1pPr>
-      <a:lvl2pPr marL="685800" indent="-228600" algn="l" defTabSz="914400" rtl="0" eaLnBrk="1" latinLnBrk="0" hangingPunct="1">
-        <a:lnSpc>
-          <a:spcPct val="90000"/>
-        </a:lnSpc>
+      <a:lvl2pPr marL="742950" indent="-285750" algn="l" defTabSz="457200" rtl="0" eaLnBrk="1" latinLnBrk="0" hangingPunct="1">
         <a:spcBef>
-          <a:spcPts val="500"/>
+          <a:spcPct val="20000"/>
         </a:spcBef>
-        <a:buFont typeface="Arial" panose="020B0604020202020204" pitchFamily="34" charset="0"/>
+        <a:spcAft>
+          <a:spcPts val="600"/>
+        </a:spcAft>
+        <a:buClr>
+          <a:schemeClr val="accent1"/>
+        </a:buClr>
+        <a:buSzPct val="115000"/>
+        <a:buFont typeface="Arial"/>
         <a:buChar char="•"/>
-        <a:defRPr sz="2400" kern="1200">
+        <a:defRPr sz="2000" kern="1200" cap="none">
           <a:solidFill>
-            <a:schemeClr val="tx1"/>
+            <a:schemeClr val="tx1">
+              <a:lumMod val="85000"/>
+              <a:lumOff val="15000"/>
+            </a:schemeClr>
           </a:solidFill>
+          <a:effectLst/>
           <a:latin typeface="+mn-lt"/>
           <a:ea typeface="+mn-ea"/>
           <a:cs typeface="+mn-cs"/>
         </a:defRPr>
       </a:lvl2pPr>
-      <a:lvl3pPr marL="1143000" indent="-228600" algn="l" defTabSz="914400" rtl="0" eaLnBrk="1" latinLnBrk="0" hangingPunct="1">
-        <a:lnSpc>
-          <a:spcPct val="90000"/>
-        </a:lnSpc>
+      <a:lvl3pPr marL="1200150" indent="-285750" algn="l" defTabSz="457200" rtl="0" eaLnBrk="1" latinLnBrk="0" hangingPunct="1">
         <a:spcBef>
-          <a:spcPts val="500"/>
+          <a:spcPct val="20000"/>
         </a:spcBef>
-        <a:buFont typeface="Arial" panose="020B0604020202020204" pitchFamily="34" charset="0"/>
+        <a:spcAft>
+          <a:spcPts val="600"/>
+        </a:spcAft>
+        <a:buClr>
+          <a:schemeClr val="accent1"/>
+        </a:buClr>
+        <a:buSzPct val="115000"/>
+        <a:buFont typeface="Arial"/>
         <a:buChar char="•"/>
-        <a:defRPr sz="2000" kern="1200">
+        <a:defRPr sz="1800" kern="1200" cap="none">
           <a:solidFill>
-            <a:schemeClr val="tx1"/>
+            <a:schemeClr val="tx1">
+              <a:lumMod val="85000"/>
+              <a:lumOff val="15000"/>
+            </a:schemeClr>
           </a:solidFill>
+          <a:effectLst/>
           <a:latin typeface="+mn-lt"/>
           <a:ea typeface="+mn-ea"/>
           <a:cs typeface="+mn-cs"/>
         </a:defRPr>
       </a:lvl3pPr>
-      <a:lvl4pPr marL="1600200" indent="-228600" algn="l" defTabSz="914400" rtl="0" eaLnBrk="1" latinLnBrk="0" hangingPunct="1">
-        <a:lnSpc>
-          <a:spcPct val="90000"/>
-        </a:lnSpc>
+      <a:lvl4pPr marL="1543050" indent="-171450" algn="l" defTabSz="457200" rtl="0" eaLnBrk="1" latinLnBrk="0" hangingPunct="1">
         <a:spcBef>
-          <a:spcPts val="500"/>
+          <a:spcPct val="20000"/>
         </a:spcBef>
-        <a:buFont typeface="Arial" panose="020B0604020202020204" pitchFamily="34" charset="0"/>
+        <a:spcAft>
+          <a:spcPts val="600"/>
+        </a:spcAft>
+        <a:buClr>
+          <a:schemeClr val="accent1"/>
+        </a:buClr>
+        <a:buSzPct val="115000"/>
+        <a:buFont typeface="Arial"/>
         <a:buChar char="•"/>
-        <a:defRPr sz="1800" kern="1200">
+        <a:defRPr sz="1600" kern="1200" cap="none">
           <a:solidFill>
-            <a:schemeClr val="tx1"/>
+            <a:schemeClr val="tx1">
+              <a:lumMod val="85000"/>
+              <a:lumOff val="15000"/>
+            </a:schemeClr>
           </a:solidFill>
+          <a:effectLst/>
           <a:latin typeface="+mn-lt"/>
           <a:ea typeface="+mn-ea"/>
           <a:cs typeface="+mn-cs"/>
         </a:defRPr>
       </a:lvl4pPr>
-      <a:lvl5pPr marL="2057400" indent="-228600" algn="l" defTabSz="914400" rtl="0" eaLnBrk="1" latinLnBrk="0" hangingPunct="1">
-        <a:lnSpc>
-          <a:spcPct val="90000"/>
-        </a:lnSpc>
+      <a:lvl5pPr marL="2000250" indent="-171450" algn="l" defTabSz="457200" rtl="0" eaLnBrk="1" latinLnBrk="0" hangingPunct="1">
         <a:spcBef>
-          <a:spcPts val="500"/>
+          <a:spcPct val="20000"/>
         </a:spcBef>
-        <a:buFont typeface="Arial" panose="020B0604020202020204" pitchFamily="34" charset="0"/>
+        <a:spcAft>
+          <a:spcPts val="600"/>
+        </a:spcAft>
+        <a:buClr>
+          <a:schemeClr val="accent1"/>
+        </a:buClr>
+        <a:buSzPct val="115000"/>
+        <a:buFont typeface="Arial"/>
         <a:buChar char="•"/>
-        <a:defRPr sz="1800" kern="1200">
+        <a:defRPr sz="1400" kern="1200" cap="none">
           <a:solidFill>
-            <a:schemeClr val="tx1"/>
+            <a:schemeClr val="tx1">
+              <a:lumMod val="85000"/>
+              <a:lumOff val="15000"/>
+            </a:schemeClr>
           </a:solidFill>
+          <a:effectLst/>
           <a:latin typeface="+mn-lt"/>
           <a:ea typeface="+mn-ea"/>
           <a:cs typeface="+mn-cs"/>
         </a:defRPr>
       </a:lvl5pPr>
-      <a:lvl6pPr marL="2514600" indent="-228600" algn="l" defTabSz="914400" rtl="0" eaLnBrk="1" latinLnBrk="0" hangingPunct="1">
-        <a:lnSpc>
-          <a:spcPct val="90000"/>
-        </a:lnSpc>
+      <a:lvl6pPr marL="2514600" indent="-228600" algn="l" defTabSz="457200" rtl="0" eaLnBrk="1" latinLnBrk="0" hangingPunct="1">
         <a:spcBef>
-          <a:spcPts val="500"/>
+          <a:spcPct val="20000"/>
         </a:spcBef>
-        <a:buFont typeface="Arial" panose="020B0604020202020204" pitchFamily="34" charset="0"/>
+        <a:spcAft>
+          <a:spcPts val="600"/>
+        </a:spcAft>
+        <a:buClr>
+          <a:schemeClr val="accent1"/>
+        </a:buClr>
+        <a:buSzPct val="115000"/>
+        <a:buFont typeface="Arial"/>
         <a:buChar char="•"/>
-        <a:defRPr sz="1800" kern="1200">
+        <a:defRPr sz="1400" kern="1200" cap="none">
           <a:solidFill>
-            <a:schemeClr val="tx1"/>
+            <a:schemeClr val="tx1">
+              <a:lumMod val="85000"/>
+              <a:lumOff val="15000"/>
+            </a:schemeClr>
           </a:solidFill>
+          <a:effectLst/>
           <a:latin typeface="+mn-lt"/>
           <a:ea typeface="+mn-ea"/>
           <a:cs typeface="+mn-cs"/>
         </a:defRPr>
       </a:lvl6pPr>
-      <a:lvl7pPr marL="2971800" indent="-228600" algn="l" defTabSz="914400" rtl="0" eaLnBrk="1" latinLnBrk="0" hangingPunct="1">
-        <a:lnSpc>
-          <a:spcPct val="90000"/>
-        </a:lnSpc>
+      <a:lvl7pPr marL="2971800" indent="-228600" algn="l" defTabSz="457200" rtl="0" eaLnBrk="1" latinLnBrk="0" hangingPunct="1">
         <a:spcBef>
-          <a:spcPts val="500"/>
+          <a:spcPct val="20000"/>
         </a:spcBef>
-        <a:buFont typeface="Arial" panose="020B0604020202020204" pitchFamily="34" charset="0"/>
+        <a:spcAft>
+          <a:spcPts val="600"/>
+        </a:spcAft>
+        <a:buClr>
+          <a:schemeClr val="accent1"/>
+        </a:buClr>
+        <a:buSzPct val="115000"/>
+        <a:buFont typeface="Arial"/>
         <a:buChar char="•"/>
-        <a:defRPr sz="1800" kern="1200">
+        <a:defRPr sz="1400" kern="1200" cap="none">
           <a:solidFill>
-            <a:schemeClr val="tx1"/>
+            <a:schemeClr val="tx1">
+              <a:lumMod val="85000"/>
+              <a:lumOff val="15000"/>
+            </a:schemeClr>
           </a:solidFill>
+          <a:effectLst/>
           <a:latin typeface="+mn-lt"/>
           <a:ea typeface="+mn-ea"/>
           <a:cs typeface="+mn-cs"/>
         </a:defRPr>
       </a:lvl7pPr>
-      <a:lvl8pPr marL="3429000" indent="-228600" algn="l" defTabSz="914400" rtl="0" eaLnBrk="1" latinLnBrk="0" hangingPunct="1">
-        <a:lnSpc>
-          <a:spcPct val="90000"/>
-        </a:lnSpc>
+      <a:lvl8pPr marL="3429000" indent="-228600" algn="l" defTabSz="457200" rtl="0" eaLnBrk="1" latinLnBrk="0" hangingPunct="1">
         <a:spcBef>
-          <a:spcPts val="500"/>
+          <a:spcPct val="20000"/>
         </a:spcBef>
-        <a:buFont typeface="Arial" panose="020B0604020202020204" pitchFamily="34" charset="0"/>
+        <a:spcAft>
+          <a:spcPts val="600"/>
+        </a:spcAft>
+        <a:buClr>
+          <a:schemeClr val="accent1"/>
+        </a:buClr>
+        <a:buSzPct val="115000"/>
+        <a:buFont typeface="Arial"/>
         <a:buChar char="•"/>
-        <a:defRPr sz="1800" kern="1200">
+        <a:defRPr sz="1400" kern="1200" cap="none">
           <a:solidFill>
-            <a:schemeClr val="tx1"/>
+            <a:schemeClr val="tx1">
+              <a:lumMod val="85000"/>
+              <a:lumOff val="15000"/>
+            </a:schemeClr>
           </a:solidFill>
+          <a:effectLst/>
           <a:latin typeface="+mn-lt"/>
           <a:ea typeface="+mn-ea"/>
           <a:cs typeface="+mn-cs"/>
         </a:defRPr>
       </a:lvl8pPr>
-      <a:lvl9pPr marL="3886200" indent="-228600" algn="l" defTabSz="914400" rtl="0" eaLnBrk="1" latinLnBrk="0" hangingPunct="1">
-        <a:lnSpc>
-          <a:spcPct val="90000"/>
-        </a:lnSpc>
+      <a:lvl9pPr marL="3886200" indent="-228600" algn="l" defTabSz="457200" rtl="0" eaLnBrk="1" latinLnBrk="0" hangingPunct="1">
         <a:spcBef>
-          <a:spcPts val="500"/>
+          <a:spcPct val="20000"/>
         </a:spcBef>
-        <a:buFont typeface="Arial" panose="020B0604020202020204" pitchFamily="34" charset="0"/>
+        <a:spcAft>
+          <a:spcPts val="600"/>
+        </a:spcAft>
+        <a:buClr>
+          <a:schemeClr val="accent1"/>
+        </a:buClr>
+        <a:buSzPct val="115000"/>
+        <a:buFont typeface="Arial"/>
         <a:buChar char="•"/>
-        <a:defRPr sz="1800" kern="1200">
+        <a:defRPr sz="1400" kern="1200" cap="none">
           <a:solidFill>
-            <a:schemeClr val="tx1"/>
+            <a:schemeClr val="tx1">
+              <a:lumMod val="85000"/>
+              <a:lumOff val="15000"/>
+            </a:schemeClr>
           </a:solidFill>
+          <a:effectLst/>
           <a:latin typeface="+mn-lt"/>
           <a:ea typeface="+mn-ea"/>
           <a:cs typeface="+mn-cs"/>
@@ -3209,7 +5769,7 @@
       <a:defPPr>
         <a:defRPr lang="en-US"/>
       </a:defPPr>
-      <a:lvl1pPr marL="0" algn="l" defTabSz="914400" rtl="0" eaLnBrk="1" latinLnBrk="0" hangingPunct="1">
+      <a:lvl1pPr marL="0" algn="l" defTabSz="457200" rtl="0" eaLnBrk="1" latinLnBrk="0" hangingPunct="1">
         <a:defRPr sz="1800" kern="1200">
           <a:solidFill>
             <a:schemeClr val="tx1"/>
@@ -3219,7 +5779,7 @@
           <a:cs typeface="+mn-cs"/>
         </a:defRPr>
       </a:lvl1pPr>
-      <a:lvl2pPr marL="457200" algn="l" defTabSz="914400" rtl="0" eaLnBrk="1" latinLnBrk="0" hangingPunct="1">
+      <a:lvl2pPr marL="457200" algn="l" defTabSz="457200" rtl="0" eaLnBrk="1" latinLnBrk="0" hangingPunct="1">
         <a:defRPr sz="1800" kern="1200">
           <a:solidFill>
             <a:schemeClr val="tx1"/>
@@ -3229,7 +5789,7 @@
           <a:cs typeface="+mn-cs"/>
         </a:defRPr>
       </a:lvl2pPr>
-      <a:lvl3pPr marL="914400" algn="l" defTabSz="914400" rtl="0" eaLnBrk="1" latinLnBrk="0" hangingPunct="1">
+      <a:lvl3pPr marL="914400" algn="l" defTabSz="457200" rtl="0" eaLnBrk="1" latinLnBrk="0" hangingPunct="1">
         <a:defRPr sz="1800" kern="1200">
           <a:solidFill>
             <a:schemeClr val="tx1"/>
@@ -3239,7 +5799,7 @@
           <a:cs typeface="+mn-cs"/>
         </a:defRPr>
       </a:lvl3pPr>
-      <a:lvl4pPr marL="1371600" algn="l" defTabSz="914400" rtl="0" eaLnBrk="1" latinLnBrk="0" hangingPunct="1">
+      <a:lvl4pPr marL="1371600" algn="l" defTabSz="457200" rtl="0" eaLnBrk="1" latinLnBrk="0" hangingPunct="1">
         <a:defRPr sz="1800" kern="1200">
           <a:solidFill>
             <a:schemeClr val="tx1"/>
@@ -3249,7 +5809,7 @@
           <a:cs typeface="+mn-cs"/>
         </a:defRPr>
       </a:lvl4pPr>
-      <a:lvl5pPr marL="1828800" algn="l" defTabSz="914400" rtl="0" eaLnBrk="1" latinLnBrk="0" hangingPunct="1">
+      <a:lvl5pPr marL="1828800" algn="l" defTabSz="457200" rtl="0" eaLnBrk="1" latinLnBrk="0" hangingPunct="1">
         <a:defRPr sz="1800" kern="1200">
           <a:solidFill>
             <a:schemeClr val="tx1"/>
@@ -3259,7 +5819,7 @@
           <a:cs typeface="+mn-cs"/>
         </a:defRPr>
       </a:lvl5pPr>
-      <a:lvl6pPr marL="2286000" algn="l" defTabSz="914400" rtl="0" eaLnBrk="1" latinLnBrk="0" hangingPunct="1">
+      <a:lvl6pPr marL="2286000" algn="l" defTabSz="457200" rtl="0" eaLnBrk="1" latinLnBrk="0" hangingPunct="1">
         <a:defRPr sz="1800" kern="1200">
           <a:solidFill>
             <a:schemeClr val="tx1"/>
@@ -3269,7 +5829,7 @@
           <a:cs typeface="+mn-cs"/>
         </a:defRPr>
       </a:lvl6pPr>
-      <a:lvl7pPr marL="2743200" algn="l" defTabSz="914400" rtl="0" eaLnBrk="1" latinLnBrk="0" hangingPunct="1">
+      <a:lvl7pPr marL="2743200" algn="l" defTabSz="457200" rtl="0" eaLnBrk="1" latinLnBrk="0" hangingPunct="1">
         <a:defRPr sz="1800" kern="1200">
           <a:solidFill>
             <a:schemeClr val="tx1"/>
@@ -3279,7 +5839,7 @@
           <a:cs typeface="+mn-cs"/>
         </a:defRPr>
       </a:lvl7pPr>
-      <a:lvl8pPr marL="3200400" algn="l" defTabSz="914400" rtl="0" eaLnBrk="1" latinLnBrk="0" hangingPunct="1">
+      <a:lvl8pPr marL="3200400" algn="l" defTabSz="457200" rtl="0" eaLnBrk="1" latinLnBrk="0" hangingPunct="1">
         <a:defRPr sz="1800" kern="1200">
           <a:solidFill>
             <a:schemeClr val="tx1"/>
@@ -3289,7 +5849,7 @@
           <a:cs typeface="+mn-cs"/>
         </a:defRPr>
       </a:lvl8pPr>
-      <a:lvl9pPr marL="3657600" algn="l" defTabSz="914400" rtl="0" eaLnBrk="1" latinLnBrk="0" hangingPunct="1">
+      <a:lvl9pPr marL="3657600" algn="l" defTabSz="457200" rtl="0" eaLnBrk="1" latinLnBrk="0" hangingPunct="1">
         <a:defRPr sz="1800" kern="1200">
           <a:solidFill>
             <a:schemeClr val="tx1"/>
@@ -3321,6 +5881,151 @@
           <a:chExt cx="0" cy="0"/>
         </a:xfrm>
       </p:grpSpPr>
+      <p:sp>
+        <p:nvSpPr>
+          <p:cNvPr id="2" name="TextBox 1">
+            <a:extLst>
+              <a:ext uri="{FF2B5EF4-FFF2-40B4-BE49-F238E27FC236}">
+                <a16:creationId xmlns:a16="http://schemas.microsoft.com/office/drawing/2014/main" id="{B6EF000A-A15B-29D0-8962-3E618F50C873}"/>
+              </a:ext>
+            </a:extLst>
+          </p:cNvPr>
+          <p:cNvSpPr txBox="1"/>
+          <p:nvPr/>
+        </p:nvSpPr>
+        <p:spPr>
+          <a:xfrm>
+            <a:off x="792480" y="822960"/>
+            <a:ext cx="10607040" cy="4770537"/>
+          </a:xfrm>
+          <a:prstGeom prst="rect">
+            <a:avLst/>
+          </a:prstGeom>
+          <a:noFill/>
+        </p:spPr>
+        <p:txBody>
+          <a:bodyPr wrap="square" rtlCol="0">
+            <a:spAutoFit/>
+          </a:bodyPr>
+          <a:lstStyle/>
+          <a:p>
+            <a:pPr algn="ctr"/>
+            <a:endParaRPr lang="en-US" sz="1800" dirty="0"/>
+          </a:p>
+          <a:p>
+            <a:pPr algn="ctr"/>
+            <a:r>
+              <a:rPr lang="en-US" sz="5400" b="1" dirty="0">
+                <a:latin typeface="Algerian" panose="04020705040A02060702" pitchFamily="82" charset="0"/>
+              </a:rPr>
+              <a:t>Title:</a:t>
+            </a:r>
+            <a:r>
+              <a:rPr lang="en-US" sz="6600" b="1" dirty="0">
+                <a:solidFill>
+                  <a:srgbClr val="FF0000"/>
+                </a:solidFill>
+                <a:latin typeface="Algerian" panose="04020705040A02060702" pitchFamily="82" charset="0"/>
+              </a:rPr>
+              <a:t> HTTP STATUS CODE</a:t>
+            </a:r>
+          </a:p>
+          <a:p>
+            <a:pPr algn="ctr"/>
+            <a:endParaRPr lang="en-US" sz="2400" dirty="0">
+              <a:solidFill>
+                <a:srgbClr val="FF0000"/>
+              </a:solidFill>
+            </a:endParaRPr>
+          </a:p>
+          <a:p>
+            <a:pPr algn="ctr"/>
+            <a:endParaRPr lang="en-US" sz="2400" dirty="0">
+              <a:solidFill>
+                <a:srgbClr val="FF0000"/>
+              </a:solidFill>
+            </a:endParaRPr>
+          </a:p>
+          <a:p>
+            <a:pPr marL="285750" indent="-285750" algn="just">
+              <a:buFont typeface="Wingdings" panose="05000000000000000000" pitchFamily="2" charset="2"/>
+              <a:buChar char="v"/>
+            </a:pPr>
+            <a:r>
+              <a:rPr lang="en-US" sz="3600" dirty="0">
+                <a:latin typeface="Algerian" panose="04020705040A02060702" pitchFamily="82" charset="0"/>
+              </a:rPr>
+              <a:t>Presented by</a:t>
+            </a:r>
+            <a:r>
+              <a:rPr lang="en-US" sz="2800" dirty="0">
+                <a:latin typeface="Algerian" panose="04020705040A02060702" pitchFamily="82" charset="0"/>
+              </a:rPr>
+              <a:t>: [ </a:t>
+            </a:r>
+            <a:r>
+              <a:rPr lang="en-US" sz="2800" dirty="0" err="1">
+                <a:latin typeface="Algerian" panose="04020705040A02060702" pitchFamily="82" charset="0"/>
+              </a:rPr>
+              <a:t>Ndiwapit</a:t>
+            </a:r>
+            <a:r>
+              <a:rPr lang="en-US" sz="2800" dirty="0">
+                <a:latin typeface="Algerian" panose="04020705040A02060702" pitchFamily="82" charset="0"/>
+              </a:rPr>
+              <a:t>  Jephthah].</a:t>
+            </a:r>
+          </a:p>
+          <a:p>
+            <a:pPr marL="285750" indent="-285750" algn="just">
+              <a:buFont typeface="Wingdings" panose="05000000000000000000" pitchFamily="2" charset="2"/>
+              <a:buChar char="v"/>
+            </a:pPr>
+            <a:endParaRPr lang="en-US" sz="2800" dirty="0">
+              <a:latin typeface="Algerian" panose="04020705040A02060702" pitchFamily="82" charset="0"/>
+            </a:endParaRPr>
+          </a:p>
+          <a:p>
+            <a:pPr marL="285750" indent="-285750" algn="just">
+              <a:buFont typeface="Wingdings" panose="05000000000000000000" pitchFamily="2" charset="2"/>
+              <a:buChar char="v"/>
+            </a:pPr>
+            <a:r>
+              <a:rPr lang="en-US" sz="2800" dirty="0">
+                <a:latin typeface="Algerian" panose="04020705040A02060702" pitchFamily="82" charset="0"/>
+              </a:rPr>
+              <a:t>School: CITECHITM University.</a:t>
+            </a:r>
+          </a:p>
+          <a:p>
+            <a:pPr marL="285750" indent="-285750" algn="just">
+              <a:buFont typeface="Wingdings" panose="05000000000000000000" pitchFamily="2" charset="2"/>
+              <a:buChar char="v"/>
+            </a:pPr>
+            <a:endParaRPr lang="en-US" sz="2800" dirty="0">
+              <a:latin typeface="Algerian" panose="04020705040A02060702" pitchFamily="82" charset="0"/>
+            </a:endParaRPr>
+          </a:p>
+          <a:p>
+            <a:pPr marL="285750" indent="-285750" algn="just">
+              <a:buFont typeface="Wingdings" panose="05000000000000000000" pitchFamily="2" charset="2"/>
+              <a:buChar char="v"/>
+            </a:pPr>
+            <a:r>
+              <a:rPr lang="en-US" sz="2800" dirty="0">
+                <a:latin typeface="Algerian" panose="04020705040A02060702" pitchFamily="82" charset="0"/>
+              </a:rPr>
+              <a:t>Course: Introduction To Web Development.</a:t>
+            </a:r>
+            <a:endParaRPr lang="en-US" sz="1050" dirty="0">
+              <a:latin typeface="Algerian" panose="04020705040A02060702" pitchFamily="82" charset="0"/>
+            </a:endParaRPr>
+          </a:p>
+          <a:p>
+            <a:endParaRPr lang="en-US" dirty="0"/>
+          </a:p>
+        </p:txBody>
+      </p:sp>
     </p:spTree>
     <p:extLst>
       <p:ext uri="{BB962C8B-B14F-4D97-AF65-F5344CB8AC3E}">
@@ -3334,10 +6039,1686 @@
 </p:sld>
 </file>
 
+<file path=ppt/slides/slide10.xml><?xml version="1.0" encoding="utf-8"?>
+<p:sld xmlns:a="http://schemas.openxmlformats.org/drawingml/2006/main" xmlns:r="http://schemas.openxmlformats.org/officeDocument/2006/relationships" xmlns:p="http://schemas.openxmlformats.org/presentationml/2006/main">
+  <p:cSld>
+    <p:spTree>
+      <p:nvGrpSpPr>
+        <p:cNvPr id="1" name="">
+          <a:extLst>
+            <a:ext uri="{FF2B5EF4-FFF2-40B4-BE49-F238E27FC236}">
+              <a16:creationId xmlns:a16="http://schemas.microsoft.com/office/drawing/2014/main" id="{71FB33F9-0964-D3ED-9336-F12D0DD3A72D}"/>
+            </a:ext>
+          </a:extLst>
+        </p:cNvPr>
+        <p:cNvGrpSpPr/>
+        <p:nvPr/>
+      </p:nvGrpSpPr>
+      <p:grpSpPr>
+        <a:xfrm>
+          <a:off x="0" y="0"/>
+          <a:ext cx="0" cy="0"/>
+          <a:chOff x="0" y="0"/>
+          <a:chExt cx="0" cy="0"/>
+        </a:xfrm>
+      </p:grpSpPr>
+      <p:sp>
+        <p:nvSpPr>
+          <p:cNvPr id="2" name="TextBox 1">
+            <a:extLst>
+              <a:ext uri="{FF2B5EF4-FFF2-40B4-BE49-F238E27FC236}">
+                <a16:creationId xmlns:a16="http://schemas.microsoft.com/office/drawing/2014/main" id="{E1E89F68-3BAF-6F04-7DFB-6556C15477D8}"/>
+              </a:ext>
+            </a:extLst>
+          </p:cNvPr>
+          <p:cNvSpPr txBox="1"/>
+          <p:nvPr/>
+        </p:nvSpPr>
+        <p:spPr>
+          <a:xfrm>
+            <a:off x="650240" y="640080"/>
+            <a:ext cx="10901680" cy="2308324"/>
+          </a:xfrm>
+          <a:prstGeom prst="rect">
+            <a:avLst/>
+          </a:prstGeom>
+          <a:noFill/>
+        </p:spPr>
+        <p:txBody>
+          <a:bodyPr wrap="square" rtlCol="0">
+            <a:spAutoFit/>
+          </a:bodyPr>
+          <a:lstStyle/>
+          <a:p>
+            <a:pPr marL="285750" indent="-285750">
+              <a:buFont typeface="Wingdings" panose="05000000000000000000" pitchFamily="2" charset="2"/>
+              <a:buChar char="v"/>
+            </a:pPr>
+            <a:r>
+              <a:rPr lang="en-US" b="1" dirty="0">
+                <a:solidFill>
+                  <a:srgbClr val="00B050"/>
+                </a:solidFill>
+                <a:latin typeface="Arial" panose="020B0604020202020204" pitchFamily="34" charset="0"/>
+                <a:cs typeface="Arial" panose="020B0604020202020204" pitchFamily="34" charset="0"/>
+              </a:rPr>
+              <a:t>503 (Service Unavailable): </a:t>
+            </a:r>
+            <a:r>
+              <a:rPr lang="en-US" dirty="0">
+                <a:latin typeface="Arial" panose="020B0604020202020204" pitchFamily="34" charset="0"/>
+                <a:cs typeface="Arial" panose="020B0604020202020204" pitchFamily="34" charset="0"/>
+              </a:rPr>
+              <a:t>503 errors indicate that the server is temporarily unable to handle the request due to overload or maintenance. In most cases, the issue will be resolved automatically once the server recovers.</a:t>
+            </a:r>
+          </a:p>
+          <a:p>
+            <a:pPr marL="285750" indent="-285750">
+              <a:buFont typeface="Wingdings" panose="05000000000000000000" pitchFamily="2" charset="2"/>
+              <a:buChar char="v"/>
+            </a:pPr>
+            <a:endParaRPr lang="en-US" b="1" dirty="0">
+              <a:solidFill>
+                <a:srgbClr val="00B050"/>
+              </a:solidFill>
+              <a:latin typeface="Arial" panose="020B0604020202020204" pitchFamily="34" charset="0"/>
+              <a:cs typeface="Arial" panose="020B0604020202020204" pitchFamily="34" charset="0"/>
+            </a:endParaRPr>
+          </a:p>
+          <a:p>
+            <a:pPr marL="285750" indent="-285750">
+              <a:buFont typeface="Wingdings" panose="05000000000000000000" pitchFamily="2" charset="2"/>
+              <a:buChar char="v"/>
+            </a:pPr>
+            <a:r>
+              <a:rPr lang="en-US" b="1" dirty="0">
+                <a:solidFill>
+                  <a:srgbClr val="00B050"/>
+                </a:solidFill>
+                <a:latin typeface="Arial" panose="020B0604020202020204" pitchFamily="34" charset="0"/>
+                <a:cs typeface="Arial" panose="020B0604020202020204" pitchFamily="34" charset="0"/>
+              </a:rPr>
+              <a:t>504 (Gateway Timeout): </a:t>
+            </a:r>
+            <a:r>
+              <a:rPr lang="en-US" dirty="0">
+                <a:latin typeface="Arial" panose="020B0604020202020204" pitchFamily="34" charset="0"/>
+                <a:cs typeface="Arial" panose="020B0604020202020204" pitchFamily="34" charset="0"/>
+              </a:rPr>
+              <a:t>This is another error that occurs when the server is acting as a gateway or proxy, and it means that it took too long for the gateway/proxy server to receive a response from an upstream server. Issues with the server chain or network delays are often the cause of 504 errors.</a:t>
+            </a:r>
+          </a:p>
+          <a:p>
+            <a:endParaRPr lang="en-US" dirty="0"/>
+          </a:p>
+        </p:txBody>
+      </p:sp>
+    </p:spTree>
+    <p:extLst>
+      <p:ext uri="{BB962C8B-B14F-4D97-AF65-F5344CB8AC3E}">
+        <p14:creationId xmlns:p14="http://schemas.microsoft.com/office/powerpoint/2010/main" val="1420213469"/>
+      </p:ext>
+    </p:extLst>
+  </p:cSld>
+  <p:clrMapOvr>
+    <a:masterClrMapping/>
+  </p:clrMapOvr>
+</p:sld>
+</file>
+
+<file path=ppt/slides/slide2.xml><?xml version="1.0" encoding="utf-8"?>
+<p:sld xmlns:a="http://schemas.openxmlformats.org/drawingml/2006/main" xmlns:r="http://schemas.openxmlformats.org/officeDocument/2006/relationships" xmlns:p="http://schemas.openxmlformats.org/presentationml/2006/main">
+  <p:cSld>
+    <p:spTree>
+      <p:nvGrpSpPr>
+        <p:cNvPr id="1" name="">
+          <a:extLst>
+            <a:ext uri="{FF2B5EF4-FFF2-40B4-BE49-F238E27FC236}">
+              <a16:creationId xmlns:a16="http://schemas.microsoft.com/office/drawing/2014/main" id="{2F7F0E1B-1CD4-4F4F-57F3-0A3E7CC21B56}"/>
+            </a:ext>
+          </a:extLst>
+        </p:cNvPr>
+        <p:cNvGrpSpPr/>
+        <p:nvPr/>
+      </p:nvGrpSpPr>
+      <p:grpSpPr>
+        <a:xfrm>
+          <a:off x="0" y="0"/>
+          <a:ext cx="0" cy="0"/>
+          <a:chOff x="0" y="0"/>
+          <a:chExt cx="0" cy="0"/>
+        </a:xfrm>
+      </p:grpSpPr>
+      <p:sp>
+        <p:nvSpPr>
+          <p:cNvPr id="2" name="TextBox 1">
+            <a:extLst>
+              <a:ext uri="{FF2B5EF4-FFF2-40B4-BE49-F238E27FC236}">
+                <a16:creationId xmlns:a16="http://schemas.microsoft.com/office/drawing/2014/main" id="{C8522B90-325E-9A8D-D3CB-9A3002364079}"/>
+              </a:ext>
+            </a:extLst>
+          </p:cNvPr>
+          <p:cNvSpPr txBox="1"/>
+          <p:nvPr/>
+        </p:nvSpPr>
+        <p:spPr>
+          <a:xfrm>
+            <a:off x="619760" y="609600"/>
+            <a:ext cx="10932160" cy="5693866"/>
+          </a:xfrm>
+          <a:prstGeom prst="rect">
+            <a:avLst/>
+          </a:prstGeom>
+          <a:noFill/>
+        </p:spPr>
+        <p:txBody>
+          <a:bodyPr wrap="square" rtlCol="0">
+            <a:spAutoFit/>
+          </a:bodyPr>
+          <a:lstStyle/>
+          <a:p>
+            <a:r>
+              <a:rPr lang="en-US" sz="2800" b="1" dirty="0">
+                <a:solidFill>
+                  <a:srgbClr val="FF0000"/>
+                </a:solidFill>
+              </a:rPr>
+              <a:t>Introduction:</a:t>
+            </a:r>
+          </a:p>
+          <a:p>
+            <a:r>
+              <a:rPr lang="en-US" sz="2800" dirty="0"/>
+              <a:t>       </a:t>
+            </a:r>
+            <a:r>
+              <a:rPr lang="en-US" sz="2800" dirty="0">
+                <a:latin typeface="Arial Narrow" panose="020B0606020202030204" pitchFamily="34" charset="0"/>
+              </a:rPr>
+              <a:t>Effective website management requires a thorough understanding of HTTP status codes—three-digit numbers that indicate the outcome of a client's request to your server. These codes encompass a range of responses, from successful requests to various client and server errors. Knowing the different HTTP status codes will help with diagnosing website issues, optimizing site performance, and enhancing user experience</a:t>
+            </a:r>
+          </a:p>
+          <a:p>
+            <a:endParaRPr lang="en-US" sz="2800" dirty="0">
+              <a:latin typeface="Arial Narrow" panose="020B0606020202030204" pitchFamily="34" charset="0"/>
+            </a:endParaRPr>
+          </a:p>
+          <a:p>
+            <a:r>
+              <a:rPr lang="en-US" sz="2800" dirty="0">
+                <a:latin typeface="Arial Narrow" panose="020B0606020202030204" pitchFamily="34" charset="0"/>
+              </a:rPr>
+              <a:t>This HTTP status code resource delves into their classifications, meanings, and impact on web operations, providing best practices for both resolving and preventing related issues. Whether you're dealing with client-side errors like 404 Not Found or server-side errors like 500 Internal Server Error, this guide offers the technical insights necessary for effective troubleshooting.</a:t>
+            </a:r>
+          </a:p>
+        </p:txBody>
+      </p:sp>
+    </p:spTree>
+    <p:extLst>
+      <p:ext uri="{BB962C8B-B14F-4D97-AF65-F5344CB8AC3E}">
+        <p14:creationId xmlns:p14="http://schemas.microsoft.com/office/powerpoint/2010/main" val="2811823674"/>
+      </p:ext>
+    </p:extLst>
+  </p:cSld>
+  <p:clrMapOvr>
+    <a:masterClrMapping/>
+  </p:clrMapOvr>
+</p:sld>
+</file>
+
+<file path=ppt/slides/slide3.xml><?xml version="1.0" encoding="utf-8"?>
+<p:sld xmlns:a="http://schemas.openxmlformats.org/drawingml/2006/main" xmlns:r="http://schemas.openxmlformats.org/officeDocument/2006/relationships" xmlns:p="http://schemas.openxmlformats.org/presentationml/2006/main">
+  <p:cSld>
+    <p:spTree>
+      <p:nvGrpSpPr>
+        <p:cNvPr id="1" name="">
+          <a:extLst>
+            <a:ext uri="{FF2B5EF4-FFF2-40B4-BE49-F238E27FC236}">
+              <a16:creationId xmlns:a16="http://schemas.microsoft.com/office/drawing/2014/main" id="{A1CF462B-2F83-3B38-8EA4-1594CFD616BC}"/>
+            </a:ext>
+          </a:extLst>
+        </p:cNvPr>
+        <p:cNvGrpSpPr/>
+        <p:nvPr/>
+      </p:nvGrpSpPr>
+      <p:grpSpPr>
+        <a:xfrm>
+          <a:off x="0" y="0"/>
+          <a:ext cx="0" cy="0"/>
+          <a:chOff x="0" y="0"/>
+          <a:chExt cx="0" cy="0"/>
+        </a:xfrm>
+      </p:grpSpPr>
+      <p:sp>
+        <p:nvSpPr>
+          <p:cNvPr id="2" name="TextBox 1">
+            <a:extLst>
+              <a:ext uri="{FF2B5EF4-FFF2-40B4-BE49-F238E27FC236}">
+                <a16:creationId xmlns:a16="http://schemas.microsoft.com/office/drawing/2014/main" id="{2FFF9175-A580-934B-0606-E38F62712882}"/>
+              </a:ext>
+            </a:extLst>
+          </p:cNvPr>
+          <p:cNvSpPr txBox="1"/>
+          <p:nvPr/>
+        </p:nvSpPr>
+        <p:spPr>
+          <a:xfrm>
+            <a:off x="609600" y="650240"/>
+            <a:ext cx="10972800" cy="5201424"/>
+          </a:xfrm>
+          <a:prstGeom prst="rect">
+            <a:avLst/>
+          </a:prstGeom>
+          <a:noFill/>
+        </p:spPr>
+        <p:txBody>
+          <a:bodyPr wrap="square" rtlCol="0">
+            <a:spAutoFit/>
+          </a:bodyPr>
+          <a:lstStyle/>
+          <a:p>
+            <a:r>
+              <a:rPr lang="en-US" sz="3200" b="1" dirty="0">
+                <a:solidFill>
+                  <a:srgbClr val="FF0000"/>
+                </a:solidFill>
+              </a:rPr>
+              <a:t>What are HTTP status code?</a:t>
+            </a:r>
+            <a:endParaRPr lang="en-US" sz="2400" b="1" dirty="0">
+              <a:solidFill>
+                <a:srgbClr val="FF0000"/>
+              </a:solidFill>
+            </a:endParaRPr>
+          </a:p>
+          <a:p>
+            <a:endParaRPr lang="en-US" dirty="0"/>
+          </a:p>
+          <a:p>
+            <a:r>
+              <a:rPr lang="en-US" dirty="0">
+                <a:latin typeface="Arial" panose="020B0604020202020204" pitchFamily="34" charset="0"/>
+                <a:cs typeface="Arial" panose="020B0604020202020204" pitchFamily="34" charset="0"/>
+              </a:rPr>
+              <a:t>                    HTTP status codes are response messages the server sends back to the user after they make a request. These codes tell the user the outcome of the request, letting them know whether it was successful or if an issue occurred.</a:t>
+            </a:r>
+          </a:p>
+          <a:p>
+            <a:endParaRPr lang="en-US" dirty="0">
+              <a:latin typeface="Arial" panose="020B0604020202020204" pitchFamily="34" charset="0"/>
+              <a:cs typeface="Arial" panose="020B0604020202020204" pitchFamily="34" charset="0"/>
+            </a:endParaRPr>
+          </a:p>
+          <a:p>
+            <a:r>
+              <a:rPr lang="en-US" sz="2400" b="1" dirty="0">
+                <a:latin typeface="Arial" panose="020B0604020202020204" pitchFamily="34" charset="0"/>
+                <a:cs typeface="Arial" panose="020B0604020202020204" pitchFamily="34" charset="0"/>
+              </a:rPr>
+              <a:t>HTTP status codes fall into five main categories:</a:t>
+            </a:r>
+          </a:p>
+          <a:p>
+            <a:endParaRPr lang="en-US" sz="2400" b="1" dirty="0">
+              <a:latin typeface="Arial" panose="020B0604020202020204" pitchFamily="34" charset="0"/>
+              <a:cs typeface="Arial" panose="020B0604020202020204" pitchFamily="34" charset="0"/>
+            </a:endParaRPr>
+          </a:p>
+          <a:p>
+            <a:pPr marL="285750" indent="-285750">
+              <a:buFont typeface="Wingdings" panose="05000000000000000000" pitchFamily="2" charset="2"/>
+              <a:buChar char="v"/>
+            </a:pPr>
+            <a:r>
+              <a:rPr lang="en-US" dirty="0">
+                <a:latin typeface="Arial" panose="020B0604020202020204" pitchFamily="34" charset="0"/>
+                <a:cs typeface="Arial" panose="020B0604020202020204" pitchFamily="34" charset="0"/>
+              </a:rPr>
+              <a:t>1xx – Informational: The server acknowledges and processes the request.</a:t>
+            </a:r>
+          </a:p>
+          <a:p>
+            <a:endParaRPr lang="en-US" dirty="0">
+              <a:latin typeface="Arial" panose="020B0604020202020204" pitchFamily="34" charset="0"/>
+              <a:cs typeface="Arial" panose="020B0604020202020204" pitchFamily="34" charset="0"/>
+            </a:endParaRPr>
+          </a:p>
+          <a:p>
+            <a:pPr marL="285750" indent="-285750">
+              <a:buFont typeface="Wingdings" panose="05000000000000000000" pitchFamily="2" charset="2"/>
+              <a:buChar char="v"/>
+            </a:pPr>
+            <a:r>
+              <a:rPr lang="en-US" dirty="0">
+                <a:latin typeface="Arial" panose="020B0604020202020204" pitchFamily="34" charset="0"/>
+                <a:cs typeface="Arial" panose="020B0604020202020204" pitchFamily="34" charset="0"/>
+              </a:rPr>
+              <a:t>2xx – Success: The request was successfully processed.</a:t>
+            </a:r>
+          </a:p>
+          <a:p>
+            <a:endParaRPr lang="en-US" dirty="0">
+              <a:latin typeface="Arial" panose="020B0604020202020204" pitchFamily="34" charset="0"/>
+              <a:cs typeface="Arial" panose="020B0604020202020204" pitchFamily="34" charset="0"/>
+            </a:endParaRPr>
+          </a:p>
+          <a:p>
+            <a:pPr marL="285750" indent="-285750">
+              <a:buFont typeface="Wingdings" panose="05000000000000000000" pitchFamily="2" charset="2"/>
+              <a:buChar char="v"/>
+            </a:pPr>
+            <a:r>
+              <a:rPr lang="en-US" dirty="0">
+                <a:latin typeface="Arial" panose="020B0604020202020204" pitchFamily="34" charset="0"/>
+                <a:cs typeface="Arial" panose="020B0604020202020204" pitchFamily="34" charset="0"/>
+              </a:rPr>
+              <a:t>3xx – Redirection: The requested resource has been moved or redirected.</a:t>
+            </a:r>
+          </a:p>
+          <a:p>
+            <a:endParaRPr lang="en-US" dirty="0">
+              <a:latin typeface="Arial" panose="020B0604020202020204" pitchFamily="34" charset="0"/>
+              <a:cs typeface="Arial" panose="020B0604020202020204" pitchFamily="34" charset="0"/>
+            </a:endParaRPr>
+          </a:p>
+          <a:p>
+            <a:pPr marL="285750" indent="-285750">
+              <a:buFont typeface="Wingdings" panose="05000000000000000000" pitchFamily="2" charset="2"/>
+              <a:buChar char="v"/>
+            </a:pPr>
+            <a:r>
+              <a:rPr lang="en-US" dirty="0">
+                <a:latin typeface="Arial" panose="020B0604020202020204" pitchFamily="34" charset="0"/>
+                <a:cs typeface="Arial" panose="020B0604020202020204" pitchFamily="34" charset="0"/>
+              </a:rPr>
+              <a:t>4xx – Client Error: An error occurred on the client's side.</a:t>
+            </a:r>
+          </a:p>
+          <a:p>
+            <a:endParaRPr lang="en-US" dirty="0">
+              <a:latin typeface="Arial" panose="020B0604020202020204" pitchFamily="34" charset="0"/>
+              <a:cs typeface="Arial" panose="020B0604020202020204" pitchFamily="34" charset="0"/>
+            </a:endParaRPr>
+          </a:p>
+          <a:p>
+            <a:pPr marL="285750" indent="-285750">
+              <a:buFont typeface="Wingdings" panose="05000000000000000000" pitchFamily="2" charset="2"/>
+              <a:buChar char="v"/>
+            </a:pPr>
+            <a:r>
+              <a:rPr lang="en-US" dirty="0">
+                <a:latin typeface="Arial" panose="020B0604020202020204" pitchFamily="34" charset="0"/>
+                <a:cs typeface="Arial" panose="020B0604020202020204" pitchFamily="34" charset="0"/>
+              </a:rPr>
+              <a:t>5xx – Server Error: The server encountered an error while processing the request.</a:t>
+            </a:r>
+          </a:p>
+        </p:txBody>
+      </p:sp>
+    </p:spTree>
+    <p:extLst>
+      <p:ext uri="{BB962C8B-B14F-4D97-AF65-F5344CB8AC3E}">
+        <p14:creationId xmlns:p14="http://schemas.microsoft.com/office/powerpoint/2010/main" val="2311044625"/>
+      </p:ext>
+    </p:extLst>
+  </p:cSld>
+  <p:clrMapOvr>
+    <a:masterClrMapping/>
+  </p:clrMapOvr>
+</p:sld>
+</file>
+
+<file path=ppt/slides/slide4.xml><?xml version="1.0" encoding="utf-8"?>
+<p:sld xmlns:a="http://schemas.openxmlformats.org/drawingml/2006/main" xmlns:r="http://schemas.openxmlformats.org/officeDocument/2006/relationships" xmlns:p="http://schemas.openxmlformats.org/presentationml/2006/main">
+  <p:cSld>
+    <p:spTree>
+      <p:nvGrpSpPr>
+        <p:cNvPr id="1" name="">
+          <a:extLst>
+            <a:ext uri="{FF2B5EF4-FFF2-40B4-BE49-F238E27FC236}">
+              <a16:creationId xmlns:a16="http://schemas.microsoft.com/office/drawing/2014/main" id="{36B84FE3-FC20-EF2C-7343-6B9DF3DF84C1}"/>
+            </a:ext>
+          </a:extLst>
+        </p:cNvPr>
+        <p:cNvGrpSpPr/>
+        <p:nvPr/>
+      </p:nvGrpSpPr>
+      <p:grpSpPr>
+        <a:xfrm>
+          <a:off x="0" y="0"/>
+          <a:ext cx="0" cy="0"/>
+          <a:chOff x="0" y="0"/>
+          <a:chExt cx="0" cy="0"/>
+        </a:xfrm>
+      </p:grpSpPr>
+      <p:sp>
+        <p:nvSpPr>
+          <p:cNvPr id="2" name="TextBox 1">
+            <a:extLst>
+              <a:ext uri="{FF2B5EF4-FFF2-40B4-BE49-F238E27FC236}">
+                <a16:creationId xmlns:a16="http://schemas.microsoft.com/office/drawing/2014/main" id="{4131EBF1-BEBC-6887-36CB-004A5EF9DDA3}"/>
+              </a:ext>
+            </a:extLst>
+          </p:cNvPr>
+          <p:cNvSpPr txBox="1"/>
+          <p:nvPr/>
+        </p:nvSpPr>
+        <p:spPr>
+          <a:xfrm>
+            <a:off x="619760" y="609600"/>
+            <a:ext cx="10952480" cy="5601533"/>
+          </a:xfrm>
+          <a:prstGeom prst="rect">
+            <a:avLst/>
+          </a:prstGeom>
+          <a:noFill/>
+        </p:spPr>
+        <p:txBody>
+          <a:bodyPr wrap="square" rtlCol="0">
+            <a:spAutoFit/>
+          </a:bodyPr>
+          <a:lstStyle/>
+          <a:p>
+            <a:pPr algn="ctr"/>
+            <a:r>
+              <a:rPr lang="en-US" sz="3600" b="1" dirty="0">
+                <a:solidFill>
+                  <a:srgbClr val="FF0000"/>
+                </a:solidFill>
+              </a:rPr>
+              <a:t>Full list of HTTP status codes</a:t>
+            </a:r>
+          </a:p>
+          <a:p>
+            <a:r>
+              <a:rPr lang="en-US" sz="2800" dirty="0">
+                <a:latin typeface="Arial" panose="020B0604020202020204" pitchFamily="34" charset="0"/>
+                <a:cs typeface="Arial" panose="020B0604020202020204" pitchFamily="34" charset="0"/>
+              </a:rPr>
+              <a:t>In total, there are 23 different HTTP status codes that a user can receive when they make a request to the server. Here is the full list, broken down by category:</a:t>
+            </a:r>
+          </a:p>
+          <a:p>
+            <a:endParaRPr lang="en-US" sz="2800" b="1" dirty="0">
+              <a:solidFill>
+                <a:srgbClr val="FF0000"/>
+              </a:solidFill>
+            </a:endParaRPr>
+          </a:p>
+          <a:p>
+            <a:pPr marL="514350" indent="-514350">
+              <a:buFont typeface="+mj-lt"/>
+              <a:buAutoNum type="arabicPeriod"/>
+            </a:pPr>
+            <a:r>
+              <a:rPr lang="en-US" sz="2800" b="1" dirty="0">
+                <a:solidFill>
+                  <a:srgbClr val="FF0000"/>
+                </a:solidFill>
+                <a:latin typeface="Arial Black" panose="020B0A04020102020204" pitchFamily="34" charset="0"/>
+              </a:rPr>
+              <a:t>1xx – Informational responses:</a:t>
+            </a:r>
+            <a:endParaRPr lang="en-US" sz="2400" b="1" dirty="0">
+              <a:solidFill>
+                <a:srgbClr val="FF0000"/>
+              </a:solidFill>
+              <a:latin typeface="Arial Black" panose="020B0A04020102020204" pitchFamily="34" charset="0"/>
+            </a:endParaRPr>
+          </a:p>
+          <a:p>
+            <a:r>
+              <a:rPr lang="en-US" dirty="0">
+                <a:latin typeface="Arial" panose="020B0604020202020204" pitchFamily="34" charset="0"/>
+                <a:cs typeface="Arial" panose="020B0604020202020204" pitchFamily="34" charset="0"/>
+              </a:rPr>
+              <a:t>                  1xx HTTP status codes indicate that the server has received the user's request and is working on processing it. It's a category that includes these four codes</a:t>
+            </a:r>
+            <a:r>
+              <a:rPr lang="en-US" sz="2000" dirty="0">
+                <a:latin typeface="Arial" panose="020B0604020202020204" pitchFamily="34" charset="0"/>
+                <a:cs typeface="Arial" panose="020B0604020202020204" pitchFamily="34" charset="0"/>
+              </a:rPr>
+              <a:t>:</a:t>
+            </a:r>
+          </a:p>
+          <a:p>
+            <a:endParaRPr lang="en-US" sz="2000" dirty="0">
+              <a:latin typeface="Arial" panose="020B0604020202020204" pitchFamily="34" charset="0"/>
+              <a:cs typeface="Arial" panose="020B0604020202020204" pitchFamily="34" charset="0"/>
+            </a:endParaRPr>
+          </a:p>
+          <a:p>
+            <a:pPr marL="342900" indent="-342900">
+              <a:buFont typeface="Wingdings" panose="05000000000000000000" pitchFamily="2" charset="2"/>
+              <a:buChar char="v"/>
+            </a:pPr>
+            <a:r>
+              <a:rPr lang="en-US" sz="2800" b="1" dirty="0">
+                <a:solidFill>
+                  <a:srgbClr val="00B050"/>
+                </a:solidFill>
+                <a:latin typeface="Arial" panose="020B0604020202020204" pitchFamily="34" charset="0"/>
+                <a:cs typeface="Arial" panose="020B0604020202020204" pitchFamily="34" charset="0"/>
+              </a:rPr>
+              <a:t>100 (Continue)</a:t>
+            </a:r>
+            <a:r>
+              <a:rPr lang="en-US" sz="2400" b="1" dirty="0">
+                <a:solidFill>
+                  <a:srgbClr val="00B050"/>
+                </a:solidFill>
+                <a:latin typeface="Arial" panose="020B0604020202020204" pitchFamily="34" charset="0"/>
+                <a:cs typeface="Arial" panose="020B0604020202020204" pitchFamily="34" charset="0"/>
+              </a:rPr>
+              <a:t>: </a:t>
+            </a:r>
+            <a:r>
+              <a:rPr lang="en-US" dirty="0">
+                <a:latin typeface="Arial" panose="020B0604020202020204" pitchFamily="34" charset="0"/>
+                <a:cs typeface="Arial" panose="020B0604020202020204" pitchFamily="34" charset="0"/>
+              </a:rPr>
+              <a:t>This code indicates that the server has received the initial part of the request and tells the user they can proceed with the rest of it. It's useful when a large request body needs verification before sending.</a:t>
+            </a:r>
+          </a:p>
+          <a:p>
+            <a:endParaRPr lang="en-US" dirty="0">
+              <a:latin typeface="Arial" panose="020B0604020202020204" pitchFamily="34" charset="0"/>
+              <a:cs typeface="Arial" panose="020B0604020202020204" pitchFamily="34" charset="0"/>
+            </a:endParaRPr>
+          </a:p>
+          <a:p>
+            <a:pPr marL="342900" indent="-342900">
+              <a:buFont typeface="Wingdings" panose="05000000000000000000" pitchFamily="2" charset="2"/>
+              <a:buChar char="v"/>
+            </a:pPr>
+            <a:r>
+              <a:rPr lang="en-US" sz="2400" b="1" dirty="0">
+                <a:solidFill>
+                  <a:srgbClr val="00B050"/>
+                </a:solidFill>
+                <a:latin typeface="Arial" panose="020B0604020202020204" pitchFamily="34" charset="0"/>
+                <a:cs typeface="Arial" panose="020B0604020202020204" pitchFamily="34" charset="0"/>
+              </a:rPr>
+              <a:t>102 (Processing): </a:t>
+            </a:r>
+            <a:r>
+              <a:rPr lang="en-US" dirty="0">
+                <a:latin typeface="Arial" panose="020B0604020202020204" pitchFamily="34" charset="0"/>
+                <a:cs typeface="Arial" panose="020B0604020202020204" pitchFamily="34" charset="0"/>
+              </a:rPr>
+              <a:t>This tells the user that the server has accepted the request but is still working on processing it.</a:t>
+            </a:r>
+          </a:p>
+        </p:txBody>
+      </p:sp>
+    </p:spTree>
+    <p:extLst>
+      <p:ext uri="{BB962C8B-B14F-4D97-AF65-F5344CB8AC3E}">
+        <p14:creationId xmlns:p14="http://schemas.microsoft.com/office/powerpoint/2010/main" val="3190823084"/>
+      </p:ext>
+    </p:extLst>
+  </p:cSld>
+  <p:clrMapOvr>
+    <a:masterClrMapping/>
+  </p:clrMapOvr>
+</p:sld>
+</file>
+
+<file path=ppt/slides/slide5.xml><?xml version="1.0" encoding="utf-8"?>
+<p:sld xmlns:a="http://schemas.openxmlformats.org/drawingml/2006/main" xmlns:r="http://schemas.openxmlformats.org/officeDocument/2006/relationships" xmlns:p="http://schemas.openxmlformats.org/presentationml/2006/main">
+  <p:cSld>
+    <p:spTree>
+      <p:nvGrpSpPr>
+        <p:cNvPr id="1" name="">
+          <a:extLst>
+            <a:ext uri="{FF2B5EF4-FFF2-40B4-BE49-F238E27FC236}">
+              <a16:creationId xmlns:a16="http://schemas.microsoft.com/office/drawing/2014/main" id="{E76A4FBE-F5BA-630F-D827-5C8455990EA7}"/>
+            </a:ext>
+          </a:extLst>
+        </p:cNvPr>
+        <p:cNvGrpSpPr/>
+        <p:nvPr/>
+      </p:nvGrpSpPr>
+      <p:grpSpPr>
+        <a:xfrm>
+          <a:off x="0" y="0"/>
+          <a:ext cx="0" cy="0"/>
+          <a:chOff x="0" y="0"/>
+          <a:chExt cx="0" cy="0"/>
+        </a:xfrm>
+      </p:grpSpPr>
+      <p:sp>
+        <p:nvSpPr>
+          <p:cNvPr id="2" name="TextBox 1">
+            <a:extLst>
+              <a:ext uri="{FF2B5EF4-FFF2-40B4-BE49-F238E27FC236}">
+                <a16:creationId xmlns:a16="http://schemas.microsoft.com/office/drawing/2014/main" id="{8A0273C2-CDBD-F0D5-0984-37A30A7C968E}"/>
+              </a:ext>
+            </a:extLst>
+          </p:cNvPr>
+          <p:cNvSpPr txBox="1"/>
+          <p:nvPr/>
+        </p:nvSpPr>
+        <p:spPr>
+          <a:xfrm>
+            <a:off x="629920" y="619760"/>
+            <a:ext cx="10962640" cy="5201424"/>
+          </a:xfrm>
+          <a:prstGeom prst="rect">
+            <a:avLst/>
+          </a:prstGeom>
+          <a:noFill/>
+        </p:spPr>
+        <p:txBody>
+          <a:bodyPr wrap="square" rtlCol="0">
+            <a:spAutoFit/>
+          </a:bodyPr>
+          <a:lstStyle/>
+          <a:p>
+            <a:pPr marL="342900" indent="-342900">
+              <a:buFont typeface="Wingdings" panose="05000000000000000000" pitchFamily="2" charset="2"/>
+              <a:buChar char="v"/>
+            </a:pPr>
+            <a:r>
+              <a:rPr lang="en-US" sz="3200" b="1" dirty="0">
+                <a:solidFill>
+                  <a:srgbClr val="00B050"/>
+                </a:solidFill>
+                <a:latin typeface="Arial" panose="020B0604020202020204" pitchFamily="34" charset="0"/>
+                <a:cs typeface="Arial" panose="020B0604020202020204" pitchFamily="34" charset="0"/>
+              </a:rPr>
+              <a:t>101 (Switching Protocols): </a:t>
+            </a:r>
+            <a:r>
+              <a:rPr lang="en-US" sz="2400" dirty="0">
+                <a:latin typeface="Arial" panose="020B0604020202020204" pitchFamily="34" charset="0"/>
+                <a:cs typeface="Arial" panose="020B0604020202020204" pitchFamily="34" charset="0"/>
+              </a:rPr>
+              <a:t>This indicates that the server is changing the communication protocol based on a request from the client (like switching from HTTP/1.1 to </a:t>
+            </a:r>
+            <a:r>
+              <a:rPr lang="en-US" sz="2400" dirty="0" err="1">
+                <a:latin typeface="Arial" panose="020B0604020202020204" pitchFamily="34" charset="0"/>
+                <a:cs typeface="Arial" panose="020B0604020202020204" pitchFamily="34" charset="0"/>
+              </a:rPr>
+              <a:t>WebSockets</a:t>
+            </a:r>
+            <a:r>
+              <a:rPr lang="en-US" sz="2400" dirty="0">
+                <a:latin typeface="Arial" panose="020B0604020202020204" pitchFamily="34" charset="0"/>
+                <a:cs typeface="Arial" panose="020B0604020202020204" pitchFamily="34" charset="0"/>
+              </a:rPr>
+              <a:t>).</a:t>
+            </a:r>
+          </a:p>
+          <a:p>
+            <a:endParaRPr lang="en-US" sz="2400" dirty="0">
+              <a:latin typeface="Arial" panose="020B0604020202020204" pitchFamily="34" charset="0"/>
+              <a:cs typeface="Arial" panose="020B0604020202020204" pitchFamily="34" charset="0"/>
+            </a:endParaRPr>
+          </a:p>
+          <a:p>
+            <a:pPr marL="285750" indent="-285750">
+              <a:buFont typeface="Wingdings" panose="05000000000000000000" pitchFamily="2" charset="2"/>
+              <a:buChar char="v"/>
+            </a:pPr>
+            <a:r>
+              <a:rPr lang="en-US" sz="3200" b="1" dirty="0">
+                <a:solidFill>
+                  <a:srgbClr val="00B050"/>
+                </a:solidFill>
+                <a:latin typeface="Arial" panose="020B0604020202020204" pitchFamily="34" charset="0"/>
+                <a:cs typeface="Arial" panose="020B0604020202020204" pitchFamily="34" charset="0"/>
+              </a:rPr>
+              <a:t>103 (Early Hints)</a:t>
+            </a:r>
+            <a:r>
+              <a:rPr lang="en-US" sz="2400" dirty="0">
+                <a:latin typeface="Arial" panose="020B0604020202020204" pitchFamily="34" charset="0"/>
+                <a:cs typeface="Arial" panose="020B0604020202020204" pitchFamily="34" charset="0"/>
+              </a:rPr>
+              <a:t>: Accompanying this status code are preliminary response headers that are sent to the user before the full response is ready. Their main function is to speed up how fast the browser preloads resources.</a:t>
+            </a:r>
+          </a:p>
+          <a:p>
+            <a:endParaRPr lang="en-US" sz="2400" dirty="0">
+              <a:latin typeface="Arial" panose="020B0604020202020204" pitchFamily="34" charset="0"/>
+              <a:cs typeface="Arial" panose="020B0604020202020204" pitchFamily="34" charset="0"/>
+            </a:endParaRPr>
+          </a:p>
+          <a:p>
+            <a:r>
+              <a:rPr lang="en-US" sz="2800" b="1" dirty="0">
+                <a:solidFill>
+                  <a:srgbClr val="FF0000"/>
+                </a:solidFill>
+                <a:latin typeface="Arial" panose="020B0604020202020204" pitchFamily="34" charset="0"/>
+                <a:cs typeface="Arial" panose="020B0604020202020204" pitchFamily="34" charset="0"/>
+              </a:rPr>
+              <a:t>2. 2xx – Success responses:</a:t>
+            </a:r>
+          </a:p>
+          <a:p>
+            <a:r>
+              <a:rPr lang="en-US" sz="2400" dirty="0">
+                <a:latin typeface="Arial" panose="020B0604020202020204" pitchFamily="34" charset="0"/>
+                <a:cs typeface="Arial" panose="020B0604020202020204" pitchFamily="34" charset="0"/>
+              </a:rPr>
+              <a:t>                 2xx status codes indicate that the server has received, understood, and processed the request successfully. They usually mean that the user can proceed as planned, and they include these five codes:</a:t>
+            </a:r>
+          </a:p>
+          <a:p>
+            <a:endParaRPr lang="en-US" sz="2400" dirty="0">
+              <a:latin typeface="Arial" panose="020B0604020202020204" pitchFamily="34" charset="0"/>
+              <a:cs typeface="Arial" panose="020B0604020202020204" pitchFamily="34" charset="0"/>
+            </a:endParaRPr>
+          </a:p>
+        </p:txBody>
+      </p:sp>
+    </p:spTree>
+    <p:extLst>
+      <p:ext uri="{BB962C8B-B14F-4D97-AF65-F5344CB8AC3E}">
+        <p14:creationId xmlns:p14="http://schemas.microsoft.com/office/powerpoint/2010/main" val="1523776720"/>
+      </p:ext>
+    </p:extLst>
+  </p:cSld>
+  <p:clrMapOvr>
+    <a:masterClrMapping/>
+  </p:clrMapOvr>
+</p:sld>
+</file>
+
+<file path=ppt/slides/slide6.xml><?xml version="1.0" encoding="utf-8"?>
+<p:sld xmlns:a="http://schemas.openxmlformats.org/drawingml/2006/main" xmlns:r="http://schemas.openxmlformats.org/officeDocument/2006/relationships" xmlns:p="http://schemas.openxmlformats.org/presentationml/2006/main">
+  <p:cSld>
+    <p:spTree>
+      <p:nvGrpSpPr>
+        <p:cNvPr id="1" name="">
+          <a:extLst>
+            <a:ext uri="{FF2B5EF4-FFF2-40B4-BE49-F238E27FC236}">
+              <a16:creationId xmlns:a16="http://schemas.microsoft.com/office/drawing/2014/main" id="{413E1380-71F1-C979-F2CC-FC8CD0E2B74F}"/>
+            </a:ext>
+          </a:extLst>
+        </p:cNvPr>
+        <p:cNvGrpSpPr/>
+        <p:nvPr/>
+      </p:nvGrpSpPr>
+      <p:grpSpPr>
+        <a:xfrm>
+          <a:off x="0" y="0"/>
+          <a:ext cx="0" cy="0"/>
+          <a:chOff x="0" y="0"/>
+          <a:chExt cx="0" cy="0"/>
+        </a:xfrm>
+      </p:grpSpPr>
+      <p:sp>
+        <p:nvSpPr>
+          <p:cNvPr id="2" name="TextBox 1">
+            <a:extLst>
+              <a:ext uri="{FF2B5EF4-FFF2-40B4-BE49-F238E27FC236}">
+                <a16:creationId xmlns:a16="http://schemas.microsoft.com/office/drawing/2014/main" id="{AC2CC8AF-B1F6-FCA7-9606-278631BC578C}"/>
+              </a:ext>
+            </a:extLst>
+          </p:cNvPr>
+          <p:cNvSpPr txBox="1"/>
+          <p:nvPr/>
+        </p:nvSpPr>
+        <p:spPr>
+          <a:xfrm>
+            <a:off x="629920" y="599440"/>
+            <a:ext cx="10922000" cy="5570756"/>
+          </a:xfrm>
+          <a:prstGeom prst="rect">
+            <a:avLst/>
+          </a:prstGeom>
+          <a:noFill/>
+        </p:spPr>
+        <p:txBody>
+          <a:bodyPr wrap="square" rtlCol="0">
+            <a:spAutoFit/>
+          </a:bodyPr>
+          <a:lstStyle/>
+          <a:p>
+            <a:pPr marL="285750" indent="-285750">
+              <a:buFont typeface="Wingdings" panose="05000000000000000000" pitchFamily="2" charset="2"/>
+              <a:buChar char="v"/>
+            </a:pPr>
+            <a:endParaRPr lang="en-US" sz="2000" b="1" dirty="0">
+              <a:solidFill>
+                <a:srgbClr val="00B050"/>
+              </a:solidFill>
+              <a:latin typeface="Arial" panose="020B0604020202020204" pitchFamily="34" charset="0"/>
+              <a:cs typeface="Arial" panose="020B0604020202020204" pitchFamily="34" charset="0"/>
+            </a:endParaRPr>
+          </a:p>
+          <a:p>
+            <a:pPr marL="285750" indent="-285750">
+              <a:buFont typeface="Wingdings" panose="05000000000000000000" pitchFamily="2" charset="2"/>
+              <a:buChar char="v"/>
+            </a:pPr>
+            <a:r>
+              <a:rPr lang="en-US" sz="2000" b="1" dirty="0">
+                <a:solidFill>
+                  <a:srgbClr val="00B050"/>
+                </a:solidFill>
+                <a:latin typeface="Arial" panose="020B0604020202020204" pitchFamily="34" charset="0"/>
+                <a:cs typeface="Arial" panose="020B0604020202020204" pitchFamily="34" charset="0"/>
+              </a:rPr>
+              <a:t>200 (OK): </a:t>
+            </a:r>
+            <a:r>
+              <a:rPr lang="en-US" sz="1800" dirty="0">
+                <a:latin typeface="Arial" panose="020B0604020202020204" pitchFamily="34" charset="0"/>
+                <a:cs typeface="Arial" panose="020B0604020202020204" pitchFamily="34" charset="0"/>
+              </a:rPr>
+              <a:t>This response indicates that the request was successful and that the server has successfully returned the requested resource. 200 (OK) is the most common HTTP status code, and receiving it means that everything is working as expected.</a:t>
+            </a:r>
+          </a:p>
+          <a:p>
+            <a:pPr marL="285750" indent="-285750">
+              <a:buFont typeface="Wingdings" panose="05000000000000000000" pitchFamily="2" charset="2"/>
+              <a:buChar char="v"/>
+            </a:pPr>
+            <a:endParaRPr lang="en-US" sz="1800" dirty="0">
+              <a:latin typeface="Arial" panose="020B0604020202020204" pitchFamily="34" charset="0"/>
+              <a:cs typeface="Arial" panose="020B0604020202020204" pitchFamily="34" charset="0"/>
+            </a:endParaRPr>
+          </a:p>
+          <a:p>
+            <a:pPr marL="285750" indent="-285750">
+              <a:buFont typeface="Wingdings" panose="05000000000000000000" pitchFamily="2" charset="2"/>
+              <a:buChar char="v"/>
+            </a:pPr>
+            <a:r>
+              <a:rPr lang="en-US" sz="2000" b="1" dirty="0">
+                <a:solidFill>
+                  <a:srgbClr val="00B050"/>
+                </a:solidFill>
+                <a:latin typeface="Arial" panose="020B0604020202020204" pitchFamily="34" charset="0"/>
+                <a:cs typeface="Arial" panose="020B0604020202020204" pitchFamily="34" charset="0"/>
+              </a:rPr>
+              <a:t>201 (Created): </a:t>
+            </a:r>
+            <a:r>
+              <a:rPr lang="en-US" sz="1800" dirty="0">
+                <a:latin typeface="Arial" panose="020B0604020202020204" pitchFamily="34" charset="0"/>
+                <a:cs typeface="Arial" panose="020B0604020202020204" pitchFamily="34" charset="0"/>
+              </a:rPr>
+              <a:t>This indicates that the request was successful and that it resulted in a new resource being created. For example, a user might receive this response when they create a new account on your website.</a:t>
+            </a:r>
+          </a:p>
+          <a:p>
+            <a:pPr marL="285750" indent="-285750">
+              <a:buFont typeface="Wingdings" panose="05000000000000000000" pitchFamily="2" charset="2"/>
+              <a:buChar char="v"/>
+            </a:pPr>
+            <a:endParaRPr lang="en-US" sz="2000" b="1" dirty="0">
+              <a:solidFill>
+                <a:srgbClr val="00B050"/>
+              </a:solidFill>
+              <a:latin typeface="Arial" panose="020B0604020202020204" pitchFamily="34" charset="0"/>
+              <a:cs typeface="Arial" panose="020B0604020202020204" pitchFamily="34" charset="0"/>
+            </a:endParaRPr>
+          </a:p>
+          <a:p>
+            <a:pPr marL="285750" indent="-285750">
+              <a:buFont typeface="Wingdings" panose="05000000000000000000" pitchFamily="2" charset="2"/>
+              <a:buChar char="v"/>
+            </a:pPr>
+            <a:r>
+              <a:rPr lang="en-US" sz="2000" b="1" dirty="0">
+                <a:solidFill>
+                  <a:srgbClr val="00B050"/>
+                </a:solidFill>
+                <a:latin typeface="Arial" panose="020B0604020202020204" pitchFamily="34" charset="0"/>
+                <a:cs typeface="Arial" panose="020B0604020202020204" pitchFamily="34" charset="0"/>
+              </a:rPr>
+              <a:t>202 (Accepted): </a:t>
+            </a:r>
+            <a:r>
+              <a:rPr lang="en-US" sz="1800" dirty="0">
+                <a:latin typeface="Arial" panose="020B0604020202020204" pitchFamily="34" charset="0"/>
+                <a:cs typeface="Arial" panose="020B0604020202020204" pitchFamily="34" charset="0"/>
+              </a:rPr>
+              <a:t>This status code means that the request has been received but is being processed asynchronously. It's common for tasks such as batch processing.</a:t>
+            </a:r>
+          </a:p>
+          <a:p>
+            <a:pPr marL="285750" indent="-285750">
+              <a:buFont typeface="Wingdings" panose="05000000000000000000" pitchFamily="2" charset="2"/>
+              <a:buChar char="v"/>
+            </a:pPr>
+            <a:endParaRPr lang="en-US" sz="1800" dirty="0">
+              <a:latin typeface="Arial" panose="020B0604020202020204" pitchFamily="34" charset="0"/>
+              <a:cs typeface="Arial" panose="020B0604020202020204" pitchFamily="34" charset="0"/>
+            </a:endParaRPr>
+          </a:p>
+          <a:p>
+            <a:pPr marL="285750" indent="-285750">
+              <a:buFont typeface="Wingdings" panose="05000000000000000000" pitchFamily="2" charset="2"/>
+              <a:buChar char="v"/>
+            </a:pPr>
+            <a:r>
+              <a:rPr lang="en-US" sz="2000" b="1" dirty="0">
+                <a:solidFill>
+                  <a:srgbClr val="00B050"/>
+                </a:solidFill>
+                <a:latin typeface="Arial" panose="020B0604020202020204" pitchFamily="34" charset="0"/>
+                <a:cs typeface="Arial" panose="020B0604020202020204" pitchFamily="34" charset="0"/>
+              </a:rPr>
+              <a:t>203 (Non-Authoritative Information): </a:t>
+            </a:r>
+            <a:r>
+              <a:rPr lang="en-US" sz="1800" dirty="0">
+                <a:latin typeface="Arial" panose="020B0604020202020204" pitchFamily="34" charset="0"/>
+                <a:cs typeface="Arial" panose="020B0604020202020204" pitchFamily="34" charset="0"/>
+              </a:rPr>
+              <a:t>This indicates that the server is returning information that comes from a third-party source or a source different from the origin server.</a:t>
+            </a:r>
+          </a:p>
+          <a:p>
+            <a:pPr marL="285750" indent="-285750">
+              <a:buFont typeface="Wingdings" panose="05000000000000000000" pitchFamily="2" charset="2"/>
+              <a:buChar char="v"/>
+            </a:pPr>
+            <a:endParaRPr lang="en-US" sz="1800" dirty="0">
+              <a:latin typeface="Arial" panose="020B0604020202020204" pitchFamily="34" charset="0"/>
+              <a:cs typeface="Arial" panose="020B0604020202020204" pitchFamily="34" charset="0"/>
+            </a:endParaRPr>
+          </a:p>
+          <a:p>
+            <a:pPr marL="285750" indent="-285750">
+              <a:buFont typeface="Wingdings" panose="05000000000000000000" pitchFamily="2" charset="2"/>
+              <a:buChar char="v"/>
+            </a:pPr>
+            <a:r>
+              <a:rPr lang="en-US" sz="2000" b="1" dirty="0">
+                <a:solidFill>
+                  <a:srgbClr val="00B050"/>
+                </a:solidFill>
+                <a:latin typeface="Arial" panose="020B0604020202020204" pitchFamily="34" charset="0"/>
+                <a:cs typeface="Arial" panose="020B0604020202020204" pitchFamily="34" charset="0"/>
+              </a:rPr>
+              <a:t>204 (No Content): </a:t>
+            </a:r>
+            <a:r>
+              <a:rPr lang="en-US" sz="1800" dirty="0">
+                <a:latin typeface="Arial" panose="020B0604020202020204" pitchFamily="34" charset="0"/>
+                <a:cs typeface="Arial" panose="020B0604020202020204" pitchFamily="34" charset="0"/>
+              </a:rPr>
+              <a:t>This means that the server has successfully processed the request, but there is no content to return. For example, a user might receive this response when an update is successful but no page refresh is needed.</a:t>
+            </a:r>
+          </a:p>
+          <a:p>
+            <a:endParaRPr lang="en-US" dirty="0"/>
+          </a:p>
+        </p:txBody>
+      </p:sp>
+    </p:spTree>
+    <p:extLst>
+      <p:ext uri="{BB962C8B-B14F-4D97-AF65-F5344CB8AC3E}">
+        <p14:creationId xmlns:p14="http://schemas.microsoft.com/office/powerpoint/2010/main" val="268910908"/>
+      </p:ext>
+    </p:extLst>
+  </p:cSld>
+  <p:clrMapOvr>
+    <a:masterClrMapping/>
+  </p:clrMapOvr>
+</p:sld>
+</file>
+
+<file path=ppt/slides/slide7.xml><?xml version="1.0" encoding="utf-8"?>
+<p:sld xmlns:a="http://schemas.openxmlformats.org/drawingml/2006/main" xmlns:r="http://schemas.openxmlformats.org/officeDocument/2006/relationships" xmlns:p="http://schemas.openxmlformats.org/presentationml/2006/main">
+  <p:cSld>
+    <p:spTree>
+      <p:nvGrpSpPr>
+        <p:cNvPr id="1" name="">
+          <a:extLst>
+            <a:ext uri="{FF2B5EF4-FFF2-40B4-BE49-F238E27FC236}">
+              <a16:creationId xmlns:a16="http://schemas.microsoft.com/office/drawing/2014/main" id="{88E4B630-9A5D-635A-031C-E661CCBC9E00}"/>
+            </a:ext>
+          </a:extLst>
+        </p:cNvPr>
+        <p:cNvGrpSpPr/>
+        <p:nvPr/>
+      </p:nvGrpSpPr>
+      <p:grpSpPr>
+        <a:xfrm>
+          <a:off x="0" y="0"/>
+          <a:ext cx="0" cy="0"/>
+          <a:chOff x="0" y="0"/>
+          <a:chExt cx="0" cy="0"/>
+        </a:xfrm>
+      </p:grpSpPr>
+      <p:sp>
+        <p:nvSpPr>
+          <p:cNvPr id="2" name="TextBox 1">
+            <a:extLst>
+              <a:ext uri="{FF2B5EF4-FFF2-40B4-BE49-F238E27FC236}">
+                <a16:creationId xmlns:a16="http://schemas.microsoft.com/office/drawing/2014/main" id="{7E20F470-75B6-A7DE-3C6A-C6D8ACA72C44}"/>
+              </a:ext>
+            </a:extLst>
+          </p:cNvPr>
+          <p:cNvSpPr txBox="1"/>
+          <p:nvPr/>
+        </p:nvSpPr>
+        <p:spPr>
+          <a:xfrm>
+            <a:off x="619760" y="599440"/>
+            <a:ext cx="10952480" cy="5724644"/>
+          </a:xfrm>
+          <a:prstGeom prst="rect">
+            <a:avLst/>
+          </a:prstGeom>
+          <a:noFill/>
+        </p:spPr>
+        <p:txBody>
+          <a:bodyPr wrap="square" rtlCol="0">
+            <a:spAutoFit/>
+          </a:bodyPr>
+          <a:lstStyle/>
+          <a:p>
+            <a:r>
+              <a:rPr lang="en-US" sz="2400" b="1" dirty="0">
+                <a:solidFill>
+                  <a:srgbClr val="FF0000"/>
+                </a:solidFill>
+              </a:rPr>
+              <a:t>3. </a:t>
+            </a:r>
+            <a:r>
+              <a:rPr lang="en-US" sz="2400" b="1" dirty="0">
+                <a:solidFill>
+                  <a:srgbClr val="FF0000"/>
+                </a:solidFill>
+                <a:latin typeface="Arial Black" panose="020B0A04020102020204" pitchFamily="34" charset="0"/>
+              </a:rPr>
+              <a:t>3xx – Redirection responses:</a:t>
+            </a:r>
+          </a:p>
+          <a:p>
+            <a:r>
+              <a:rPr lang="en-US" dirty="0">
+                <a:latin typeface="Arial" panose="020B0604020202020204" pitchFamily="34" charset="0"/>
+                <a:cs typeface="Arial" panose="020B0604020202020204" pitchFamily="34" charset="0"/>
+              </a:rPr>
+              <a:t>                  3xx HTTP status codes indicate that the user will need to complete further actions before the request can be processed—and these further actions typically involve a different URL. Here are the four status codes that fall under this category:</a:t>
+            </a:r>
+          </a:p>
+          <a:p>
+            <a:endParaRPr lang="en-US" sz="2000" dirty="0">
+              <a:solidFill>
+                <a:srgbClr val="00B050"/>
+              </a:solidFill>
+              <a:latin typeface="Arial" panose="020B0604020202020204" pitchFamily="34" charset="0"/>
+              <a:cs typeface="Arial" panose="020B0604020202020204" pitchFamily="34" charset="0"/>
+            </a:endParaRPr>
+          </a:p>
+          <a:p>
+            <a:pPr marL="342900" indent="-342900">
+              <a:buFont typeface="Wingdings" panose="05000000000000000000" pitchFamily="2" charset="2"/>
+              <a:buChar char="v"/>
+            </a:pPr>
+            <a:r>
+              <a:rPr lang="en-US" sz="2000" b="1" dirty="0">
+                <a:solidFill>
+                  <a:srgbClr val="00B050"/>
+                </a:solidFill>
+                <a:latin typeface="Arial" panose="020B0604020202020204" pitchFamily="34" charset="0"/>
+                <a:cs typeface="Arial" panose="020B0604020202020204" pitchFamily="34" charset="0"/>
+              </a:rPr>
+              <a:t>300 (Multiple Choices): </a:t>
+            </a:r>
+            <a:r>
+              <a:rPr lang="en-US" dirty="0">
+                <a:latin typeface="Arial" panose="020B0604020202020204" pitchFamily="34" charset="0"/>
+                <a:cs typeface="Arial" panose="020B0604020202020204" pitchFamily="34" charset="0"/>
+              </a:rPr>
+              <a:t>This status code means that there are multiple options for the requested resource—like different file formats or different language options—and the user is required to select one.</a:t>
+            </a:r>
+          </a:p>
+          <a:p>
+            <a:endParaRPr lang="en-US" dirty="0">
+              <a:latin typeface="Arial" panose="020B0604020202020204" pitchFamily="34" charset="0"/>
+              <a:cs typeface="Arial" panose="020B0604020202020204" pitchFamily="34" charset="0"/>
+            </a:endParaRPr>
+          </a:p>
+          <a:p>
+            <a:pPr marL="342900" indent="-342900">
+              <a:buFont typeface="Wingdings" panose="05000000000000000000" pitchFamily="2" charset="2"/>
+              <a:buChar char="v"/>
+            </a:pPr>
+            <a:r>
+              <a:rPr lang="en-US" sz="2000" b="1" dirty="0">
+                <a:solidFill>
+                  <a:srgbClr val="00B050"/>
+                </a:solidFill>
+                <a:latin typeface="Arial" panose="020B0604020202020204" pitchFamily="34" charset="0"/>
+                <a:cs typeface="Arial" panose="020B0604020202020204" pitchFamily="34" charset="0"/>
+              </a:rPr>
+              <a:t>301 (Moved Permanently): </a:t>
+            </a:r>
+            <a:r>
+              <a:rPr lang="en-US" dirty="0">
+                <a:latin typeface="Arial" panose="020B0604020202020204" pitchFamily="34" charset="0"/>
+                <a:cs typeface="Arial" panose="020B0604020202020204" pitchFamily="34" charset="0"/>
+              </a:rPr>
+              <a:t>This means that the requested resource has been permanently moved to a new URL. 301 redirects are commonly used for SEO purposes, ensuring that old links transfer their ranking power to the new location.</a:t>
+            </a:r>
+          </a:p>
+          <a:p>
+            <a:endParaRPr lang="en-US" dirty="0">
+              <a:latin typeface="Arial" panose="020B0604020202020204" pitchFamily="34" charset="0"/>
+              <a:cs typeface="Arial" panose="020B0604020202020204" pitchFamily="34" charset="0"/>
+            </a:endParaRPr>
+          </a:p>
+          <a:p>
+            <a:pPr marL="342900" indent="-342900">
+              <a:buFont typeface="Wingdings" panose="05000000000000000000" pitchFamily="2" charset="2"/>
+              <a:buChar char="v"/>
+            </a:pPr>
+            <a:r>
+              <a:rPr lang="en-US" sz="2000" b="1" dirty="0">
+                <a:solidFill>
+                  <a:srgbClr val="00B050"/>
+                </a:solidFill>
+                <a:latin typeface="Arial" panose="020B0604020202020204" pitchFamily="34" charset="0"/>
+                <a:cs typeface="Arial" panose="020B0604020202020204" pitchFamily="34" charset="0"/>
+              </a:rPr>
+              <a:t>302 (Found): </a:t>
+            </a:r>
+            <a:r>
+              <a:rPr lang="en-US" dirty="0">
+                <a:latin typeface="Arial" panose="020B0604020202020204" pitchFamily="34" charset="0"/>
+                <a:cs typeface="Arial" panose="020B0604020202020204" pitchFamily="34" charset="0"/>
+              </a:rPr>
+              <a:t>302 redirects are used to temporarily redirect users to a new URL. They are useful when a page has been moved temporarily but will eventually be returned to its original location.</a:t>
+            </a:r>
+          </a:p>
+          <a:p>
+            <a:endParaRPr lang="en-US" dirty="0">
+              <a:latin typeface="Arial" panose="020B0604020202020204" pitchFamily="34" charset="0"/>
+              <a:cs typeface="Arial" panose="020B0604020202020204" pitchFamily="34" charset="0"/>
+            </a:endParaRPr>
+          </a:p>
+          <a:p>
+            <a:pPr marL="342900" indent="-342900">
+              <a:buFont typeface="Wingdings" panose="05000000000000000000" pitchFamily="2" charset="2"/>
+              <a:buChar char="v"/>
+            </a:pPr>
+            <a:r>
+              <a:rPr lang="en-US" sz="2000" b="1" dirty="0">
+                <a:solidFill>
+                  <a:srgbClr val="00B050"/>
+                </a:solidFill>
+                <a:latin typeface="Arial" panose="020B0604020202020204" pitchFamily="34" charset="0"/>
+                <a:cs typeface="Arial" panose="020B0604020202020204" pitchFamily="34" charset="0"/>
+              </a:rPr>
+              <a:t>303 (See Other): </a:t>
+            </a:r>
+            <a:r>
+              <a:rPr lang="en-US" dirty="0">
+                <a:latin typeface="Arial" panose="020B0604020202020204" pitchFamily="34" charset="0"/>
+                <a:cs typeface="Arial" panose="020B0604020202020204" pitchFamily="34" charset="0"/>
+              </a:rPr>
+              <a:t>This status code directs the user to access the requested resource at a different URL. 303 redirects are most commonly used following a form submission to prevent duplicate submissions when the page is reloaded.</a:t>
+            </a:r>
+          </a:p>
+        </p:txBody>
+      </p:sp>
+    </p:spTree>
+    <p:extLst>
+      <p:ext uri="{BB962C8B-B14F-4D97-AF65-F5344CB8AC3E}">
+        <p14:creationId xmlns:p14="http://schemas.microsoft.com/office/powerpoint/2010/main" val="2308929145"/>
+      </p:ext>
+    </p:extLst>
+  </p:cSld>
+  <p:clrMapOvr>
+    <a:masterClrMapping/>
+  </p:clrMapOvr>
+</p:sld>
+</file>
+
+<file path=ppt/slides/slide8.xml><?xml version="1.0" encoding="utf-8"?>
+<p:sld xmlns:a="http://schemas.openxmlformats.org/drawingml/2006/main" xmlns:r="http://schemas.openxmlformats.org/officeDocument/2006/relationships" xmlns:p="http://schemas.openxmlformats.org/presentationml/2006/main">
+  <p:cSld>
+    <p:spTree>
+      <p:nvGrpSpPr>
+        <p:cNvPr id="1" name="">
+          <a:extLst>
+            <a:ext uri="{FF2B5EF4-FFF2-40B4-BE49-F238E27FC236}">
+              <a16:creationId xmlns:a16="http://schemas.microsoft.com/office/drawing/2014/main" id="{67668547-05B7-8B9B-FB67-6557938C7F2C}"/>
+            </a:ext>
+          </a:extLst>
+        </p:cNvPr>
+        <p:cNvGrpSpPr/>
+        <p:nvPr/>
+      </p:nvGrpSpPr>
+      <p:grpSpPr>
+        <a:xfrm>
+          <a:off x="0" y="0"/>
+          <a:ext cx="0" cy="0"/>
+          <a:chOff x="0" y="0"/>
+          <a:chExt cx="0" cy="0"/>
+        </a:xfrm>
+      </p:grpSpPr>
+      <p:sp>
+        <p:nvSpPr>
+          <p:cNvPr id="2" name="TextBox 1">
+            <a:extLst>
+              <a:ext uri="{FF2B5EF4-FFF2-40B4-BE49-F238E27FC236}">
+                <a16:creationId xmlns:a16="http://schemas.microsoft.com/office/drawing/2014/main" id="{73FF811C-2AF3-BA05-FAE7-B455DAD79B92}"/>
+              </a:ext>
+            </a:extLst>
+          </p:cNvPr>
+          <p:cNvSpPr txBox="1"/>
+          <p:nvPr/>
+        </p:nvSpPr>
+        <p:spPr>
+          <a:xfrm>
+            <a:off x="619760" y="619760"/>
+            <a:ext cx="10952480" cy="5355312"/>
+          </a:xfrm>
+          <a:prstGeom prst="rect">
+            <a:avLst/>
+          </a:prstGeom>
+          <a:noFill/>
+        </p:spPr>
+        <p:txBody>
+          <a:bodyPr wrap="square" rtlCol="0">
+            <a:spAutoFit/>
+          </a:bodyPr>
+          <a:lstStyle/>
+          <a:p>
+            <a:endParaRPr lang="en-US" sz="1600" dirty="0"/>
+          </a:p>
+          <a:p>
+            <a:r>
+              <a:rPr lang="en-US" sz="2000" b="1" dirty="0">
+                <a:solidFill>
+                  <a:srgbClr val="FF0000"/>
+                </a:solidFill>
+                <a:latin typeface="Arial Black" panose="020B0A04020102020204" pitchFamily="34" charset="0"/>
+              </a:rPr>
+              <a:t>4.</a:t>
+            </a:r>
+            <a:r>
+              <a:rPr lang="en-US" dirty="0"/>
+              <a:t> </a:t>
+            </a:r>
+            <a:r>
+              <a:rPr lang="en-US" sz="2000" b="1" dirty="0">
+                <a:solidFill>
+                  <a:srgbClr val="FF0000"/>
+                </a:solidFill>
+                <a:latin typeface="Arial Black" panose="020B0A04020102020204" pitchFamily="34" charset="0"/>
+              </a:rPr>
+              <a:t>4xx – Client errors</a:t>
+            </a:r>
+          </a:p>
+          <a:p>
+            <a:r>
+              <a:rPr lang="en-US" dirty="0">
+                <a:latin typeface="Arial" panose="020B0604020202020204" pitchFamily="34" charset="0"/>
+                <a:cs typeface="Arial" panose="020B0604020202020204" pitchFamily="34" charset="0"/>
+              </a:rPr>
+              <a:t>               4xx status codes are returned when there is an issue with the user's request (such as a mistyped URL or missing authentication). Here are the five different types of client errors that can occur:</a:t>
+            </a:r>
+          </a:p>
+          <a:p>
+            <a:endParaRPr lang="en-US" dirty="0">
+              <a:latin typeface="Arial" panose="020B0604020202020204" pitchFamily="34" charset="0"/>
+              <a:cs typeface="Arial" panose="020B0604020202020204" pitchFamily="34" charset="0"/>
+            </a:endParaRPr>
+          </a:p>
+          <a:p>
+            <a:pPr marL="285750" indent="-285750">
+              <a:buFont typeface="Wingdings" panose="05000000000000000000" pitchFamily="2" charset="2"/>
+              <a:buChar char="v"/>
+            </a:pPr>
+            <a:r>
+              <a:rPr lang="en-US" b="1" dirty="0">
+                <a:solidFill>
+                  <a:srgbClr val="FF0000"/>
+                </a:solidFill>
+                <a:latin typeface="Arial" panose="020B0604020202020204" pitchFamily="34" charset="0"/>
+                <a:cs typeface="Arial" panose="020B0604020202020204" pitchFamily="34" charset="0"/>
+              </a:rPr>
+              <a:t>400 (Bad Request): </a:t>
+            </a:r>
+            <a:r>
+              <a:rPr lang="en-US" dirty="0">
+                <a:latin typeface="Arial" panose="020B0604020202020204" pitchFamily="34" charset="0"/>
+                <a:cs typeface="Arial" panose="020B0604020202020204" pitchFamily="34" charset="0"/>
+              </a:rPr>
+              <a:t>This status code indicates that the request made by the user is invalid and cannot be processed. 400 errors are most commonly caused by things like incorrect API requests or bad URL structures.</a:t>
+            </a:r>
+          </a:p>
+          <a:p>
+            <a:endParaRPr lang="en-US" dirty="0">
+              <a:latin typeface="Arial" panose="020B0604020202020204" pitchFamily="34" charset="0"/>
+              <a:cs typeface="Arial" panose="020B0604020202020204" pitchFamily="34" charset="0"/>
+            </a:endParaRPr>
+          </a:p>
+          <a:p>
+            <a:pPr marL="285750" indent="-285750">
+              <a:buFont typeface="Wingdings" panose="05000000000000000000" pitchFamily="2" charset="2"/>
+              <a:buChar char="v"/>
+            </a:pPr>
+            <a:r>
+              <a:rPr lang="en-US" b="1" dirty="0">
+                <a:solidFill>
+                  <a:srgbClr val="FF0000"/>
+                </a:solidFill>
+                <a:latin typeface="Arial" panose="020B0604020202020204" pitchFamily="34" charset="0"/>
+                <a:cs typeface="Arial" panose="020B0604020202020204" pitchFamily="34" charset="0"/>
+              </a:rPr>
+              <a:t>401 (Unauthorized): </a:t>
+            </a:r>
+            <a:r>
+              <a:rPr lang="en-US" dirty="0">
+                <a:latin typeface="Arial" panose="020B0604020202020204" pitchFamily="34" charset="0"/>
+                <a:cs typeface="Arial" panose="020B0604020202020204" pitchFamily="34" charset="0"/>
+              </a:rPr>
+              <a:t>This status code is displayed when a user requests a resource that requires authorization to access. The user must provide valid credentials before the server will return the requested resource.</a:t>
+            </a:r>
+          </a:p>
+          <a:p>
+            <a:endParaRPr lang="en-US" dirty="0">
+              <a:latin typeface="Arial" panose="020B0604020202020204" pitchFamily="34" charset="0"/>
+              <a:cs typeface="Arial" panose="020B0604020202020204" pitchFamily="34" charset="0"/>
+            </a:endParaRPr>
+          </a:p>
+          <a:p>
+            <a:pPr marL="285750" indent="-285750">
+              <a:buFont typeface="Wingdings" panose="05000000000000000000" pitchFamily="2" charset="2"/>
+              <a:buChar char="v"/>
+            </a:pPr>
+            <a:r>
+              <a:rPr lang="en-US" b="1" dirty="0">
+                <a:solidFill>
+                  <a:srgbClr val="FF0000"/>
+                </a:solidFill>
+                <a:latin typeface="Arial" panose="020B0604020202020204" pitchFamily="34" charset="0"/>
+                <a:cs typeface="Arial" panose="020B0604020202020204" pitchFamily="34" charset="0"/>
+              </a:rPr>
+              <a:t>402 (Payment Required): </a:t>
+            </a:r>
+            <a:r>
+              <a:rPr lang="en-US" dirty="0">
+                <a:latin typeface="Arial" panose="020B0604020202020204" pitchFamily="34" charset="0"/>
+                <a:cs typeface="Arial" panose="020B0604020202020204" pitchFamily="34" charset="0"/>
+              </a:rPr>
+              <a:t>This code was originally intended for digital payment systems to indicate that payment is required to access a specific resource. However, it is rarely used today.</a:t>
+            </a:r>
+          </a:p>
+          <a:p>
+            <a:endParaRPr lang="en-US" dirty="0">
+              <a:latin typeface="Arial" panose="020B0604020202020204" pitchFamily="34" charset="0"/>
+              <a:cs typeface="Arial" panose="020B0604020202020204" pitchFamily="34" charset="0"/>
+            </a:endParaRPr>
+          </a:p>
+          <a:p>
+            <a:pPr marL="285750" indent="-285750">
+              <a:buFont typeface="Wingdings" panose="05000000000000000000" pitchFamily="2" charset="2"/>
+              <a:buChar char="v"/>
+            </a:pPr>
+            <a:r>
+              <a:rPr lang="en-US" b="1" dirty="0">
+                <a:solidFill>
+                  <a:srgbClr val="FF0000"/>
+                </a:solidFill>
+                <a:latin typeface="Arial" panose="020B0604020202020204" pitchFamily="34" charset="0"/>
+                <a:cs typeface="Arial" panose="020B0604020202020204" pitchFamily="34" charset="0"/>
+              </a:rPr>
+              <a:t>403 (Forbidden): </a:t>
+            </a:r>
+            <a:r>
+              <a:rPr lang="en-US" dirty="0">
+                <a:latin typeface="Arial" panose="020B0604020202020204" pitchFamily="34" charset="0"/>
+                <a:cs typeface="Arial" panose="020B0604020202020204" pitchFamily="34" charset="0"/>
+              </a:rPr>
+              <a:t>This means that the server understands the user's request but refuses to process it. 403 errors most commonly occur when a user tries to access restricted content without the necessary permissions.</a:t>
+            </a:r>
+          </a:p>
+        </p:txBody>
+      </p:sp>
+    </p:spTree>
+    <p:extLst>
+      <p:ext uri="{BB962C8B-B14F-4D97-AF65-F5344CB8AC3E}">
+        <p14:creationId xmlns:p14="http://schemas.microsoft.com/office/powerpoint/2010/main" val="2666220643"/>
+      </p:ext>
+    </p:extLst>
+  </p:cSld>
+  <p:clrMapOvr>
+    <a:masterClrMapping/>
+  </p:clrMapOvr>
+</p:sld>
+</file>
+
+<file path=ppt/slides/slide9.xml><?xml version="1.0" encoding="utf-8"?>
+<p:sld xmlns:a="http://schemas.openxmlformats.org/drawingml/2006/main" xmlns:r="http://schemas.openxmlformats.org/officeDocument/2006/relationships" xmlns:p="http://schemas.openxmlformats.org/presentationml/2006/main">
+  <p:cSld>
+    <p:spTree>
+      <p:nvGrpSpPr>
+        <p:cNvPr id="1" name="">
+          <a:extLst>
+            <a:ext uri="{FF2B5EF4-FFF2-40B4-BE49-F238E27FC236}">
+              <a16:creationId xmlns:a16="http://schemas.microsoft.com/office/drawing/2014/main" id="{5E47E445-595D-5FEC-4D03-38ECC5B06544}"/>
+            </a:ext>
+          </a:extLst>
+        </p:cNvPr>
+        <p:cNvGrpSpPr/>
+        <p:nvPr/>
+      </p:nvGrpSpPr>
+      <p:grpSpPr>
+        <a:xfrm>
+          <a:off x="0" y="0"/>
+          <a:ext cx="0" cy="0"/>
+          <a:chOff x="0" y="0"/>
+          <a:chExt cx="0" cy="0"/>
+        </a:xfrm>
+      </p:grpSpPr>
+      <p:sp>
+        <p:nvSpPr>
+          <p:cNvPr id="2" name="TextBox 1">
+            <a:extLst>
+              <a:ext uri="{FF2B5EF4-FFF2-40B4-BE49-F238E27FC236}">
+                <a16:creationId xmlns:a16="http://schemas.microsoft.com/office/drawing/2014/main" id="{318E39FE-F846-88E9-D66B-68D8CD1B7499}"/>
+              </a:ext>
+            </a:extLst>
+          </p:cNvPr>
+          <p:cNvSpPr txBox="1"/>
+          <p:nvPr/>
+        </p:nvSpPr>
+        <p:spPr>
+          <a:xfrm>
+            <a:off x="609600" y="589280"/>
+            <a:ext cx="10952480" cy="5940088"/>
+          </a:xfrm>
+          <a:prstGeom prst="rect">
+            <a:avLst/>
+          </a:prstGeom>
+          <a:noFill/>
+        </p:spPr>
+        <p:txBody>
+          <a:bodyPr wrap="square" rtlCol="0">
+            <a:spAutoFit/>
+          </a:bodyPr>
+          <a:lstStyle/>
+          <a:p>
+            <a:endParaRPr lang="en-US" dirty="0">
+              <a:latin typeface="Arial" panose="020B0604020202020204" pitchFamily="34" charset="0"/>
+              <a:cs typeface="Arial" panose="020B0604020202020204" pitchFamily="34" charset="0"/>
+            </a:endParaRPr>
+          </a:p>
+          <a:p>
+            <a:pPr marL="285750" indent="-285750">
+              <a:buFont typeface="Wingdings" panose="05000000000000000000" pitchFamily="2" charset="2"/>
+              <a:buChar char="v"/>
+            </a:pPr>
+            <a:r>
+              <a:rPr lang="en-US" b="1" dirty="0">
+                <a:solidFill>
+                  <a:srgbClr val="FF0000"/>
+                </a:solidFill>
+                <a:latin typeface="Arial" panose="020B0604020202020204" pitchFamily="34" charset="0"/>
+                <a:cs typeface="Arial" panose="020B0604020202020204" pitchFamily="34" charset="0"/>
+              </a:rPr>
+              <a:t>404 (Not Found): </a:t>
+            </a:r>
+            <a:r>
+              <a:rPr lang="en-US" dirty="0">
+                <a:latin typeface="Arial" panose="020B0604020202020204" pitchFamily="34" charset="0"/>
+                <a:cs typeface="Arial" panose="020B0604020202020204" pitchFamily="34" charset="0"/>
+              </a:rPr>
+              <a:t>This status code means that the server could not find the resource that the user requested. 404 errors can occur when the user types in a URL incorrectly or when the page has been deleted/moved without proper redirection.</a:t>
+            </a:r>
+          </a:p>
+          <a:p>
+            <a:endParaRPr lang="en-US" dirty="0"/>
+          </a:p>
+          <a:p>
+            <a:r>
+              <a:rPr lang="en-US" sz="2000" b="1" dirty="0">
+                <a:solidFill>
+                  <a:srgbClr val="FF0000"/>
+                </a:solidFill>
+                <a:latin typeface="Arial Black" panose="020B0A04020102020204" pitchFamily="34" charset="0"/>
+                <a:cs typeface="Arial" panose="020B0604020202020204" pitchFamily="34" charset="0"/>
+              </a:rPr>
+              <a:t>5. 5xx – Server errors:</a:t>
+            </a:r>
+          </a:p>
+          <a:p>
+            <a:r>
+              <a:rPr lang="en-US" dirty="0">
+                <a:latin typeface="Arial" panose="020B0604020202020204" pitchFamily="34" charset="0"/>
+                <a:cs typeface="Arial" panose="020B0604020202020204" pitchFamily="34" charset="0"/>
+              </a:rPr>
+              <a:t>             5xx status codes indicate that the server encountered an issue while processing a valid request. They result from problems with the server, not the client, and they include these five status codes:</a:t>
+            </a:r>
+          </a:p>
+          <a:p>
+            <a:endParaRPr lang="en-US" dirty="0">
+              <a:latin typeface="Arial" panose="020B0604020202020204" pitchFamily="34" charset="0"/>
+              <a:cs typeface="Arial" panose="020B0604020202020204" pitchFamily="34" charset="0"/>
+            </a:endParaRPr>
+          </a:p>
+          <a:p>
+            <a:pPr marL="285750" indent="-285750">
+              <a:buFont typeface="Wingdings" panose="05000000000000000000" pitchFamily="2" charset="2"/>
+              <a:buChar char="v"/>
+            </a:pPr>
+            <a:r>
+              <a:rPr lang="en-US" b="1" dirty="0">
+                <a:solidFill>
+                  <a:srgbClr val="00B050"/>
+                </a:solidFill>
+                <a:latin typeface="Arial" panose="020B0604020202020204" pitchFamily="34" charset="0"/>
+                <a:cs typeface="Arial" panose="020B0604020202020204" pitchFamily="34" charset="0"/>
+              </a:rPr>
+              <a:t>500 (Internal Server Error): </a:t>
+            </a:r>
+            <a:r>
+              <a:rPr lang="en-US" dirty="0">
+                <a:latin typeface="Arial" panose="020B0604020202020204" pitchFamily="34" charset="0"/>
+                <a:cs typeface="Arial" panose="020B0604020202020204" pitchFamily="34" charset="0"/>
+              </a:rPr>
+              <a:t>This is a generic error message that's returned when the server encounters an unexpected issue. Coding errors, server misconfigurations, and resource limits are a few issues that can commonly cause 500 errors.</a:t>
+            </a:r>
+          </a:p>
+          <a:p>
+            <a:pPr marL="285750" indent="-285750">
+              <a:buFont typeface="Wingdings" panose="05000000000000000000" pitchFamily="2" charset="2"/>
+              <a:buChar char="v"/>
+            </a:pPr>
+            <a:endParaRPr lang="en-US" b="1" dirty="0">
+              <a:solidFill>
+                <a:srgbClr val="00B050"/>
+              </a:solidFill>
+              <a:latin typeface="Arial" panose="020B0604020202020204" pitchFamily="34" charset="0"/>
+              <a:cs typeface="Arial" panose="020B0604020202020204" pitchFamily="34" charset="0"/>
+            </a:endParaRPr>
+          </a:p>
+          <a:p>
+            <a:pPr marL="285750" indent="-285750">
+              <a:buFont typeface="Wingdings" panose="05000000000000000000" pitchFamily="2" charset="2"/>
+              <a:buChar char="v"/>
+            </a:pPr>
+            <a:r>
+              <a:rPr lang="en-US" b="1" dirty="0">
+                <a:solidFill>
+                  <a:srgbClr val="00B050"/>
+                </a:solidFill>
+                <a:latin typeface="Arial" panose="020B0604020202020204" pitchFamily="34" charset="0"/>
+                <a:cs typeface="Arial" panose="020B0604020202020204" pitchFamily="34" charset="0"/>
+              </a:rPr>
+              <a:t>501 (Not Implemented): </a:t>
+            </a:r>
+            <a:r>
+              <a:rPr lang="en-US" dirty="0">
+                <a:latin typeface="Arial" panose="020B0604020202020204" pitchFamily="34" charset="0"/>
+                <a:cs typeface="Arial" panose="020B0604020202020204" pitchFamily="34" charset="0"/>
+              </a:rPr>
+              <a:t>This status code means that the server does not support the functionality required to complete the user's request. 501 errors often indicate that a method like PUT or DELETE isn't supported by the server.</a:t>
+            </a:r>
+          </a:p>
+          <a:p>
+            <a:endParaRPr lang="en-US" dirty="0">
+              <a:latin typeface="Arial" panose="020B0604020202020204" pitchFamily="34" charset="0"/>
+              <a:cs typeface="Arial" panose="020B0604020202020204" pitchFamily="34" charset="0"/>
+            </a:endParaRPr>
+          </a:p>
+          <a:p>
+            <a:pPr marL="285750" indent="-285750">
+              <a:buFont typeface="Wingdings" panose="05000000000000000000" pitchFamily="2" charset="2"/>
+              <a:buChar char="v"/>
+            </a:pPr>
+            <a:r>
+              <a:rPr lang="en-US" b="1" dirty="0">
+                <a:solidFill>
+                  <a:srgbClr val="00B050"/>
+                </a:solidFill>
+                <a:latin typeface="Arial" panose="020B0604020202020204" pitchFamily="34" charset="0"/>
+                <a:cs typeface="Arial" panose="020B0604020202020204" pitchFamily="34" charset="0"/>
+              </a:rPr>
+              <a:t>502 (Bad Gateway): </a:t>
+            </a:r>
+            <a:r>
+              <a:rPr lang="en-US" dirty="0">
+                <a:latin typeface="Arial" panose="020B0604020202020204" pitchFamily="34" charset="0"/>
+                <a:cs typeface="Arial" panose="020B0604020202020204" pitchFamily="34" charset="0"/>
+              </a:rPr>
+              <a:t>When the server is acting as a gateway or proxy and receives an invalid response from an upstream server, this is the error message that's returned. 502 errors commonly occur when an upstream server is down or overloaded.</a:t>
+            </a:r>
+          </a:p>
+          <a:p>
+            <a:endParaRPr lang="en-US" dirty="0">
+              <a:latin typeface="Arial" panose="020B0604020202020204" pitchFamily="34" charset="0"/>
+              <a:cs typeface="Arial" panose="020B0604020202020204" pitchFamily="34" charset="0"/>
+            </a:endParaRPr>
+          </a:p>
+        </p:txBody>
+      </p:sp>
+    </p:spTree>
+    <p:extLst>
+      <p:ext uri="{BB962C8B-B14F-4D97-AF65-F5344CB8AC3E}">
+        <p14:creationId xmlns:p14="http://schemas.microsoft.com/office/powerpoint/2010/main" val="2314413254"/>
+      </p:ext>
+    </p:extLst>
+  </p:cSld>
+  <p:clrMapOvr>
+    <a:masterClrMapping/>
+  </p:clrMapOvr>
+</p:sld>
+</file>
+
 <file path=ppt/theme/theme1.xml><?xml version="1.0" encoding="utf-8"?>
-<a:theme xmlns:a="http://schemas.openxmlformats.org/drawingml/2006/main" name="Office Theme">
+<a:theme xmlns:a="http://schemas.openxmlformats.org/drawingml/2006/main" name="Organic">
   <a:themeElements>
-    <a:clrScheme name="Office">
+    <a:clrScheme name="Organic">
       <a:dk1>
         <a:sysClr val="windowText" lastClr="000000"/>
       </a:dk1>
@@ -3345,44 +7726,79 @@
         <a:sysClr val="window" lastClr="FFFFFF"/>
       </a:lt1>
       <a:dk2>
-        <a:srgbClr val="44546A"/>
+        <a:srgbClr val="212121"/>
       </a:dk2>
       <a:lt2>
-        <a:srgbClr val="E7E6E6"/>
+        <a:srgbClr val="DADADA"/>
       </a:lt2>
       <a:accent1>
-        <a:srgbClr val="4472C4"/>
+        <a:srgbClr val="83992A"/>
       </a:accent1>
       <a:accent2>
-        <a:srgbClr val="ED7D31"/>
+        <a:srgbClr val="3C9770"/>
       </a:accent2>
       <a:accent3>
-        <a:srgbClr val="A5A5A5"/>
+        <a:srgbClr val="44709D"/>
       </a:accent3>
       <a:accent4>
-        <a:srgbClr val="FFC000"/>
+        <a:srgbClr val="A23C33"/>
       </a:accent4>
       <a:accent5>
-        <a:srgbClr val="5B9BD5"/>
+        <a:srgbClr val="D97828"/>
       </a:accent5>
       <a:accent6>
-        <a:srgbClr val="70AD47"/>
+        <a:srgbClr val="DEB340"/>
       </a:accent6>
       <a:hlink>
-        <a:srgbClr val="0563C1"/>
+        <a:srgbClr val="A8BF4D"/>
       </a:hlink>
       <a:folHlink>
-        <a:srgbClr val="954F72"/>
+        <a:srgbClr val="B4CA80"/>
       </a:folHlink>
     </a:clrScheme>
-    <a:fontScheme name="Office">
+    <a:fontScheme name="Organic">
       <a:majorFont>
-        <a:latin typeface="Calibri Light" panose="020F0302020204030204"/>
+        <a:latin typeface="Garamond" panose="02020404030301010803"/>
         <a:ea typeface=""/>
         <a:cs typeface=""/>
-        <a:font script="Jpan" typeface="游ゴシック Light"/>
-        <a:font script="Hang" typeface="맑은 고딕"/>
-        <a:font script="Hans" typeface="等线 Light"/>
+        <a:font script="Jpan" typeface="ＭＳ Ｐゴシック"/>
+        <a:font script="Hang" typeface="돋움"/>
+        <a:font script="Hans" typeface="方正舒体"/>
+        <a:font script="Hant" typeface="微軟正黑體"/>
+        <a:font script="Arab" typeface="Arial"/>
+        <a:font script="Hebr" typeface="Arial"/>
+        <a:font script="Thai" typeface="Cordia New"/>
+        <a:font script="Ethi" typeface="Nyala"/>
+        <a:font script="Beng" typeface="Vrinda"/>
+        <a:font script="Gujr" typeface="Shruti"/>
+        <a:font script="Khmr" typeface="DaunPenh"/>
+        <a:font script="Knda" typeface="Tunga"/>
+        <a:font script="Guru" typeface="Raavi"/>
+        <a:font script="Cans" typeface="Euphemia"/>
+        <a:font script="Cher" typeface="Plantagenet Cherokee"/>
+        <a:font script="Yiii" typeface="Microsoft Yi Baiti"/>
+        <a:font script="Tibt" typeface="Microsoft Himalaya"/>
+        <a:font script="Thaa" typeface="MV Boli"/>
+        <a:font script="Deva" typeface="Mangal"/>
+        <a:font script="Telu" typeface="Gautami"/>
+        <a:font script="Taml" typeface="Latha"/>
+        <a:font script="Syrc" typeface="Estrangelo Edessa"/>
+        <a:font script="Orya" typeface="Kalinga"/>
+        <a:font script="Mlym" typeface="Kartika"/>
+        <a:font script="Laoo" typeface="DokChampa"/>
+        <a:font script="Sinh" typeface="Iskoola Pota"/>
+        <a:font script="Mong" typeface="Mongolian Baiti"/>
+        <a:font script="Viet" typeface="Arial"/>
+        <a:font script="Uigh" typeface="Microsoft Uighur"/>
+        <a:font script="Geor" typeface="Sylfaen"/>
+      </a:majorFont>
+      <a:minorFont>
+        <a:latin typeface="Garamond" panose="02020404030301010803"/>
+        <a:ea typeface=""/>
+        <a:cs typeface=""/>
+        <a:font script="Jpan" typeface="ＭＳ Ｐ明朝"/>
+        <a:font script="Hang" typeface="바탕"/>
+        <a:font script="Hans" typeface="方正舒体"/>
         <a:font script="Hant" typeface="新細明體"/>
         <a:font script="Arab" typeface="Times New Roman"/>
         <a:font script="Hebr" typeface="Times New Roman"/>
@@ -3410,78 +7826,9 @@
         <a:font script="Viet" typeface="Times New Roman"/>
         <a:font script="Uigh" typeface="Microsoft Uighur"/>
         <a:font script="Geor" typeface="Sylfaen"/>
-        <a:font script="Armn" typeface="Arial"/>
-        <a:font script="Bugi" typeface="Leelawadee UI"/>
-        <a:font script="Bopo" typeface="Microsoft JhengHei"/>
-        <a:font script="Java" typeface="Javanese Text"/>
-        <a:font script="Lisu" typeface="Segoe UI"/>
-        <a:font script="Mymr" typeface="Myanmar Text"/>
-        <a:font script="Nkoo" typeface="Ebrima"/>
-        <a:font script="Olck" typeface="Nirmala UI"/>
-        <a:font script="Osma" typeface="Ebrima"/>
-        <a:font script="Phag" typeface="Phagspa"/>
-        <a:font script="Syrn" typeface="Estrangelo Edessa"/>
-        <a:font script="Syrj" typeface="Estrangelo Edessa"/>
-        <a:font script="Syre" typeface="Estrangelo Edessa"/>
-        <a:font script="Sora" typeface="Nirmala UI"/>
-        <a:font script="Tale" typeface="Microsoft Tai Le"/>
-        <a:font script="Talu" typeface="Microsoft New Tai Lue"/>
-        <a:font script="Tfng" typeface="Ebrima"/>
-      </a:majorFont>
-      <a:minorFont>
-        <a:latin typeface="Calibri" panose="020F0502020204030204"/>
-        <a:ea typeface=""/>
-        <a:cs typeface=""/>
-        <a:font script="Jpan" typeface="游ゴシック"/>
-        <a:font script="Hang" typeface="맑은 고딕"/>
-        <a:font script="Hans" typeface="等线"/>
-        <a:font script="Hant" typeface="新細明體"/>
-        <a:font script="Arab" typeface="Arial"/>
-        <a:font script="Hebr" typeface="Arial"/>
-        <a:font script="Thai" typeface="Cordia New"/>
-        <a:font script="Ethi" typeface="Nyala"/>
-        <a:font script="Beng" typeface="Vrinda"/>
-        <a:font script="Gujr" typeface="Shruti"/>
-        <a:font script="Khmr" typeface="DaunPenh"/>
-        <a:font script="Knda" typeface="Tunga"/>
-        <a:font script="Guru" typeface="Raavi"/>
-        <a:font script="Cans" typeface="Euphemia"/>
-        <a:font script="Cher" typeface="Plantagenet Cherokee"/>
-        <a:font script="Yiii" typeface="Microsoft Yi Baiti"/>
-        <a:font script="Tibt" typeface="Microsoft Himalaya"/>
-        <a:font script="Thaa" typeface="MV Boli"/>
-        <a:font script="Deva" typeface="Mangal"/>
-        <a:font script="Telu" typeface="Gautami"/>
-        <a:font script="Taml" typeface="Latha"/>
-        <a:font script="Syrc" typeface="Estrangelo Edessa"/>
-        <a:font script="Orya" typeface="Kalinga"/>
-        <a:font script="Mlym" typeface="Kartika"/>
-        <a:font script="Laoo" typeface="DokChampa"/>
-        <a:font script="Sinh" typeface="Iskoola Pota"/>
-        <a:font script="Mong" typeface="Mongolian Baiti"/>
-        <a:font script="Viet" typeface="Arial"/>
-        <a:font script="Uigh" typeface="Microsoft Uighur"/>
-        <a:font script="Geor" typeface="Sylfaen"/>
-        <a:font script="Armn" typeface="Arial"/>
-        <a:font script="Bugi" typeface="Leelawadee UI"/>
-        <a:font script="Bopo" typeface="Microsoft JhengHei"/>
-        <a:font script="Java" typeface="Javanese Text"/>
-        <a:font script="Lisu" typeface="Segoe UI"/>
-        <a:font script="Mymr" typeface="Myanmar Text"/>
-        <a:font script="Nkoo" typeface="Ebrima"/>
-        <a:font script="Olck" typeface="Nirmala UI"/>
-        <a:font script="Osma" typeface="Ebrima"/>
-        <a:font script="Phag" typeface="Phagspa"/>
-        <a:font script="Syrn" typeface="Estrangelo Edessa"/>
-        <a:font script="Syrj" typeface="Estrangelo Edessa"/>
-        <a:font script="Syre" typeface="Estrangelo Edessa"/>
-        <a:font script="Sora" typeface="Nirmala UI"/>
-        <a:font script="Tale" typeface="Microsoft Tai Le"/>
-        <a:font script="Talu" typeface="Microsoft New Tai Lue"/>
-        <a:font script="Tfng" typeface="Ebrima"/>
       </a:minorFont>
     </a:fontScheme>
-    <a:fmtScheme name="Office">
+    <a:fmtScheme name="Organic">
       <a:fillStyleLst>
         <a:solidFill>
           <a:schemeClr val="phClr"/>
@@ -3490,76 +7837,54 @@
           <a:gsLst>
             <a:gs pos="0">
               <a:schemeClr val="phClr">
+                <a:tint val="60000"/>
                 <a:lumMod val="110000"/>
-                <a:satMod val="105000"/>
-                <a:tint val="67000"/>
-              </a:schemeClr>
-            </a:gs>
-            <a:gs pos="50000">
-              <a:schemeClr val="phClr">
-                <a:lumMod val="105000"/>
-                <a:satMod val="103000"/>
-                <a:tint val="73000"/>
               </a:schemeClr>
             </a:gs>
             <a:gs pos="100000">
               <a:schemeClr val="phClr">
-                <a:lumMod val="105000"/>
-                <a:satMod val="109000"/>
-                <a:tint val="81000"/>
+                <a:tint val="82000"/>
               </a:schemeClr>
             </a:gs>
           </a:gsLst>
           <a:lin ang="5400000" scaled="0"/>
         </a:gradFill>
-        <a:gradFill rotWithShape="1">
-          <a:gsLst>
-            <a:gs pos="0">
+        <a:blipFill>
+          <a:blip xmlns:r="http://schemas.openxmlformats.org/officeDocument/2006/relationships" r:embed="rId1">
+            <a:duotone>
               <a:schemeClr val="phClr">
-                <a:satMod val="103000"/>
-                <a:lumMod val="102000"/>
+                <a:shade val="74000"/>
+                <a:satMod val="130000"/>
+                <a:lumMod val="90000"/>
+              </a:schemeClr>
+              <a:schemeClr val="phClr">
                 <a:tint val="94000"/>
+                <a:satMod val="120000"/>
+                <a:lumMod val="104000"/>
               </a:schemeClr>
-            </a:gs>
-            <a:gs pos="50000">
-              <a:schemeClr val="phClr">
-                <a:satMod val="110000"/>
-                <a:lumMod val="100000"/>
-                <a:shade val="100000"/>
-              </a:schemeClr>
-            </a:gs>
-            <a:gs pos="100000">
-              <a:schemeClr val="phClr">
-                <a:lumMod val="99000"/>
-                <a:satMod val="120000"/>
-                <a:shade val="78000"/>
-              </a:schemeClr>
-            </a:gs>
-          </a:gsLst>
-          <a:lin ang="5400000" scaled="0"/>
-        </a:gradFill>
+            </a:duotone>
+          </a:blip>
+          <a:tile tx="0" ty="0" sx="100000" sy="100000" flip="none" algn="tl"/>
+        </a:blipFill>
       </a:fillStyleLst>
       <a:lnStyleLst>
-        <a:ln w="6350" cap="flat" cmpd="sng" algn="ctr">
+        <a:ln w="9525" cap="flat" cmpd="sng" algn="ctr">
           <a:solidFill>
             <a:schemeClr val="phClr"/>
           </a:solidFill>
           <a:prstDash val="solid"/>
-          <a:miter lim="800000"/>
         </a:ln>
-        <a:ln w="12700" cap="flat" cmpd="sng" algn="ctr">
+        <a:ln w="15875" cap="flat" cmpd="sng" algn="ctr">
           <a:solidFill>
             <a:schemeClr val="phClr"/>
           </a:solidFill>
           <a:prstDash val="solid"/>
-          <a:miter lim="800000"/>
         </a:ln>
-        <a:ln w="19050" cap="flat" cmpd="sng" algn="ctr">
+        <a:ln w="25400" cap="flat" cmpd="sng" algn="ctr">
           <a:solidFill>
             <a:schemeClr val="phClr"/>
           </a:solidFill>
           <a:prstDash val="solid"/>
-          <a:miter lim="800000"/>
         </a:ln>
       </a:lnStyleLst>
       <a:effectStyleLst>
@@ -3567,13 +7892,19 @@
           <a:effectLst/>
         </a:effectStyle>
         <a:effectStyle>
-          <a:effectLst/>
+          <a:effectLst>
+            <a:innerShdw blurRad="25400" dist="12700" dir="13500000">
+              <a:srgbClr val="000000">
+                <a:alpha val="45000"/>
+              </a:srgbClr>
+            </a:innerShdw>
+          </a:effectLst>
         </a:effectStyle>
         <a:effectStyle>
           <a:effectLst>
-            <a:outerShdw blurRad="57150" dist="19050" dir="5400000" algn="ctr" rotWithShape="0">
+            <a:outerShdw blurRad="38100" dist="25400" dir="5400000" rotWithShape="0">
               <a:srgbClr val="000000">
-                <a:alpha val="63000"/>
+                <a:alpha val="60000"/>
               </a:srgbClr>
             </a:outerShdw>
           </a:effectLst>
@@ -3583,39 +7914,27 @@
         <a:solidFill>
           <a:schemeClr val="phClr"/>
         </a:solidFill>
-        <a:solidFill>
-          <a:schemeClr val="phClr">
-            <a:tint val="95000"/>
-            <a:satMod val="170000"/>
-          </a:schemeClr>
-        </a:solidFill>
         <a:gradFill rotWithShape="1">
           <a:gsLst>
             <a:gs pos="0">
               <a:schemeClr val="phClr">
-                <a:tint val="93000"/>
-                <a:satMod val="150000"/>
-                <a:shade val="98000"/>
-                <a:lumMod val="102000"/>
-              </a:schemeClr>
-            </a:gs>
-            <a:gs pos="50000">
-              <a:schemeClr val="phClr">
-                <a:tint val="98000"/>
-                <a:satMod val="130000"/>
-                <a:shade val="90000"/>
-                <a:lumMod val="103000"/>
+                <a:tint val="90000"/>
+                <a:lumMod val="110000"/>
               </a:schemeClr>
             </a:gs>
             <a:gs pos="100000">
               <a:schemeClr val="phClr">
-                <a:shade val="63000"/>
-                <a:satMod val="120000"/>
+                <a:shade val="88000"/>
+                <a:lumMod val="98000"/>
               </a:schemeClr>
             </a:gs>
           </a:gsLst>
           <a:lin ang="5400000" scaled="0"/>
         </a:gradFill>
+        <a:blipFill>
+          <a:blip xmlns:r="http://schemas.openxmlformats.org/officeDocument/2006/relationships" r:embed="rId2"/>
+          <a:stretch/>
+        </a:blipFill>
       </a:bgFillStyleLst>
     </a:fmtScheme>
   </a:themeElements>
@@ -3623,7 +7942,7 @@
   <a:extraClrSchemeLst/>
   <a:extLst>
     <a:ext uri="{05A4C25C-085E-4340-85A3-A5531E510DB2}">
-      <thm15:themeFamily xmlns:thm15="http://schemas.microsoft.com/office/thememl/2012/main" name="Office Theme" id="{62F939B6-93AF-4DB8-9C6B-D6C7DFDC589F}" vid="{4A3C46E8-61CC-4603-A589-7422A47A8E4A}"/>
+      <thm15:themeFamily xmlns:thm15="http://schemas.microsoft.com/office/thememl/2012/main" name="Organic" id="{28CDC826-8792-45C0-861B-85EB3ADEDA33}" vid="{7DAC20F1-423D-49E2-BD0B-50532748BAD0}"/>
     </a:ext>
   </a:extLst>
 </a:theme>
